--- a/docs/content/05-teaching-resources/slides/cyber-security/09-incident-management-and-forensics.pptx
+++ b/docs/content/05-teaching-resources/slides/cyber-security/09-incident-management-and-forensics.pptx
@@ -8,13 +8,19 @@
     <p:sldId id="256" r:id="rId7"/>
     <p:sldId id="257" r:id="rId8"/>
     <p:sldId id="258" r:id="rId9"/>
-    <p:sldId id="259" r:id="rId11"/>
+    <p:sldId id="259" r:id="rId10"/>
     <p:sldId id="260" r:id="rId12"/>
     <p:sldId id="261" r:id="rId13"/>
     <p:sldId id="262" r:id="rId14"/>
     <p:sldId id="263" r:id="rId15"/>
     <p:sldId id="264" r:id="rId16"/>
     <p:sldId id="265" r:id="rId17"/>
+    <p:sldId id="266" r:id="rId18"/>
+    <p:sldId id="267" r:id="rId19"/>
+    <p:sldId id="268" r:id="rId20"/>
+    <p:sldId id="269" r:id="rId21"/>
+    <p:sldId id="270" r:id="rId22"/>
+    <p:sldId id="271" r:id="rId23"/>
   </p:sldIdLst>
   <p:sldSz cx="12191695" cy="6858000" type="screen4x3"/>
   <p:notesSz cx="6858000" cy="9144000"/>
@@ -581,7 +587,22 @@
           <a:lstStyle/>
           <a:p>
             <a:r>
-              <a:t>Crimes are reported to the police and personal data breaches to the ICO.</a:t>
+              <a:t>Answers:</a:t>
+            </a:r>
+          </a:p>
+          <a:p>
+            <a:r>
+              <a:t>1. Preservation.</a:t>
+            </a:r>
+          </a:p>
+          <a:p>
+            <a:r>
+              <a:t>2. So the original isn't altered.</a:t>
+            </a:r>
+          </a:p>
+          <a:p>
+            <a:r>
+              <a:t>3. To prove the evidence is reliable and wasn't tampered with.</a:t>
             </a:r>
           </a:p>
         </p:txBody>
@@ -651,7 +672,7 @@
           <a:lstStyle/>
           <a:p>
             <a:r>
-              <a:t>Give students a few minutes to answer on mini whiteboards or paper, then reveal the answers on the next slide.</a:t>
+              <a:t>Crimes are reported to the police and personal data breaches to the ICO.</a:t>
             </a:r>
           </a:p>
         </p:txBody>
@@ -721,7 +742,22 @@
           <a:lstStyle/>
           <a:p>
             <a:r>
-              <a:t>Talk through any answers the class found difficult.</a:t>
+              <a:t>Answers:</a:t>
+            </a:r>
+          </a:p>
+          <a:p>
+            <a:r>
+              <a:t>1. The ICO.</a:t>
+            </a:r>
+          </a:p>
+          <a:p>
+            <a:r>
+              <a:t>2. A workaround is temporary; a fix is permanent.</a:t>
+            </a:r>
+          </a:p>
+          <a:p>
+            <a:r>
+              <a:t>3. By its business impact.</a:t>
             </a:r>
           </a:p>
         </p:txBody>
@@ -747,6 +783,231 @@
 </file>
 
 <file path=ppt/notesSlides/notesSlide5.xml><?xml version="1.0" encoding="utf-8"?>
+<p:notes xmlns:a="http://schemas.openxmlformats.org/drawingml/2006/main" xmlns:p="http://schemas.openxmlformats.org/presentationml/2006/main" xmlns:r="http://schemas.openxmlformats.org/officeDocument/2006/relationships">
+  <p:cSld>
+    <p:spTree>
+      <p:nvGrpSpPr>
+        <p:cNvPr id="1" name=""/>
+        <p:cNvGrpSpPr/>
+        <p:nvPr/>
+      </p:nvGrpSpPr>
+      <p:grpSpPr>
+        <a:xfrm>
+          <a:off x="0" y="0"/>
+          <a:ext cx="0" cy="0"/>
+          <a:chOff x="0" y="0"/>
+          <a:chExt cx="0" cy="0"/>
+        </a:xfrm>
+      </p:grpSpPr>
+      <p:sp>
+        <p:nvSpPr>
+          <p:cNvPr id="2" name="Slide Image Placeholder 1"/>
+          <p:cNvSpPr>
+            <a:spLocks noGrp="1"/>
+          </p:cNvSpPr>
+          <p:nvPr>
+            <p:ph type="sldImg" idx="2"/>
+          </p:nvPr>
+        </p:nvSpPr>
+        <p:spPr/>
+      </p:sp>
+      <p:sp>
+        <p:nvSpPr>
+          <p:cNvPr id="3" name="Notes Placeholder 2"/>
+          <p:cNvSpPr>
+            <a:spLocks noGrp="1"/>
+          </p:cNvSpPr>
+          <p:nvPr>
+            <p:ph type="body" idx="3" sz="quarter"/>
+          </p:nvPr>
+        </p:nvSpPr>
+        <p:spPr/>
+        <p:txBody>
+          <a:bodyPr/>
+          <a:lstStyle/>
+          <a:p>
+            <a:r>
+              <a:t>Answers:</a:t>
+            </a:r>
+          </a:p>
+          <a:p>
+            <a:r>
+              <a:t>1. Evidence in memory is lost when it's powered off.</a:t>
+            </a:r>
+          </a:p>
+          <a:p>
+            <a:r>
+              <a:t>2. The date, time and a description.</a:t>
+            </a:r>
+          </a:p>
+          <a:p>
+            <a:r>
+              <a:t>3. They may be overwritten or deleted.</a:t>
+            </a:r>
+          </a:p>
+        </p:txBody>
+      </p:sp>
+      <p:sp>
+        <p:nvSpPr>
+          <p:cNvPr id="4" name="Slide Number Placeholder 3"/>
+          <p:cNvSpPr>
+            <a:spLocks noGrp="1"/>
+          </p:cNvSpPr>
+          <p:nvPr>
+            <p:ph type="sldNum" idx="5" sz="quarter"/>
+          </p:nvPr>
+        </p:nvSpPr>
+        <p:spPr/>
+      </p:sp>
+    </p:spTree>
+  </p:cSld>
+  <p:clrMapOvr>
+    <a:masterClrMapping/>
+  </p:clrMapOvr>
+</p:notes>
+</file>
+
+<file path=ppt/notesSlides/notesSlide6.xml><?xml version="1.0" encoding="utf-8"?>
+<p:notes xmlns:a="http://schemas.openxmlformats.org/drawingml/2006/main" xmlns:p="http://schemas.openxmlformats.org/presentationml/2006/main" xmlns:r="http://schemas.openxmlformats.org/officeDocument/2006/relationships">
+  <p:cSld>
+    <p:spTree>
+      <p:nvGrpSpPr>
+        <p:cNvPr id="1" name=""/>
+        <p:cNvGrpSpPr/>
+        <p:nvPr/>
+      </p:nvGrpSpPr>
+      <p:grpSpPr>
+        <a:xfrm>
+          <a:off x="0" y="0"/>
+          <a:ext cx="0" cy="0"/>
+          <a:chOff x="0" y="0"/>
+          <a:chExt cx="0" cy="0"/>
+        </a:xfrm>
+      </p:grpSpPr>
+      <p:sp>
+        <p:nvSpPr>
+          <p:cNvPr id="2" name="Slide Image Placeholder 1"/>
+          <p:cNvSpPr>
+            <a:spLocks noGrp="1"/>
+          </p:cNvSpPr>
+          <p:nvPr>
+            <p:ph type="sldImg" idx="2"/>
+          </p:nvPr>
+        </p:nvSpPr>
+        <p:spPr/>
+      </p:sp>
+      <p:sp>
+        <p:nvSpPr>
+          <p:cNvPr id="3" name="Notes Placeholder 2"/>
+          <p:cNvSpPr>
+            <a:spLocks noGrp="1"/>
+          </p:cNvSpPr>
+          <p:nvPr>
+            <p:ph type="body" idx="3" sz="quarter"/>
+          </p:nvPr>
+        </p:nvSpPr>
+        <p:spPr/>
+        <p:txBody>
+          <a:bodyPr/>
+          <a:lstStyle/>
+          <a:p>
+            <a:r>
+              <a:t>Give students a few minutes to answer on mini whiteboards or paper, then reveal the answers on the next slide.</a:t>
+            </a:r>
+          </a:p>
+        </p:txBody>
+      </p:sp>
+      <p:sp>
+        <p:nvSpPr>
+          <p:cNvPr id="4" name="Slide Number Placeholder 3"/>
+          <p:cNvSpPr>
+            <a:spLocks noGrp="1"/>
+          </p:cNvSpPr>
+          <p:nvPr>
+            <p:ph type="sldNum" idx="5" sz="quarter"/>
+          </p:nvPr>
+        </p:nvSpPr>
+        <p:spPr/>
+      </p:sp>
+    </p:spTree>
+  </p:cSld>
+  <p:clrMapOvr>
+    <a:masterClrMapping/>
+  </p:clrMapOvr>
+</p:notes>
+</file>
+
+<file path=ppt/notesSlides/notesSlide7.xml><?xml version="1.0" encoding="utf-8"?>
+<p:notes xmlns:a="http://schemas.openxmlformats.org/drawingml/2006/main" xmlns:p="http://schemas.openxmlformats.org/presentationml/2006/main" xmlns:r="http://schemas.openxmlformats.org/officeDocument/2006/relationships">
+  <p:cSld>
+    <p:spTree>
+      <p:nvGrpSpPr>
+        <p:cNvPr id="1" name=""/>
+        <p:cNvGrpSpPr/>
+        <p:nvPr/>
+      </p:nvGrpSpPr>
+      <p:grpSpPr>
+        <a:xfrm>
+          <a:off x="0" y="0"/>
+          <a:ext cx="0" cy="0"/>
+          <a:chOff x="0" y="0"/>
+          <a:chExt cx="0" cy="0"/>
+        </a:xfrm>
+      </p:grpSpPr>
+      <p:sp>
+        <p:nvSpPr>
+          <p:cNvPr id="2" name="Slide Image Placeholder 1"/>
+          <p:cNvSpPr>
+            <a:spLocks noGrp="1"/>
+          </p:cNvSpPr>
+          <p:nvPr>
+            <p:ph type="sldImg" idx="2"/>
+          </p:nvPr>
+        </p:nvSpPr>
+        <p:spPr/>
+      </p:sp>
+      <p:sp>
+        <p:nvSpPr>
+          <p:cNvPr id="3" name="Notes Placeholder 2"/>
+          <p:cNvSpPr>
+            <a:spLocks noGrp="1"/>
+          </p:cNvSpPr>
+          <p:nvPr>
+            <p:ph type="body" idx="3" sz="quarter"/>
+          </p:nvPr>
+        </p:nvSpPr>
+        <p:spPr/>
+        <p:txBody>
+          <a:bodyPr/>
+          <a:lstStyle/>
+          <a:p>
+            <a:r>
+              <a:t>Talk through any answers the class found difficult.</a:t>
+            </a:r>
+          </a:p>
+        </p:txBody>
+      </p:sp>
+      <p:sp>
+        <p:nvSpPr>
+          <p:cNvPr id="4" name="Slide Number Placeholder 3"/>
+          <p:cNvSpPr>
+            <a:spLocks noGrp="1"/>
+          </p:cNvSpPr>
+          <p:nvPr>
+            <p:ph type="sldNum" idx="5" sz="quarter"/>
+          </p:nvPr>
+        </p:nvSpPr>
+        <p:spPr/>
+      </p:sp>
+    </p:spTree>
+  </p:cSld>
+  <p:clrMapOvr>
+    <a:masterClrMapping/>
+  </p:clrMapOvr>
+</p:notes>
+</file>
+
+<file path=ppt/notesSlides/notesSlide8.xml><?xml version="1.0" encoding="utf-8"?>
 <p:notes xmlns:a="http://schemas.openxmlformats.org/drawingml/2006/main" xmlns:p="http://schemas.openxmlformats.org/presentationml/2006/main" xmlns:r="http://schemas.openxmlformats.org/officeDocument/2006/relationships">
   <p:cSld>
     <p:spTree>
@@ -4122,6 +4383,3576 @@
     <p:bg>
       <p:bgPr>
         <a:solidFill>
+          <a:srgbClr val="FFFFFF"/>
+        </a:solidFill>
+        <a:effectLst/>
+      </p:bgPr>
+    </p:bg>
+    <p:spTree>
+      <p:nvGrpSpPr>
+        <p:cNvPr id="1" name=""/>
+        <p:cNvGrpSpPr/>
+        <p:nvPr/>
+      </p:nvGrpSpPr>
+      <p:grpSpPr/>
+      <p:sp>
+        <p:nvSpPr>
+          <p:cNvPr id="2" name="TextBox 1"/>
+          <p:cNvSpPr txBox="1"/>
+          <p:nvPr/>
+        </p:nvSpPr>
+        <p:spPr>
+          <a:xfrm>
+            <a:off x="548640" y="320040"/>
+            <a:ext cx="11094415" cy="274320"/>
+          </a:xfrm>
+          <a:prstGeom prst="rect">
+            <a:avLst/>
+          </a:prstGeom>
+          <a:noFill/>
+        </p:spPr>
+        <p:txBody>
+          <a:bodyPr wrap="square" anchor="t" lIns="0" rIns="0" tIns="0" bIns="0"/>
+          <a:lstStyle/>
+          <a:p>
+            <a:pPr algn="l"/>
+            <a:r>
+              <a:rPr sz="1100" b="1" i="0">
+                <a:solidFill>
+                  <a:srgbClr val="54595D"/>
+                </a:solidFill>
+                <a:latin typeface="Calibri"/>
+              </a:rPr>
+              <a:t>CYBER SECURITY  ·  Cyber Security Content Area 2</a:t>
+            </a:r>
+          </a:p>
+        </p:txBody>
+      </p:sp>
+      <p:sp>
+        <p:nvSpPr>
+          <p:cNvPr id="3" name="TextBox 2"/>
+          <p:cNvSpPr txBox="1"/>
+          <p:nvPr/>
+        </p:nvSpPr>
+        <p:spPr>
+          <a:xfrm>
+            <a:off x="548640" y="566928"/>
+            <a:ext cx="11094415" cy="822960"/>
+          </a:xfrm>
+          <a:prstGeom prst="rect">
+            <a:avLst/>
+          </a:prstGeom>
+          <a:noFill/>
+        </p:spPr>
+        <p:txBody>
+          <a:bodyPr wrap="square" anchor="ctr" lIns="0" rIns="0" tIns="0" bIns="0"/>
+          <a:lstStyle/>
+          <a:p>
+            <a:pPr algn="l"/>
+            <a:r>
+              <a:rPr sz="3200" b="1" i="0">
+                <a:solidFill>
+                  <a:srgbClr val="03306E"/>
+                </a:solidFill>
+                <a:latin typeface="Cambria"/>
+              </a:rPr>
+              <a:t>Escalating while preserving evidence</a:t>
+            </a:r>
+          </a:p>
+        </p:txBody>
+      </p:sp>
+      <p:sp>
+        <p:nvSpPr>
+          <p:cNvPr id="4" name="TextBox 3"/>
+          <p:cNvSpPr txBox="1"/>
+          <p:nvPr/>
+        </p:nvSpPr>
+        <p:spPr>
+          <a:xfrm>
+            <a:off x="548640" y="6446520"/>
+            <a:ext cx="8229600" cy="274320"/>
+          </a:xfrm>
+          <a:prstGeom prst="rect">
+            <a:avLst/>
+          </a:prstGeom>
+          <a:noFill/>
+        </p:spPr>
+        <p:txBody>
+          <a:bodyPr wrap="square" anchor="t" lIns="0" rIns="0" tIns="0" bIns="0"/>
+          <a:lstStyle/>
+          <a:p>
+            <a:pPr algn="l"/>
+            <a:r>
+              <a:rPr sz="1000" b="0" i="0">
+                <a:solidFill>
+                  <a:srgbClr val="54595D"/>
+                </a:solidFill>
+                <a:latin typeface="Calibri"/>
+              </a:rPr>
+              <a:t>Digital Support and Security T Level  ·  Incident Management and Digital Forensics</a:t>
+            </a:r>
+          </a:p>
+        </p:txBody>
+      </p:sp>
+      <p:sp>
+        <p:nvSpPr>
+          <p:cNvPr id="5" name="TextBox 4"/>
+          <p:cNvSpPr txBox="1"/>
+          <p:nvPr/>
+        </p:nvSpPr>
+        <p:spPr>
+          <a:xfrm>
+            <a:off x="10728655" y="6446520"/>
+            <a:ext cx="914400" cy="274320"/>
+          </a:xfrm>
+          <a:prstGeom prst="rect">
+            <a:avLst/>
+          </a:prstGeom>
+          <a:noFill/>
+        </p:spPr>
+        <p:txBody>
+          <a:bodyPr wrap="square" anchor="t" lIns="0" rIns="0" tIns="0" bIns="0"/>
+          <a:lstStyle/>
+          <a:p>
+            <a:pPr algn="r"/>
+            <a:r>
+              <a:rPr sz="1000" b="0" i="0">
+                <a:solidFill>
+                  <a:srgbClr val="54595D"/>
+                </a:solidFill>
+                <a:latin typeface="Calibri"/>
+              </a:rPr>
+              <a:t>10</a:t>
+            </a:r>
+          </a:p>
+        </p:txBody>
+      </p:sp>
+      <p:sp>
+        <p:nvSpPr>
+          <p:cNvPr id="6" name="TextBox 5"/>
+          <p:cNvSpPr txBox="1"/>
+          <p:nvPr/>
+        </p:nvSpPr>
+        <p:spPr>
+          <a:xfrm>
+            <a:off x="548640" y="1554480"/>
+            <a:ext cx="6720840" cy="4617720"/>
+          </a:xfrm>
+          <a:prstGeom prst="rect">
+            <a:avLst/>
+          </a:prstGeom>
+          <a:noFill/>
+        </p:spPr>
+        <p:txBody>
+          <a:bodyPr wrap="square" lIns="0" rIns="0" tIns="0" bIns="0">
+            <a:spAutoFit/>
+          </a:bodyPr>
+          <a:lstStyle/>
+          <a:p>
+            <a:pPr>
+              <a:spcAft>
+                <a:spcPts val="1320"/>
+              </a:spcAft>
+            </a:pPr>
+            <a:r>
+              <a:rPr sz="2200" b="0">
+                <a:solidFill>
+                  <a:srgbClr val="202122"/>
+                </a:solidFill>
+                <a:latin typeface="Calibri"/>
+              </a:rPr>
+              <a:t>When you find a security incident, what you do first can destroy or protect evidence.</a:t>
+            </a:r>
+          </a:p>
+          <a:p>
+            <a:pPr>
+              <a:spcAft>
+                <a:spcPts val="1320"/>
+              </a:spcAft>
+            </a:pPr>
+            <a:r>
+              <a:rPr sz="2200" b="0">
+                <a:solidFill>
+                  <a:srgbClr val="202122"/>
+                </a:solidFill>
+                <a:latin typeface="Calibri"/>
+              </a:rPr>
+              <a:t>Record the date, time and a description of what you saw. Take appropriate action, usually isolating the device from the network to stop the spread. Preserve digital evidence, for example by copying the relevant log files before they're overwritten. Escalate to the right person or team.</a:t>
+            </a:r>
+          </a:p>
+          <a:p>
+            <a:pPr>
+              <a:spcAft>
+                <a:spcPts val="1320"/>
+              </a:spcAft>
+            </a:pPr>
+            <a:r>
+              <a:rPr sz="2200" b="0">
+                <a:solidFill>
+                  <a:srgbClr val="202122"/>
+                </a:solidFill>
+                <a:latin typeface="Calibri"/>
+              </a:rPr>
+              <a:t>Isolating rather than switching off matters: memory holds valuable evidence, such as running processes and encryption keys, that is lost at power-off.</a:t>
+            </a:r>
+          </a:p>
+        </p:txBody>
+      </p:sp>
+      <p:sp>
+        <p:nvSpPr>
+          <p:cNvPr id="7" name="Rounded Rectangle 6"/>
+          <p:cNvSpPr/>
+          <p:nvPr/>
+        </p:nvSpPr>
+        <p:spPr>
+          <a:xfrm>
+            <a:off x="7772400" y="1554480"/>
+            <a:ext cx="3867912" cy="4526280"/>
+          </a:xfrm>
+          <a:prstGeom prst="roundRect">
+            <a:avLst>
+              <a:gd name="adj" fmla="val 8000"/>
+            </a:avLst>
+          </a:prstGeom>
+          <a:solidFill>
+            <a:srgbClr val="03306E"/>
+          </a:solidFill>
+          <a:ln>
+            <a:noFill/>
+          </a:ln>
+          <a:effectLst/>
+        </p:spPr>
+        <p:style>
+          <a:lnRef idx="1">
+            <a:schemeClr val="accent1"/>
+          </a:lnRef>
+          <a:fillRef idx="3">
+            <a:schemeClr val="accent1"/>
+          </a:fillRef>
+          <a:effectRef idx="2">
+            <a:schemeClr val="accent1"/>
+          </a:effectRef>
+          <a:fontRef idx="minor">
+            <a:schemeClr val="lt1"/>
+          </a:fontRef>
+        </p:style>
+        <p:txBody>
+          <a:bodyPr rtlCol="0" anchor="ctr"/>
+          <a:lstStyle/>
+          <a:p/>
+        </p:txBody>
+      </p:sp>
+      <p:sp>
+        <p:nvSpPr>
+          <p:cNvPr id="8" name="Oval 7"/>
+          <p:cNvSpPr/>
+          <p:nvPr/>
+        </p:nvSpPr>
+        <p:spPr>
+          <a:xfrm>
+            <a:off x="8046720" y="1828800"/>
+            <a:ext cx="548640" cy="548640"/>
+          </a:xfrm>
+          <a:prstGeom prst="ellipse">
+            <a:avLst/>
+          </a:prstGeom>
+          <a:solidFill>
+            <a:srgbClr val="E0463A"/>
+          </a:solidFill>
+          <a:ln>
+            <a:noFill/>
+          </a:ln>
+          <a:effectLst/>
+        </p:spPr>
+        <p:style>
+          <a:lnRef idx="1">
+            <a:schemeClr val="accent1"/>
+          </a:lnRef>
+          <a:fillRef idx="3">
+            <a:schemeClr val="accent1"/>
+          </a:fillRef>
+          <a:effectRef idx="2">
+            <a:schemeClr val="accent1"/>
+          </a:effectRef>
+          <a:fontRef idx="minor">
+            <a:schemeClr val="lt1"/>
+          </a:fontRef>
+        </p:style>
+        <p:txBody>
+          <a:bodyPr rtlCol="0" anchor="ctr" lIns="0" rIns="0" tIns="0" bIns="0"/>
+          <a:lstStyle/>
+          <a:p>
+            <a:pPr algn="ctr"/>
+            <a:r>
+              <a:rPr sz="1300" b="1">
+                <a:solidFill>
+                  <a:srgbClr val="FFFFFF"/>
+                </a:solidFill>
+                <a:latin typeface="Calibri"/>
+              </a:rPr>
+              <a:t>e.g.</a:t>
+            </a:r>
+          </a:p>
+        </p:txBody>
+      </p:sp>
+      <p:sp>
+        <p:nvSpPr>
+          <p:cNvPr id="9" name="TextBox 8"/>
+          <p:cNvSpPr txBox="1"/>
+          <p:nvPr/>
+        </p:nvSpPr>
+        <p:spPr>
+          <a:xfrm>
+            <a:off x="8046720" y="2560320"/>
+            <a:ext cx="3291840" cy="365760"/>
+          </a:xfrm>
+          <a:prstGeom prst="rect">
+            <a:avLst/>
+          </a:prstGeom>
+          <a:noFill/>
+        </p:spPr>
+        <p:txBody>
+          <a:bodyPr wrap="square" anchor="t" lIns="0" rIns="0" tIns="0" bIns="0"/>
+          <a:lstStyle/>
+          <a:p>
+            <a:pPr algn="l"/>
+            <a:r>
+              <a:rPr sz="1300" b="1" i="0">
+                <a:solidFill>
+                  <a:srgbClr val="A9C8F0"/>
+                </a:solidFill>
+                <a:latin typeface="Calibri"/>
+              </a:rPr>
+              <a:t>EXAMPLE</a:t>
+            </a:r>
+          </a:p>
+        </p:txBody>
+      </p:sp>
+      <p:sp>
+        <p:nvSpPr>
+          <p:cNvPr id="10" name="TextBox 9"/>
+          <p:cNvSpPr txBox="1"/>
+          <p:nvPr/>
+        </p:nvSpPr>
+        <p:spPr>
+          <a:xfrm>
+            <a:off x="8046720" y="2971800"/>
+            <a:ext cx="3291840" cy="2971800"/>
+          </a:xfrm>
+          <a:prstGeom prst="rect">
+            <a:avLst/>
+          </a:prstGeom>
+          <a:noFill/>
+        </p:spPr>
+        <p:txBody>
+          <a:bodyPr wrap="square" anchor="t" lIns="0" rIns="0" tIns="0" bIns="0"/>
+          <a:lstStyle/>
+          <a:p>
+            <a:pPr algn="l"/>
+            <a:r>
+              <a:rPr sz="1900" b="0" i="0">
+                <a:solidFill>
+                  <a:srgbClr val="FFFFFF"/>
+                </a:solidFill>
+                <a:latin typeface="Cambria"/>
+              </a:rPr>
+              <a:t>Spotting ransomware on a PC, you unplug the network cable (not the power), note the time and the ransom message, and call the security team.</a:t>
+            </a:r>
+          </a:p>
+        </p:txBody>
+      </p:sp>
+    </p:spTree>
+  </p:cSld>
+  <p:clrMapOvr>
+    <a:masterClrMapping/>
+  </p:clrMapOvr>
+</p:sld>
+</file>
+
+<file path=ppt/slides/slide11.xml><?xml version="1.0" encoding="utf-8"?>
+<p:sld xmlns:a="http://schemas.openxmlformats.org/drawingml/2006/main" xmlns:p="http://schemas.openxmlformats.org/presentationml/2006/main" xmlns:r="http://schemas.openxmlformats.org/officeDocument/2006/relationships">
+  <p:cSld>
+    <p:bg>
+      <p:bgPr>
+        <a:solidFill>
+          <a:srgbClr val="FFFFFF"/>
+        </a:solidFill>
+        <a:effectLst/>
+      </p:bgPr>
+    </p:bg>
+    <p:spTree>
+      <p:nvGrpSpPr>
+        <p:cNvPr id="1" name=""/>
+        <p:cNvGrpSpPr/>
+        <p:nvPr/>
+      </p:nvGrpSpPr>
+      <p:grpSpPr/>
+      <p:sp>
+        <p:nvSpPr>
+          <p:cNvPr id="2" name="TextBox 1"/>
+          <p:cNvSpPr txBox="1"/>
+          <p:nvPr/>
+        </p:nvSpPr>
+        <p:spPr>
+          <a:xfrm>
+            <a:off x="548640" y="320040"/>
+            <a:ext cx="11094415" cy="274320"/>
+          </a:xfrm>
+          <a:prstGeom prst="rect">
+            <a:avLst/>
+          </a:prstGeom>
+          <a:noFill/>
+        </p:spPr>
+        <p:txBody>
+          <a:bodyPr wrap="square" anchor="t" lIns="0" rIns="0" tIns="0" bIns="0"/>
+          <a:lstStyle/>
+          <a:p>
+            <a:pPr algn="l"/>
+            <a:r>
+              <a:rPr sz="1100" b="1" i="0">
+                <a:solidFill>
+                  <a:srgbClr val="54595D"/>
+                </a:solidFill>
+                <a:latin typeface="Calibri"/>
+              </a:rPr>
+              <a:t>CYBER SECURITY  ·  Cyber Security Content Area 2</a:t>
+            </a:r>
+          </a:p>
+        </p:txBody>
+      </p:sp>
+      <p:sp>
+        <p:nvSpPr>
+          <p:cNvPr id="3" name="TextBox 2"/>
+          <p:cNvSpPr txBox="1"/>
+          <p:nvPr/>
+        </p:nvSpPr>
+        <p:spPr>
+          <a:xfrm>
+            <a:off x="548640" y="566928"/>
+            <a:ext cx="11094415" cy="822960"/>
+          </a:xfrm>
+          <a:prstGeom prst="rect">
+            <a:avLst/>
+          </a:prstGeom>
+          <a:noFill/>
+        </p:spPr>
+        <p:txBody>
+          <a:bodyPr wrap="square" anchor="ctr" lIns="0" rIns="0" tIns="0" bIns="0"/>
+          <a:lstStyle/>
+          <a:p>
+            <a:pPr algn="l"/>
+            <a:r>
+              <a:rPr sz="3200" b="1" i="0">
+                <a:solidFill>
+                  <a:srgbClr val="03306E"/>
+                </a:solidFill>
+                <a:latin typeface="Cambria"/>
+              </a:rPr>
+              <a:t>Escalating while preserving evidence</a:t>
+            </a:r>
+          </a:p>
+        </p:txBody>
+      </p:sp>
+      <p:sp>
+        <p:nvSpPr>
+          <p:cNvPr id="4" name="TextBox 3"/>
+          <p:cNvSpPr txBox="1"/>
+          <p:nvPr/>
+        </p:nvSpPr>
+        <p:spPr>
+          <a:xfrm>
+            <a:off x="548640" y="6446520"/>
+            <a:ext cx="8229600" cy="274320"/>
+          </a:xfrm>
+          <a:prstGeom prst="rect">
+            <a:avLst/>
+          </a:prstGeom>
+          <a:noFill/>
+        </p:spPr>
+        <p:txBody>
+          <a:bodyPr wrap="square" anchor="t" lIns="0" rIns="0" tIns="0" bIns="0"/>
+          <a:lstStyle/>
+          <a:p>
+            <a:pPr algn="l"/>
+            <a:r>
+              <a:rPr sz="1000" b="0" i="0">
+                <a:solidFill>
+                  <a:srgbClr val="54595D"/>
+                </a:solidFill>
+                <a:latin typeface="Calibri"/>
+              </a:rPr>
+              <a:t>Digital Support and Security T Level  ·  Incident Management and Digital Forensics</a:t>
+            </a:r>
+          </a:p>
+        </p:txBody>
+      </p:sp>
+      <p:sp>
+        <p:nvSpPr>
+          <p:cNvPr id="5" name="TextBox 4"/>
+          <p:cNvSpPr txBox="1"/>
+          <p:nvPr/>
+        </p:nvSpPr>
+        <p:spPr>
+          <a:xfrm>
+            <a:off x="10728655" y="6446520"/>
+            <a:ext cx="914400" cy="274320"/>
+          </a:xfrm>
+          <a:prstGeom prst="rect">
+            <a:avLst/>
+          </a:prstGeom>
+          <a:noFill/>
+        </p:spPr>
+        <p:txBody>
+          <a:bodyPr wrap="square" anchor="t" lIns="0" rIns="0" tIns="0" bIns="0"/>
+          <a:lstStyle/>
+          <a:p>
+            <a:pPr algn="r"/>
+            <a:r>
+              <a:rPr sz="1000" b="0" i="0">
+                <a:solidFill>
+                  <a:srgbClr val="54595D"/>
+                </a:solidFill>
+                <a:latin typeface="Calibri"/>
+              </a:rPr>
+              <a:t>11</a:t>
+            </a:r>
+          </a:p>
+        </p:txBody>
+      </p:sp>
+      <p:sp>
+        <p:nvSpPr>
+          <p:cNvPr id="6" name="Rectangle 5"/>
+          <p:cNvSpPr/>
+          <p:nvPr/>
+        </p:nvSpPr>
+        <p:spPr>
+          <a:xfrm>
+            <a:off x="1884006" y="2382012"/>
+            <a:ext cx="8423681" cy="36576"/>
+          </a:xfrm>
+          <a:prstGeom prst="rect">
+            <a:avLst/>
+          </a:prstGeom>
+          <a:solidFill>
+            <a:srgbClr val="A9C8F0"/>
+          </a:solidFill>
+          <a:ln>
+            <a:noFill/>
+          </a:ln>
+          <a:effectLst/>
+        </p:spPr>
+        <p:style>
+          <a:lnRef idx="1">
+            <a:schemeClr val="accent1"/>
+          </a:lnRef>
+          <a:fillRef idx="3">
+            <a:schemeClr val="accent1"/>
+          </a:fillRef>
+          <a:effectRef idx="2">
+            <a:schemeClr val="accent1"/>
+          </a:effectRef>
+          <a:fontRef idx="minor">
+            <a:schemeClr val="lt1"/>
+          </a:fontRef>
+        </p:style>
+        <p:txBody>
+          <a:bodyPr rtlCol="0" anchor="ctr"/>
+          <a:lstStyle/>
+          <a:p/>
+        </p:txBody>
+      </p:sp>
+      <p:sp>
+        <p:nvSpPr>
+          <p:cNvPr id="7" name="Oval 6"/>
+          <p:cNvSpPr/>
+          <p:nvPr/>
+        </p:nvSpPr>
+        <p:spPr>
+          <a:xfrm>
+            <a:off x="1563966" y="2080260"/>
+            <a:ext cx="640080" cy="640080"/>
+          </a:xfrm>
+          <a:prstGeom prst="ellipse">
+            <a:avLst/>
+          </a:prstGeom>
+          <a:solidFill>
+            <a:srgbClr val="E0463A"/>
+          </a:solidFill>
+          <a:ln>
+            <a:noFill/>
+          </a:ln>
+          <a:effectLst/>
+        </p:spPr>
+        <p:style>
+          <a:lnRef idx="1">
+            <a:schemeClr val="accent1"/>
+          </a:lnRef>
+          <a:fillRef idx="3">
+            <a:schemeClr val="accent1"/>
+          </a:fillRef>
+          <a:effectRef idx="2">
+            <a:schemeClr val="accent1"/>
+          </a:effectRef>
+          <a:fontRef idx="minor">
+            <a:schemeClr val="lt1"/>
+          </a:fontRef>
+        </p:style>
+        <p:txBody>
+          <a:bodyPr rtlCol="0" anchor="ctr" lIns="0" rIns="0" tIns="0" bIns="0"/>
+          <a:lstStyle/>
+          <a:p>
+            <a:pPr algn="ctr"/>
+            <a:r>
+              <a:rPr sz="2000" b="1">
+                <a:solidFill>
+                  <a:srgbClr val="FFFFFF"/>
+                </a:solidFill>
+                <a:latin typeface="Calibri"/>
+              </a:rPr>
+              <a:t>1</a:t>
+            </a:r>
+          </a:p>
+        </p:txBody>
+      </p:sp>
+      <p:sp>
+        <p:nvSpPr>
+          <p:cNvPr id="8" name="TextBox 7"/>
+          <p:cNvSpPr txBox="1"/>
+          <p:nvPr/>
+        </p:nvSpPr>
+        <p:spPr>
+          <a:xfrm>
+            <a:off x="548640" y="2857500"/>
+            <a:ext cx="2670733" cy="731520"/>
+          </a:xfrm>
+          <a:prstGeom prst="rect">
+            <a:avLst/>
+          </a:prstGeom>
+          <a:noFill/>
+        </p:spPr>
+        <p:txBody>
+          <a:bodyPr wrap="square" anchor="t" lIns="0" rIns="0" tIns="0" bIns="0"/>
+          <a:lstStyle/>
+          <a:p>
+            <a:pPr algn="ctr"/>
+            <a:r>
+              <a:rPr sz="1700" b="1" i="0">
+                <a:solidFill>
+                  <a:srgbClr val="03306E"/>
+                </a:solidFill>
+                <a:latin typeface="Calibri"/>
+              </a:rPr>
+              <a:t>Record</a:t>
+            </a:r>
+          </a:p>
+        </p:txBody>
+      </p:sp>
+      <p:sp>
+        <p:nvSpPr>
+          <p:cNvPr id="9" name="Rounded Rectangle 8"/>
+          <p:cNvSpPr/>
+          <p:nvPr/>
+        </p:nvSpPr>
+        <p:spPr>
+          <a:xfrm>
+            <a:off x="548640" y="3634740"/>
+            <a:ext cx="2670733" cy="1234439"/>
+          </a:xfrm>
+          <a:prstGeom prst="roundRect">
+            <a:avLst>
+              <a:gd name="adj" fmla="val 6000"/>
+            </a:avLst>
+          </a:prstGeom>
+          <a:solidFill>
+            <a:srgbClr val="EAF3FF"/>
+          </a:solidFill>
+          <a:ln>
+            <a:noFill/>
+          </a:ln>
+          <a:effectLst/>
+        </p:spPr>
+        <p:style>
+          <a:lnRef idx="1">
+            <a:schemeClr val="accent1"/>
+          </a:lnRef>
+          <a:fillRef idx="3">
+            <a:schemeClr val="accent1"/>
+          </a:fillRef>
+          <a:effectRef idx="2">
+            <a:schemeClr val="accent1"/>
+          </a:effectRef>
+          <a:fontRef idx="minor">
+            <a:schemeClr val="lt1"/>
+          </a:fontRef>
+        </p:style>
+        <p:txBody>
+          <a:bodyPr rtlCol="0" anchor="ctr"/>
+          <a:lstStyle/>
+          <a:p/>
+        </p:txBody>
+      </p:sp>
+      <p:sp>
+        <p:nvSpPr>
+          <p:cNvPr id="10" name="TextBox 9"/>
+          <p:cNvSpPr txBox="1"/>
+          <p:nvPr/>
+        </p:nvSpPr>
+        <p:spPr>
+          <a:xfrm>
+            <a:off x="685800" y="3771900"/>
+            <a:ext cx="2396413" cy="960119"/>
+          </a:xfrm>
+          <a:prstGeom prst="rect">
+            <a:avLst/>
+          </a:prstGeom>
+          <a:noFill/>
+        </p:spPr>
+        <p:txBody>
+          <a:bodyPr wrap="square" anchor="t" lIns="0" rIns="0" tIns="0" bIns="0"/>
+          <a:lstStyle/>
+          <a:p>
+            <a:pPr algn="l"/>
+            <a:r>
+              <a:rPr sz="1800" b="0" i="0">
+                <a:solidFill>
+                  <a:srgbClr val="202122"/>
+                </a:solidFill>
+                <a:latin typeface="Calibri"/>
+              </a:rPr>
+              <a:t>Date, time and description of the incident.</a:t>
+            </a:r>
+          </a:p>
+        </p:txBody>
+      </p:sp>
+      <p:sp>
+        <p:nvSpPr>
+          <p:cNvPr id="11" name="Oval 10"/>
+          <p:cNvSpPr/>
+          <p:nvPr/>
+        </p:nvSpPr>
+        <p:spPr>
+          <a:xfrm>
+            <a:off x="4371860" y="2080260"/>
+            <a:ext cx="640080" cy="640080"/>
+          </a:xfrm>
+          <a:prstGeom prst="ellipse">
+            <a:avLst/>
+          </a:prstGeom>
+          <a:solidFill>
+            <a:srgbClr val="E0463A"/>
+          </a:solidFill>
+          <a:ln>
+            <a:noFill/>
+          </a:ln>
+          <a:effectLst/>
+        </p:spPr>
+        <p:style>
+          <a:lnRef idx="1">
+            <a:schemeClr val="accent1"/>
+          </a:lnRef>
+          <a:fillRef idx="3">
+            <a:schemeClr val="accent1"/>
+          </a:fillRef>
+          <a:effectRef idx="2">
+            <a:schemeClr val="accent1"/>
+          </a:effectRef>
+          <a:fontRef idx="minor">
+            <a:schemeClr val="lt1"/>
+          </a:fontRef>
+        </p:style>
+        <p:txBody>
+          <a:bodyPr rtlCol="0" anchor="ctr" lIns="0" rIns="0" tIns="0" bIns="0"/>
+          <a:lstStyle/>
+          <a:p>
+            <a:pPr algn="ctr"/>
+            <a:r>
+              <a:rPr sz="2000" b="1">
+                <a:solidFill>
+                  <a:srgbClr val="FFFFFF"/>
+                </a:solidFill>
+                <a:latin typeface="Calibri"/>
+              </a:rPr>
+              <a:t>2</a:t>
+            </a:r>
+          </a:p>
+        </p:txBody>
+      </p:sp>
+      <p:sp>
+        <p:nvSpPr>
+          <p:cNvPr id="12" name="TextBox 11"/>
+          <p:cNvSpPr txBox="1"/>
+          <p:nvPr/>
+        </p:nvSpPr>
+        <p:spPr>
+          <a:xfrm>
+            <a:off x="3356533" y="2857500"/>
+            <a:ext cx="2670733" cy="731520"/>
+          </a:xfrm>
+          <a:prstGeom prst="rect">
+            <a:avLst/>
+          </a:prstGeom>
+          <a:noFill/>
+        </p:spPr>
+        <p:txBody>
+          <a:bodyPr wrap="square" anchor="t" lIns="0" rIns="0" tIns="0" bIns="0"/>
+          <a:lstStyle/>
+          <a:p>
+            <a:pPr algn="ctr"/>
+            <a:r>
+              <a:rPr sz="1700" b="1" i="0">
+                <a:solidFill>
+                  <a:srgbClr val="03306E"/>
+                </a:solidFill>
+                <a:latin typeface="Calibri"/>
+              </a:rPr>
+              <a:t>Act</a:t>
+            </a:r>
+          </a:p>
+        </p:txBody>
+      </p:sp>
+      <p:sp>
+        <p:nvSpPr>
+          <p:cNvPr id="13" name="Rounded Rectangle 12"/>
+          <p:cNvSpPr/>
+          <p:nvPr/>
+        </p:nvSpPr>
+        <p:spPr>
+          <a:xfrm>
+            <a:off x="3356533" y="3634740"/>
+            <a:ext cx="2670733" cy="1234439"/>
+          </a:xfrm>
+          <a:prstGeom prst="roundRect">
+            <a:avLst>
+              <a:gd name="adj" fmla="val 6000"/>
+            </a:avLst>
+          </a:prstGeom>
+          <a:solidFill>
+            <a:srgbClr val="EAF3FF"/>
+          </a:solidFill>
+          <a:ln>
+            <a:noFill/>
+          </a:ln>
+          <a:effectLst/>
+        </p:spPr>
+        <p:style>
+          <a:lnRef idx="1">
+            <a:schemeClr val="accent1"/>
+          </a:lnRef>
+          <a:fillRef idx="3">
+            <a:schemeClr val="accent1"/>
+          </a:fillRef>
+          <a:effectRef idx="2">
+            <a:schemeClr val="accent1"/>
+          </a:effectRef>
+          <a:fontRef idx="minor">
+            <a:schemeClr val="lt1"/>
+          </a:fontRef>
+        </p:style>
+        <p:txBody>
+          <a:bodyPr rtlCol="0" anchor="ctr"/>
+          <a:lstStyle/>
+          <a:p/>
+        </p:txBody>
+      </p:sp>
+      <p:sp>
+        <p:nvSpPr>
+          <p:cNvPr id="14" name="TextBox 13"/>
+          <p:cNvSpPr txBox="1"/>
+          <p:nvPr/>
+        </p:nvSpPr>
+        <p:spPr>
+          <a:xfrm>
+            <a:off x="3493693" y="3771900"/>
+            <a:ext cx="2396413" cy="960119"/>
+          </a:xfrm>
+          <a:prstGeom prst="rect">
+            <a:avLst/>
+          </a:prstGeom>
+          <a:noFill/>
+        </p:spPr>
+        <p:txBody>
+          <a:bodyPr wrap="square" anchor="t" lIns="0" rIns="0" tIns="0" bIns="0"/>
+          <a:lstStyle/>
+          <a:p>
+            <a:pPr algn="l"/>
+            <a:r>
+              <a:rPr sz="1800" b="0" i="0">
+                <a:solidFill>
+                  <a:srgbClr val="202122"/>
+                </a:solidFill>
+                <a:latin typeface="Calibri"/>
+              </a:rPr>
+              <a:t>e.g. isolate the device from the network.</a:t>
+            </a:r>
+          </a:p>
+        </p:txBody>
+      </p:sp>
+      <p:sp>
+        <p:nvSpPr>
+          <p:cNvPr id="15" name="Oval 14"/>
+          <p:cNvSpPr/>
+          <p:nvPr/>
+        </p:nvSpPr>
+        <p:spPr>
+          <a:xfrm>
+            <a:off x="7179754" y="2080260"/>
+            <a:ext cx="640080" cy="640080"/>
+          </a:xfrm>
+          <a:prstGeom prst="ellipse">
+            <a:avLst/>
+          </a:prstGeom>
+          <a:solidFill>
+            <a:srgbClr val="E0463A"/>
+          </a:solidFill>
+          <a:ln>
+            <a:noFill/>
+          </a:ln>
+          <a:effectLst/>
+        </p:spPr>
+        <p:style>
+          <a:lnRef idx="1">
+            <a:schemeClr val="accent1"/>
+          </a:lnRef>
+          <a:fillRef idx="3">
+            <a:schemeClr val="accent1"/>
+          </a:fillRef>
+          <a:effectRef idx="2">
+            <a:schemeClr val="accent1"/>
+          </a:effectRef>
+          <a:fontRef idx="minor">
+            <a:schemeClr val="lt1"/>
+          </a:fontRef>
+        </p:style>
+        <p:txBody>
+          <a:bodyPr rtlCol="0" anchor="ctr" lIns="0" rIns="0" tIns="0" bIns="0"/>
+          <a:lstStyle/>
+          <a:p>
+            <a:pPr algn="ctr"/>
+            <a:r>
+              <a:rPr sz="2000" b="1">
+                <a:solidFill>
+                  <a:srgbClr val="FFFFFF"/>
+                </a:solidFill>
+                <a:latin typeface="Calibri"/>
+              </a:rPr>
+              <a:t>3</a:t>
+            </a:r>
+          </a:p>
+        </p:txBody>
+      </p:sp>
+      <p:sp>
+        <p:nvSpPr>
+          <p:cNvPr id="16" name="TextBox 15"/>
+          <p:cNvSpPr txBox="1"/>
+          <p:nvPr/>
+        </p:nvSpPr>
+        <p:spPr>
+          <a:xfrm>
+            <a:off x="6164427" y="2857500"/>
+            <a:ext cx="2670733" cy="731520"/>
+          </a:xfrm>
+          <a:prstGeom prst="rect">
+            <a:avLst/>
+          </a:prstGeom>
+          <a:noFill/>
+        </p:spPr>
+        <p:txBody>
+          <a:bodyPr wrap="square" anchor="t" lIns="0" rIns="0" tIns="0" bIns="0"/>
+          <a:lstStyle/>
+          <a:p>
+            <a:pPr algn="ctr"/>
+            <a:r>
+              <a:rPr sz="1700" b="1" i="0">
+                <a:solidFill>
+                  <a:srgbClr val="03306E"/>
+                </a:solidFill>
+                <a:latin typeface="Calibri"/>
+              </a:rPr>
+              <a:t>Preserve</a:t>
+            </a:r>
+          </a:p>
+        </p:txBody>
+      </p:sp>
+      <p:sp>
+        <p:nvSpPr>
+          <p:cNvPr id="17" name="Rounded Rectangle 16"/>
+          <p:cNvSpPr/>
+          <p:nvPr/>
+        </p:nvSpPr>
+        <p:spPr>
+          <a:xfrm>
+            <a:off x="6164427" y="3634740"/>
+            <a:ext cx="2670733" cy="1234439"/>
+          </a:xfrm>
+          <a:prstGeom prst="roundRect">
+            <a:avLst>
+              <a:gd name="adj" fmla="val 6000"/>
+            </a:avLst>
+          </a:prstGeom>
+          <a:solidFill>
+            <a:srgbClr val="EAF3FF"/>
+          </a:solidFill>
+          <a:ln>
+            <a:noFill/>
+          </a:ln>
+          <a:effectLst/>
+        </p:spPr>
+        <p:style>
+          <a:lnRef idx="1">
+            <a:schemeClr val="accent1"/>
+          </a:lnRef>
+          <a:fillRef idx="3">
+            <a:schemeClr val="accent1"/>
+          </a:fillRef>
+          <a:effectRef idx="2">
+            <a:schemeClr val="accent1"/>
+          </a:effectRef>
+          <a:fontRef idx="minor">
+            <a:schemeClr val="lt1"/>
+          </a:fontRef>
+        </p:style>
+        <p:txBody>
+          <a:bodyPr rtlCol="0" anchor="ctr"/>
+          <a:lstStyle/>
+          <a:p/>
+        </p:txBody>
+      </p:sp>
+      <p:sp>
+        <p:nvSpPr>
+          <p:cNvPr id="18" name="TextBox 17"/>
+          <p:cNvSpPr txBox="1"/>
+          <p:nvPr/>
+        </p:nvSpPr>
+        <p:spPr>
+          <a:xfrm>
+            <a:off x="6301587" y="3771900"/>
+            <a:ext cx="2396413" cy="960119"/>
+          </a:xfrm>
+          <a:prstGeom prst="rect">
+            <a:avLst/>
+          </a:prstGeom>
+          <a:noFill/>
+        </p:spPr>
+        <p:txBody>
+          <a:bodyPr wrap="square" anchor="t" lIns="0" rIns="0" tIns="0" bIns="0"/>
+          <a:lstStyle/>
+          <a:p>
+            <a:pPr algn="l"/>
+            <a:r>
+              <a:rPr sz="1800" b="0" i="0">
+                <a:solidFill>
+                  <a:srgbClr val="202122"/>
+                </a:solidFill>
+                <a:latin typeface="Calibri"/>
+              </a:rPr>
+              <a:t>Copy the relevant log files.</a:t>
+            </a:r>
+          </a:p>
+        </p:txBody>
+      </p:sp>
+      <p:sp>
+        <p:nvSpPr>
+          <p:cNvPr id="19" name="Oval 18"/>
+          <p:cNvSpPr/>
+          <p:nvPr/>
+        </p:nvSpPr>
+        <p:spPr>
+          <a:xfrm>
+            <a:off x="9987648" y="2080260"/>
+            <a:ext cx="640080" cy="640080"/>
+          </a:xfrm>
+          <a:prstGeom prst="ellipse">
+            <a:avLst/>
+          </a:prstGeom>
+          <a:solidFill>
+            <a:srgbClr val="E0463A"/>
+          </a:solidFill>
+          <a:ln>
+            <a:noFill/>
+          </a:ln>
+          <a:effectLst/>
+        </p:spPr>
+        <p:style>
+          <a:lnRef idx="1">
+            <a:schemeClr val="accent1"/>
+          </a:lnRef>
+          <a:fillRef idx="3">
+            <a:schemeClr val="accent1"/>
+          </a:fillRef>
+          <a:effectRef idx="2">
+            <a:schemeClr val="accent1"/>
+          </a:effectRef>
+          <a:fontRef idx="minor">
+            <a:schemeClr val="lt1"/>
+          </a:fontRef>
+        </p:style>
+        <p:txBody>
+          <a:bodyPr rtlCol="0" anchor="ctr" lIns="0" rIns="0" tIns="0" bIns="0"/>
+          <a:lstStyle/>
+          <a:p>
+            <a:pPr algn="ctr"/>
+            <a:r>
+              <a:rPr sz="2000" b="1">
+                <a:solidFill>
+                  <a:srgbClr val="FFFFFF"/>
+                </a:solidFill>
+                <a:latin typeface="Calibri"/>
+              </a:rPr>
+              <a:t>4</a:t>
+            </a:r>
+          </a:p>
+        </p:txBody>
+      </p:sp>
+      <p:sp>
+        <p:nvSpPr>
+          <p:cNvPr id="20" name="TextBox 19"/>
+          <p:cNvSpPr txBox="1"/>
+          <p:nvPr/>
+        </p:nvSpPr>
+        <p:spPr>
+          <a:xfrm>
+            <a:off x="8972321" y="2857500"/>
+            <a:ext cx="2670733" cy="731520"/>
+          </a:xfrm>
+          <a:prstGeom prst="rect">
+            <a:avLst/>
+          </a:prstGeom>
+          <a:noFill/>
+        </p:spPr>
+        <p:txBody>
+          <a:bodyPr wrap="square" anchor="t" lIns="0" rIns="0" tIns="0" bIns="0"/>
+          <a:lstStyle/>
+          <a:p>
+            <a:pPr algn="ctr"/>
+            <a:r>
+              <a:rPr sz="1700" b="1" i="0">
+                <a:solidFill>
+                  <a:srgbClr val="03306E"/>
+                </a:solidFill>
+                <a:latin typeface="Calibri"/>
+              </a:rPr>
+              <a:t>Escalate</a:t>
+            </a:r>
+          </a:p>
+        </p:txBody>
+      </p:sp>
+      <p:sp>
+        <p:nvSpPr>
+          <p:cNvPr id="21" name="Rounded Rectangle 20"/>
+          <p:cNvSpPr/>
+          <p:nvPr/>
+        </p:nvSpPr>
+        <p:spPr>
+          <a:xfrm>
+            <a:off x="8972321" y="3634740"/>
+            <a:ext cx="2670733" cy="1234439"/>
+          </a:xfrm>
+          <a:prstGeom prst="roundRect">
+            <a:avLst>
+              <a:gd name="adj" fmla="val 6000"/>
+            </a:avLst>
+          </a:prstGeom>
+          <a:solidFill>
+            <a:srgbClr val="EAF3FF"/>
+          </a:solidFill>
+          <a:ln>
+            <a:noFill/>
+          </a:ln>
+          <a:effectLst/>
+        </p:spPr>
+        <p:style>
+          <a:lnRef idx="1">
+            <a:schemeClr val="accent1"/>
+          </a:lnRef>
+          <a:fillRef idx="3">
+            <a:schemeClr val="accent1"/>
+          </a:fillRef>
+          <a:effectRef idx="2">
+            <a:schemeClr val="accent1"/>
+          </a:effectRef>
+          <a:fontRef idx="minor">
+            <a:schemeClr val="lt1"/>
+          </a:fontRef>
+        </p:style>
+        <p:txBody>
+          <a:bodyPr rtlCol="0" anchor="ctr"/>
+          <a:lstStyle/>
+          <a:p/>
+        </p:txBody>
+      </p:sp>
+      <p:sp>
+        <p:nvSpPr>
+          <p:cNvPr id="22" name="TextBox 21"/>
+          <p:cNvSpPr txBox="1"/>
+          <p:nvPr/>
+        </p:nvSpPr>
+        <p:spPr>
+          <a:xfrm>
+            <a:off x="9109481" y="3771900"/>
+            <a:ext cx="2396413" cy="960119"/>
+          </a:xfrm>
+          <a:prstGeom prst="rect">
+            <a:avLst/>
+          </a:prstGeom>
+          <a:noFill/>
+        </p:spPr>
+        <p:txBody>
+          <a:bodyPr wrap="square" anchor="t" lIns="0" rIns="0" tIns="0" bIns="0"/>
+          <a:lstStyle/>
+          <a:p>
+            <a:pPr algn="l"/>
+            <a:r>
+              <a:rPr sz="1800" b="0" i="0">
+                <a:solidFill>
+                  <a:srgbClr val="202122"/>
+                </a:solidFill>
+                <a:latin typeface="Calibri"/>
+              </a:rPr>
+              <a:t>Pass to the right person or authority.</a:t>
+            </a:r>
+          </a:p>
+        </p:txBody>
+      </p:sp>
+      <p:sp>
+        <p:nvSpPr>
+          <p:cNvPr id="23" name="TextBox 22"/>
+          <p:cNvSpPr txBox="1"/>
+          <p:nvPr/>
+        </p:nvSpPr>
+        <p:spPr>
+          <a:xfrm>
+            <a:off x="548640" y="5143500"/>
+            <a:ext cx="11094415" cy="548640"/>
+          </a:xfrm>
+          <a:prstGeom prst="rect">
+            <a:avLst/>
+          </a:prstGeom>
+          <a:noFill/>
+        </p:spPr>
+        <p:txBody>
+          <a:bodyPr wrap="square" anchor="t" lIns="0" rIns="0" tIns="0" bIns="0"/>
+          <a:lstStyle/>
+          <a:p>
+            <a:pPr algn="l"/>
+            <a:r>
+              <a:rPr sz="1600" b="0" i="1">
+                <a:solidFill>
+                  <a:srgbClr val="54595D"/>
+                </a:solidFill>
+                <a:latin typeface="Calibri"/>
+              </a:rPr>
+              <a:t>Isolating rather than powering off keeps evidence in memory that would otherwise be lost.</a:t>
+            </a:r>
+          </a:p>
+        </p:txBody>
+      </p:sp>
+    </p:spTree>
+  </p:cSld>
+  <p:clrMapOvr>
+    <a:masterClrMapping/>
+  </p:clrMapOvr>
+</p:sld>
+</file>
+
+<file path=ppt/slides/slide12.xml><?xml version="1.0" encoding="utf-8"?>
+<p:sld xmlns:a="http://schemas.openxmlformats.org/drawingml/2006/main" xmlns:p="http://schemas.openxmlformats.org/presentationml/2006/main" xmlns:r="http://schemas.openxmlformats.org/officeDocument/2006/relationships">
+  <p:cSld>
+    <p:bg>
+      <p:bgPr>
+        <a:solidFill>
+          <a:srgbClr val="FFFFFF"/>
+        </a:solidFill>
+        <a:effectLst/>
+      </p:bgPr>
+    </p:bg>
+    <p:spTree>
+      <p:nvGrpSpPr>
+        <p:cNvPr id="1" name=""/>
+        <p:cNvGrpSpPr/>
+        <p:nvPr/>
+      </p:nvGrpSpPr>
+      <p:grpSpPr/>
+      <p:sp>
+        <p:nvSpPr>
+          <p:cNvPr id="2" name="TextBox 1"/>
+          <p:cNvSpPr txBox="1"/>
+          <p:nvPr/>
+        </p:nvSpPr>
+        <p:spPr>
+          <a:xfrm>
+            <a:off x="548640" y="320040"/>
+            <a:ext cx="11094415" cy="274320"/>
+          </a:xfrm>
+          <a:prstGeom prst="rect">
+            <a:avLst/>
+          </a:prstGeom>
+          <a:noFill/>
+        </p:spPr>
+        <p:txBody>
+          <a:bodyPr wrap="square" anchor="t" lIns="0" rIns="0" tIns="0" bIns="0"/>
+          <a:lstStyle/>
+          <a:p>
+            <a:pPr algn="l"/>
+            <a:r>
+              <a:rPr sz="1100" b="1" i="0">
+                <a:solidFill>
+                  <a:srgbClr val="54595D"/>
+                </a:solidFill>
+                <a:latin typeface="Calibri"/>
+              </a:rPr>
+              <a:t>CYBER SECURITY  ·  Cyber Security Content Area 2</a:t>
+            </a:r>
+          </a:p>
+        </p:txBody>
+      </p:sp>
+      <p:sp>
+        <p:nvSpPr>
+          <p:cNvPr id="3" name="TextBox 2"/>
+          <p:cNvSpPr txBox="1"/>
+          <p:nvPr/>
+        </p:nvSpPr>
+        <p:spPr>
+          <a:xfrm>
+            <a:off x="548640" y="566928"/>
+            <a:ext cx="11094415" cy="822960"/>
+          </a:xfrm>
+          <a:prstGeom prst="rect">
+            <a:avLst/>
+          </a:prstGeom>
+          <a:noFill/>
+        </p:spPr>
+        <p:txBody>
+          <a:bodyPr wrap="square" anchor="ctr" lIns="0" rIns="0" tIns="0" bIns="0"/>
+          <a:lstStyle/>
+          <a:p>
+            <a:pPr algn="l"/>
+            <a:r>
+              <a:rPr sz="3200" b="1" i="0">
+                <a:solidFill>
+                  <a:srgbClr val="03306E"/>
+                </a:solidFill>
+                <a:latin typeface="Cambria"/>
+              </a:rPr>
+              <a:t>Quick check: Escalating while preserving evidence</a:t>
+            </a:r>
+          </a:p>
+        </p:txBody>
+      </p:sp>
+      <p:sp>
+        <p:nvSpPr>
+          <p:cNvPr id="4" name="TextBox 3"/>
+          <p:cNvSpPr txBox="1"/>
+          <p:nvPr/>
+        </p:nvSpPr>
+        <p:spPr>
+          <a:xfrm>
+            <a:off x="548640" y="6446520"/>
+            <a:ext cx="8229600" cy="274320"/>
+          </a:xfrm>
+          <a:prstGeom prst="rect">
+            <a:avLst/>
+          </a:prstGeom>
+          <a:noFill/>
+        </p:spPr>
+        <p:txBody>
+          <a:bodyPr wrap="square" anchor="t" lIns="0" rIns="0" tIns="0" bIns="0"/>
+          <a:lstStyle/>
+          <a:p>
+            <a:pPr algn="l"/>
+            <a:r>
+              <a:rPr sz="1000" b="0" i="0">
+                <a:solidFill>
+                  <a:srgbClr val="54595D"/>
+                </a:solidFill>
+                <a:latin typeface="Calibri"/>
+              </a:rPr>
+              <a:t>Digital Support and Security T Level  ·  Incident Management and Digital Forensics</a:t>
+            </a:r>
+          </a:p>
+        </p:txBody>
+      </p:sp>
+      <p:sp>
+        <p:nvSpPr>
+          <p:cNvPr id="5" name="TextBox 4"/>
+          <p:cNvSpPr txBox="1"/>
+          <p:nvPr/>
+        </p:nvSpPr>
+        <p:spPr>
+          <a:xfrm>
+            <a:off x="10728655" y="6446520"/>
+            <a:ext cx="914400" cy="274320"/>
+          </a:xfrm>
+          <a:prstGeom prst="rect">
+            <a:avLst/>
+          </a:prstGeom>
+          <a:noFill/>
+        </p:spPr>
+        <p:txBody>
+          <a:bodyPr wrap="square" anchor="t" lIns="0" rIns="0" tIns="0" bIns="0"/>
+          <a:lstStyle/>
+          <a:p>
+            <a:pPr algn="r"/>
+            <a:r>
+              <a:rPr sz="1000" b="0" i="0">
+                <a:solidFill>
+                  <a:srgbClr val="54595D"/>
+                </a:solidFill>
+                <a:latin typeface="Calibri"/>
+              </a:rPr>
+              <a:t>12</a:t>
+            </a:r>
+          </a:p>
+        </p:txBody>
+      </p:sp>
+      <p:sp>
+        <p:nvSpPr>
+          <p:cNvPr id="6" name="Oval 5"/>
+          <p:cNvSpPr/>
+          <p:nvPr/>
+        </p:nvSpPr>
+        <p:spPr>
+          <a:xfrm>
+            <a:off x="548640" y="1691640"/>
+            <a:ext cx="502920" cy="502920"/>
+          </a:xfrm>
+          <a:prstGeom prst="ellipse">
+            <a:avLst/>
+          </a:prstGeom>
+          <a:solidFill>
+            <a:srgbClr val="E0463A"/>
+          </a:solidFill>
+          <a:ln>
+            <a:noFill/>
+          </a:ln>
+          <a:effectLst/>
+        </p:spPr>
+        <p:style>
+          <a:lnRef idx="1">
+            <a:schemeClr val="accent1"/>
+          </a:lnRef>
+          <a:fillRef idx="3">
+            <a:schemeClr val="accent1"/>
+          </a:fillRef>
+          <a:effectRef idx="2">
+            <a:schemeClr val="accent1"/>
+          </a:effectRef>
+          <a:fontRef idx="minor">
+            <a:schemeClr val="lt1"/>
+          </a:fontRef>
+        </p:style>
+        <p:txBody>
+          <a:bodyPr rtlCol="0" anchor="ctr" lIns="0" rIns="0" tIns="0" bIns="0"/>
+          <a:lstStyle/>
+          <a:p>
+            <a:pPr algn="ctr"/>
+            <a:r>
+              <a:rPr sz="1600" b="1">
+                <a:solidFill>
+                  <a:srgbClr val="FFFFFF"/>
+                </a:solidFill>
+                <a:latin typeface="Calibri"/>
+              </a:rPr>
+              <a:t>1</a:t>
+            </a:r>
+          </a:p>
+        </p:txBody>
+      </p:sp>
+      <p:sp>
+        <p:nvSpPr>
+          <p:cNvPr id="7" name="TextBox 6"/>
+          <p:cNvSpPr txBox="1"/>
+          <p:nvPr/>
+        </p:nvSpPr>
+        <p:spPr>
+          <a:xfrm>
+            <a:off x="1371600" y="1645920"/>
+            <a:ext cx="10271455" cy="1188720"/>
+          </a:xfrm>
+          <a:prstGeom prst="rect">
+            <a:avLst/>
+          </a:prstGeom>
+          <a:noFill/>
+        </p:spPr>
+        <p:txBody>
+          <a:bodyPr wrap="square" anchor="t" lIns="0" rIns="0" tIns="0" bIns="0"/>
+          <a:lstStyle/>
+          <a:p>
+            <a:pPr algn="l"/>
+            <a:r>
+              <a:rPr sz="2400" b="0" i="0">
+                <a:solidFill>
+                  <a:srgbClr val="202122"/>
+                </a:solidFill>
+                <a:latin typeface="Calibri"/>
+              </a:rPr>
+              <a:t>Why isolate a device rather than turn it off?</a:t>
+            </a:r>
+          </a:p>
+        </p:txBody>
+      </p:sp>
+      <p:sp>
+        <p:nvSpPr>
+          <p:cNvPr id="8" name="Oval 7"/>
+          <p:cNvSpPr/>
+          <p:nvPr/>
+        </p:nvSpPr>
+        <p:spPr>
+          <a:xfrm>
+            <a:off x="548640" y="3108960"/>
+            <a:ext cx="502920" cy="502920"/>
+          </a:xfrm>
+          <a:prstGeom prst="ellipse">
+            <a:avLst/>
+          </a:prstGeom>
+          <a:solidFill>
+            <a:srgbClr val="E0463A"/>
+          </a:solidFill>
+          <a:ln>
+            <a:noFill/>
+          </a:ln>
+          <a:effectLst/>
+        </p:spPr>
+        <p:style>
+          <a:lnRef idx="1">
+            <a:schemeClr val="accent1"/>
+          </a:lnRef>
+          <a:fillRef idx="3">
+            <a:schemeClr val="accent1"/>
+          </a:fillRef>
+          <a:effectRef idx="2">
+            <a:schemeClr val="accent1"/>
+          </a:effectRef>
+          <a:fontRef idx="minor">
+            <a:schemeClr val="lt1"/>
+          </a:fontRef>
+        </p:style>
+        <p:txBody>
+          <a:bodyPr rtlCol="0" anchor="ctr" lIns="0" rIns="0" tIns="0" bIns="0"/>
+          <a:lstStyle/>
+          <a:p>
+            <a:pPr algn="ctr"/>
+            <a:r>
+              <a:rPr sz="1600" b="1">
+                <a:solidFill>
+                  <a:srgbClr val="FFFFFF"/>
+                </a:solidFill>
+                <a:latin typeface="Calibri"/>
+              </a:rPr>
+              <a:t>2</a:t>
+            </a:r>
+          </a:p>
+        </p:txBody>
+      </p:sp>
+      <p:sp>
+        <p:nvSpPr>
+          <p:cNvPr id="9" name="TextBox 8"/>
+          <p:cNvSpPr txBox="1"/>
+          <p:nvPr/>
+        </p:nvSpPr>
+        <p:spPr>
+          <a:xfrm>
+            <a:off x="1371600" y="3063240"/>
+            <a:ext cx="10271455" cy="1188720"/>
+          </a:xfrm>
+          <a:prstGeom prst="rect">
+            <a:avLst/>
+          </a:prstGeom>
+          <a:noFill/>
+        </p:spPr>
+        <p:txBody>
+          <a:bodyPr wrap="square" anchor="t" lIns="0" rIns="0" tIns="0" bIns="0"/>
+          <a:lstStyle/>
+          <a:p>
+            <a:pPr algn="l"/>
+            <a:r>
+              <a:rPr sz="2400" b="0" i="0">
+                <a:solidFill>
+                  <a:srgbClr val="202122"/>
+                </a:solidFill>
+                <a:latin typeface="Calibri"/>
+              </a:rPr>
+              <a:t>What should you record first?</a:t>
+            </a:r>
+          </a:p>
+        </p:txBody>
+      </p:sp>
+      <p:sp>
+        <p:nvSpPr>
+          <p:cNvPr id="10" name="Oval 9"/>
+          <p:cNvSpPr/>
+          <p:nvPr/>
+        </p:nvSpPr>
+        <p:spPr>
+          <a:xfrm>
+            <a:off x="548640" y="4526280"/>
+            <a:ext cx="502920" cy="502920"/>
+          </a:xfrm>
+          <a:prstGeom prst="ellipse">
+            <a:avLst/>
+          </a:prstGeom>
+          <a:solidFill>
+            <a:srgbClr val="E0463A"/>
+          </a:solidFill>
+          <a:ln>
+            <a:noFill/>
+          </a:ln>
+          <a:effectLst/>
+        </p:spPr>
+        <p:style>
+          <a:lnRef idx="1">
+            <a:schemeClr val="accent1"/>
+          </a:lnRef>
+          <a:fillRef idx="3">
+            <a:schemeClr val="accent1"/>
+          </a:fillRef>
+          <a:effectRef idx="2">
+            <a:schemeClr val="accent1"/>
+          </a:effectRef>
+          <a:fontRef idx="minor">
+            <a:schemeClr val="lt1"/>
+          </a:fontRef>
+        </p:style>
+        <p:txBody>
+          <a:bodyPr rtlCol="0" anchor="ctr" lIns="0" rIns="0" tIns="0" bIns="0"/>
+          <a:lstStyle/>
+          <a:p>
+            <a:pPr algn="ctr"/>
+            <a:r>
+              <a:rPr sz="1600" b="1">
+                <a:solidFill>
+                  <a:srgbClr val="FFFFFF"/>
+                </a:solidFill>
+                <a:latin typeface="Calibri"/>
+              </a:rPr>
+              <a:t>3</a:t>
+            </a:r>
+          </a:p>
+        </p:txBody>
+      </p:sp>
+      <p:sp>
+        <p:nvSpPr>
+          <p:cNvPr id="11" name="TextBox 10"/>
+          <p:cNvSpPr txBox="1"/>
+          <p:nvPr/>
+        </p:nvSpPr>
+        <p:spPr>
+          <a:xfrm>
+            <a:off x="1371600" y="4480560"/>
+            <a:ext cx="10271455" cy="1188720"/>
+          </a:xfrm>
+          <a:prstGeom prst="rect">
+            <a:avLst/>
+          </a:prstGeom>
+          <a:noFill/>
+        </p:spPr>
+        <p:txBody>
+          <a:bodyPr wrap="square" anchor="t" lIns="0" rIns="0" tIns="0" bIns="0"/>
+          <a:lstStyle/>
+          <a:p>
+            <a:pPr algn="l"/>
+            <a:r>
+              <a:rPr sz="2400" b="0" i="0">
+                <a:solidFill>
+                  <a:srgbClr val="202122"/>
+                </a:solidFill>
+                <a:latin typeface="Calibri"/>
+              </a:rPr>
+              <a:t>Why copy log files quickly?</a:t>
+            </a:r>
+          </a:p>
+        </p:txBody>
+      </p:sp>
+      <p:sp>
+        <p:nvSpPr>
+          <p:cNvPr id="12" name="TextBox 11"/>
+          <p:cNvSpPr txBox="1"/>
+          <p:nvPr/>
+        </p:nvSpPr>
+        <p:spPr>
+          <a:xfrm>
+            <a:off x="548640" y="5852160"/>
+            <a:ext cx="11094415" cy="365760"/>
+          </a:xfrm>
+          <a:prstGeom prst="rect">
+            <a:avLst/>
+          </a:prstGeom>
+          <a:noFill/>
+        </p:spPr>
+        <p:txBody>
+          <a:bodyPr wrap="square" anchor="t" lIns="0" rIns="0" tIns="0" bIns="0"/>
+          <a:lstStyle/>
+          <a:p>
+            <a:pPr algn="l"/>
+            <a:r>
+              <a:rPr sz="1300" b="0" i="1">
+                <a:solidFill>
+                  <a:srgbClr val="54595D"/>
+                </a:solidFill>
+                <a:latin typeface="Calibri"/>
+              </a:rPr>
+              <a:t>Answer on mini whiteboards or in your book. Answers are in the speaker notes.</a:t>
+            </a:r>
+          </a:p>
+        </p:txBody>
+      </p:sp>
+    </p:spTree>
+  </p:cSld>
+  <p:clrMapOvr>
+    <a:masterClrMapping/>
+  </p:clrMapOvr>
+</p:sld>
+</file>
+
+<file path=ppt/slides/slide13.xml><?xml version="1.0" encoding="utf-8"?>
+<p:sld xmlns:a="http://schemas.openxmlformats.org/drawingml/2006/main" xmlns:p="http://schemas.openxmlformats.org/presentationml/2006/main" xmlns:r="http://schemas.openxmlformats.org/officeDocument/2006/relationships">
+  <p:cSld>
+    <p:bg>
+      <p:bgPr>
+        <a:solidFill>
+          <a:srgbClr val="FFFFFF"/>
+        </a:solidFill>
+        <a:effectLst/>
+      </p:bgPr>
+    </p:bg>
+    <p:spTree>
+      <p:nvGrpSpPr>
+        <p:cNvPr id="1" name=""/>
+        <p:cNvGrpSpPr/>
+        <p:nvPr/>
+      </p:nvGrpSpPr>
+      <p:grpSpPr/>
+      <p:sp>
+        <p:nvSpPr>
+          <p:cNvPr id="2" name="TextBox 1"/>
+          <p:cNvSpPr txBox="1"/>
+          <p:nvPr/>
+        </p:nvSpPr>
+        <p:spPr>
+          <a:xfrm>
+            <a:off x="548640" y="320040"/>
+            <a:ext cx="11094415" cy="274320"/>
+          </a:xfrm>
+          <a:prstGeom prst="rect">
+            <a:avLst/>
+          </a:prstGeom>
+          <a:noFill/>
+        </p:spPr>
+        <p:txBody>
+          <a:bodyPr wrap="square" anchor="t" lIns="0" rIns="0" tIns="0" bIns="0"/>
+          <a:lstStyle/>
+          <a:p>
+            <a:pPr algn="l"/>
+            <a:r>
+              <a:rPr sz="1100" b="1" i="0">
+                <a:solidFill>
+                  <a:srgbClr val="54595D"/>
+                </a:solidFill>
+                <a:latin typeface="Calibri"/>
+              </a:rPr>
+              <a:t>CYBER SECURITY  ·  Cyber Security Content Area 2</a:t>
+            </a:r>
+          </a:p>
+        </p:txBody>
+      </p:sp>
+      <p:sp>
+        <p:nvSpPr>
+          <p:cNvPr id="3" name="TextBox 2"/>
+          <p:cNvSpPr txBox="1"/>
+          <p:nvPr/>
+        </p:nvSpPr>
+        <p:spPr>
+          <a:xfrm>
+            <a:off x="548640" y="566928"/>
+            <a:ext cx="11094415" cy="822960"/>
+          </a:xfrm>
+          <a:prstGeom prst="rect">
+            <a:avLst/>
+          </a:prstGeom>
+          <a:noFill/>
+        </p:spPr>
+        <p:txBody>
+          <a:bodyPr wrap="square" anchor="ctr" lIns="0" rIns="0" tIns="0" bIns="0"/>
+          <a:lstStyle/>
+          <a:p>
+            <a:pPr algn="l"/>
+            <a:r>
+              <a:rPr sz="3200" b="1" i="0">
+                <a:solidFill>
+                  <a:srgbClr val="03306E"/>
+                </a:solidFill>
+                <a:latin typeface="Cambria"/>
+              </a:rPr>
+              <a:t>Check your understanding</a:t>
+            </a:r>
+          </a:p>
+        </p:txBody>
+      </p:sp>
+      <p:sp>
+        <p:nvSpPr>
+          <p:cNvPr id="4" name="TextBox 3"/>
+          <p:cNvSpPr txBox="1"/>
+          <p:nvPr/>
+        </p:nvSpPr>
+        <p:spPr>
+          <a:xfrm>
+            <a:off x="548640" y="6446520"/>
+            <a:ext cx="8229600" cy="274320"/>
+          </a:xfrm>
+          <a:prstGeom prst="rect">
+            <a:avLst/>
+          </a:prstGeom>
+          <a:noFill/>
+        </p:spPr>
+        <p:txBody>
+          <a:bodyPr wrap="square" anchor="t" lIns="0" rIns="0" tIns="0" bIns="0"/>
+          <a:lstStyle/>
+          <a:p>
+            <a:pPr algn="l"/>
+            <a:r>
+              <a:rPr sz="1000" b="0" i="0">
+                <a:solidFill>
+                  <a:srgbClr val="54595D"/>
+                </a:solidFill>
+                <a:latin typeface="Calibri"/>
+              </a:rPr>
+              <a:t>Digital Support and Security T Level  ·  Incident Management and Digital Forensics</a:t>
+            </a:r>
+          </a:p>
+        </p:txBody>
+      </p:sp>
+      <p:sp>
+        <p:nvSpPr>
+          <p:cNvPr id="5" name="TextBox 4"/>
+          <p:cNvSpPr txBox="1"/>
+          <p:nvPr/>
+        </p:nvSpPr>
+        <p:spPr>
+          <a:xfrm>
+            <a:off x="10728655" y="6446520"/>
+            <a:ext cx="914400" cy="274320"/>
+          </a:xfrm>
+          <a:prstGeom prst="rect">
+            <a:avLst/>
+          </a:prstGeom>
+          <a:noFill/>
+        </p:spPr>
+        <p:txBody>
+          <a:bodyPr wrap="square" anchor="t" lIns="0" rIns="0" tIns="0" bIns="0"/>
+          <a:lstStyle/>
+          <a:p>
+            <a:pPr algn="r"/>
+            <a:r>
+              <a:rPr sz="1000" b="0" i="0">
+                <a:solidFill>
+                  <a:srgbClr val="54595D"/>
+                </a:solidFill>
+                <a:latin typeface="Calibri"/>
+              </a:rPr>
+              <a:t>13</a:t>
+            </a:r>
+          </a:p>
+        </p:txBody>
+      </p:sp>
+      <p:sp>
+        <p:nvSpPr>
+          <p:cNvPr id="6" name="Oval 5"/>
+          <p:cNvSpPr/>
+          <p:nvPr/>
+        </p:nvSpPr>
+        <p:spPr>
+          <a:xfrm>
+            <a:off x="548640" y="1618488"/>
+            <a:ext cx="411480" cy="411480"/>
+          </a:xfrm>
+          <a:prstGeom prst="ellipse">
+            <a:avLst/>
+          </a:prstGeom>
+          <a:solidFill>
+            <a:srgbClr val="E0463A"/>
+          </a:solidFill>
+          <a:ln>
+            <a:noFill/>
+          </a:ln>
+          <a:effectLst/>
+        </p:spPr>
+        <p:style>
+          <a:lnRef idx="1">
+            <a:schemeClr val="accent1"/>
+          </a:lnRef>
+          <a:fillRef idx="3">
+            <a:schemeClr val="accent1"/>
+          </a:fillRef>
+          <a:effectRef idx="2">
+            <a:schemeClr val="accent1"/>
+          </a:effectRef>
+          <a:fontRef idx="minor">
+            <a:schemeClr val="lt1"/>
+          </a:fontRef>
+        </p:style>
+        <p:txBody>
+          <a:bodyPr rtlCol="0" anchor="ctr" lIns="0" rIns="0" tIns="0" bIns="0"/>
+          <a:lstStyle/>
+          <a:p>
+            <a:pPr algn="ctr"/>
+            <a:r>
+              <a:rPr sz="1400" b="1">
+                <a:solidFill>
+                  <a:srgbClr val="FFFFFF"/>
+                </a:solidFill>
+                <a:latin typeface="Calibri"/>
+              </a:rPr>
+              <a:t>1</a:t>
+            </a:r>
+          </a:p>
+        </p:txBody>
+      </p:sp>
+      <p:sp>
+        <p:nvSpPr>
+          <p:cNvPr id="7" name="TextBox 6"/>
+          <p:cNvSpPr txBox="1"/>
+          <p:nvPr/>
+        </p:nvSpPr>
+        <p:spPr>
+          <a:xfrm>
+            <a:off x="1234440" y="1600200"/>
+            <a:ext cx="10408615" cy="1030986"/>
+          </a:xfrm>
+          <a:prstGeom prst="rect">
+            <a:avLst/>
+          </a:prstGeom>
+          <a:noFill/>
+        </p:spPr>
+        <p:txBody>
+          <a:bodyPr wrap="square" anchor="t" lIns="0" rIns="0" tIns="0" bIns="0"/>
+          <a:lstStyle/>
+          <a:p>
+            <a:pPr algn="l"/>
+            <a:r>
+              <a:rPr sz="2200" b="0" i="0">
+                <a:solidFill>
+                  <a:srgbClr val="202122"/>
+                </a:solidFill>
+                <a:latin typeface="Calibri"/>
+              </a:rPr>
+              <a:t>What is the second stage of the forensic compliance model?</a:t>
+            </a:r>
+          </a:p>
+        </p:txBody>
+      </p:sp>
+      <p:sp>
+        <p:nvSpPr>
+          <p:cNvPr id="8" name="Oval 7"/>
+          <p:cNvSpPr/>
+          <p:nvPr/>
+        </p:nvSpPr>
+        <p:spPr>
+          <a:xfrm>
+            <a:off x="548640" y="2814066"/>
+            <a:ext cx="411480" cy="411480"/>
+          </a:xfrm>
+          <a:prstGeom prst="ellipse">
+            <a:avLst/>
+          </a:prstGeom>
+          <a:solidFill>
+            <a:srgbClr val="E0463A"/>
+          </a:solidFill>
+          <a:ln>
+            <a:noFill/>
+          </a:ln>
+          <a:effectLst/>
+        </p:spPr>
+        <p:style>
+          <a:lnRef idx="1">
+            <a:schemeClr val="accent1"/>
+          </a:lnRef>
+          <a:fillRef idx="3">
+            <a:schemeClr val="accent1"/>
+          </a:fillRef>
+          <a:effectRef idx="2">
+            <a:schemeClr val="accent1"/>
+          </a:effectRef>
+          <a:fontRef idx="minor">
+            <a:schemeClr val="lt1"/>
+          </a:fontRef>
+        </p:style>
+        <p:txBody>
+          <a:bodyPr rtlCol="0" anchor="ctr" lIns="0" rIns="0" tIns="0" bIns="0"/>
+          <a:lstStyle/>
+          <a:p>
+            <a:pPr algn="ctr"/>
+            <a:r>
+              <a:rPr sz="1400" b="1">
+                <a:solidFill>
+                  <a:srgbClr val="FFFFFF"/>
+                </a:solidFill>
+                <a:latin typeface="Calibri"/>
+              </a:rPr>
+              <a:t>2</a:t>
+            </a:r>
+          </a:p>
+        </p:txBody>
+      </p:sp>
+      <p:sp>
+        <p:nvSpPr>
+          <p:cNvPr id="9" name="TextBox 8"/>
+          <p:cNvSpPr txBox="1"/>
+          <p:nvPr/>
+        </p:nvSpPr>
+        <p:spPr>
+          <a:xfrm>
+            <a:off x="1234440" y="2795778"/>
+            <a:ext cx="10408615" cy="1030986"/>
+          </a:xfrm>
+          <a:prstGeom prst="rect">
+            <a:avLst/>
+          </a:prstGeom>
+          <a:noFill/>
+        </p:spPr>
+        <p:txBody>
+          <a:bodyPr wrap="square" anchor="t" lIns="0" rIns="0" tIns="0" bIns="0"/>
+          <a:lstStyle/>
+          <a:p>
+            <a:pPr algn="l"/>
+            <a:r>
+              <a:rPr sz="2200" b="0" i="0">
+                <a:solidFill>
+                  <a:srgbClr val="202122"/>
+                </a:solidFill>
+                <a:latin typeface="Calibri"/>
+              </a:rPr>
+              <a:t>Who should a personal data breach be reported to?</a:t>
+            </a:r>
+          </a:p>
+        </p:txBody>
+      </p:sp>
+      <p:sp>
+        <p:nvSpPr>
+          <p:cNvPr id="10" name="Oval 9"/>
+          <p:cNvSpPr/>
+          <p:nvPr/>
+        </p:nvSpPr>
+        <p:spPr>
+          <a:xfrm>
+            <a:off x="548640" y="4009644"/>
+            <a:ext cx="411480" cy="411480"/>
+          </a:xfrm>
+          <a:prstGeom prst="ellipse">
+            <a:avLst/>
+          </a:prstGeom>
+          <a:solidFill>
+            <a:srgbClr val="E0463A"/>
+          </a:solidFill>
+          <a:ln>
+            <a:noFill/>
+          </a:ln>
+          <a:effectLst/>
+        </p:spPr>
+        <p:style>
+          <a:lnRef idx="1">
+            <a:schemeClr val="accent1"/>
+          </a:lnRef>
+          <a:fillRef idx="3">
+            <a:schemeClr val="accent1"/>
+          </a:fillRef>
+          <a:effectRef idx="2">
+            <a:schemeClr val="accent1"/>
+          </a:effectRef>
+          <a:fontRef idx="minor">
+            <a:schemeClr val="lt1"/>
+          </a:fontRef>
+        </p:style>
+        <p:txBody>
+          <a:bodyPr rtlCol="0" anchor="ctr" lIns="0" rIns="0" tIns="0" bIns="0"/>
+          <a:lstStyle/>
+          <a:p>
+            <a:pPr algn="ctr"/>
+            <a:r>
+              <a:rPr sz="1400" b="1">
+                <a:solidFill>
+                  <a:srgbClr val="FFFFFF"/>
+                </a:solidFill>
+                <a:latin typeface="Calibri"/>
+              </a:rPr>
+              <a:t>3</a:t>
+            </a:r>
+          </a:p>
+        </p:txBody>
+      </p:sp>
+      <p:sp>
+        <p:nvSpPr>
+          <p:cNvPr id="11" name="TextBox 10"/>
+          <p:cNvSpPr txBox="1"/>
+          <p:nvPr/>
+        </p:nvSpPr>
+        <p:spPr>
+          <a:xfrm>
+            <a:off x="1234440" y="3991356"/>
+            <a:ext cx="10408615" cy="1030986"/>
+          </a:xfrm>
+          <a:prstGeom prst="rect">
+            <a:avLst/>
+          </a:prstGeom>
+          <a:noFill/>
+        </p:spPr>
+        <p:txBody>
+          <a:bodyPr wrap="square" anchor="t" lIns="0" rIns="0" tIns="0" bIns="0"/>
+          <a:lstStyle/>
+          <a:p>
+            <a:pPr algn="l"/>
+            <a:r>
+              <a:rPr sz="2200" b="0" i="0">
+                <a:solidFill>
+                  <a:srgbClr val="202122"/>
+                </a:solidFill>
+                <a:latin typeface="Calibri"/>
+              </a:rPr>
+              <a:t>Name three sections of an incident report.</a:t>
+            </a:r>
+          </a:p>
+        </p:txBody>
+      </p:sp>
+      <p:sp>
+        <p:nvSpPr>
+          <p:cNvPr id="12" name="Oval 11"/>
+          <p:cNvSpPr/>
+          <p:nvPr/>
+        </p:nvSpPr>
+        <p:spPr>
+          <a:xfrm>
+            <a:off x="548640" y="5205221"/>
+            <a:ext cx="411480" cy="411480"/>
+          </a:xfrm>
+          <a:prstGeom prst="ellipse">
+            <a:avLst/>
+          </a:prstGeom>
+          <a:solidFill>
+            <a:srgbClr val="E0463A"/>
+          </a:solidFill>
+          <a:ln>
+            <a:noFill/>
+          </a:ln>
+          <a:effectLst/>
+        </p:spPr>
+        <p:style>
+          <a:lnRef idx="1">
+            <a:schemeClr val="accent1"/>
+          </a:lnRef>
+          <a:fillRef idx="3">
+            <a:schemeClr val="accent1"/>
+          </a:fillRef>
+          <a:effectRef idx="2">
+            <a:schemeClr val="accent1"/>
+          </a:effectRef>
+          <a:fontRef idx="minor">
+            <a:schemeClr val="lt1"/>
+          </a:fontRef>
+        </p:style>
+        <p:txBody>
+          <a:bodyPr rtlCol="0" anchor="ctr" lIns="0" rIns="0" tIns="0" bIns="0"/>
+          <a:lstStyle/>
+          <a:p>
+            <a:pPr algn="ctr"/>
+            <a:r>
+              <a:rPr sz="1400" b="1">
+                <a:solidFill>
+                  <a:srgbClr val="FFFFFF"/>
+                </a:solidFill>
+                <a:latin typeface="Calibri"/>
+              </a:rPr>
+              <a:t>4</a:t>
+            </a:r>
+          </a:p>
+        </p:txBody>
+      </p:sp>
+      <p:sp>
+        <p:nvSpPr>
+          <p:cNvPr id="13" name="TextBox 12"/>
+          <p:cNvSpPr txBox="1"/>
+          <p:nvPr/>
+        </p:nvSpPr>
+        <p:spPr>
+          <a:xfrm>
+            <a:off x="1234440" y="5186933"/>
+            <a:ext cx="10408615" cy="1030986"/>
+          </a:xfrm>
+          <a:prstGeom prst="rect">
+            <a:avLst/>
+          </a:prstGeom>
+          <a:noFill/>
+        </p:spPr>
+        <p:txBody>
+          <a:bodyPr wrap="square" anchor="t" lIns="0" rIns="0" tIns="0" bIns="0"/>
+          <a:lstStyle/>
+          <a:p>
+            <a:pPr algn="l"/>
+            <a:r>
+              <a:rPr sz="2200" b="0" i="0">
+                <a:solidFill>
+                  <a:srgbClr val="202122"/>
+                </a:solidFill>
+                <a:latin typeface="Calibri"/>
+              </a:rPr>
+              <a:t>Why isolate a device rather than switch it off?</a:t>
+            </a:r>
+          </a:p>
+        </p:txBody>
+      </p:sp>
+    </p:spTree>
+  </p:cSld>
+  <p:clrMapOvr>
+    <a:masterClrMapping/>
+  </p:clrMapOvr>
+</p:sld>
+</file>
+
+<file path=ppt/slides/slide14.xml><?xml version="1.0" encoding="utf-8"?>
+<p:sld xmlns:a="http://schemas.openxmlformats.org/drawingml/2006/main" xmlns:p="http://schemas.openxmlformats.org/presentationml/2006/main" xmlns:r="http://schemas.openxmlformats.org/officeDocument/2006/relationships">
+  <p:cSld>
+    <p:bg>
+      <p:bgPr>
+        <a:solidFill>
+          <a:srgbClr val="FFFFFF"/>
+        </a:solidFill>
+        <a:effectLst/>
+      </p:bgPr>
+    </p:bg>
+    <p:spTree>
+      <p:nvGrpSpPr>
+        <p:cNvPr id="1" name=""/>
+        <p:cNvGrpSpPr/>
+        <p:nvPr/>
+      </p:nvGrpSpPr>
+      <p:grpSpPr/>
+      <p:sp>
+        <p:nvSpPr>
+          <p:cNvPr id="2" name="TextBox 1"/>
+          <p:cNvSpPr txBox="1"/>
+          <p:nvPr/>
+        </p:nvSpPr>
+        <p:spPr>
+          <a:xfrm>
+            <a:off x="548640" y="320040"/>
+            <a:ext cx="11094415" cy="274320"/>
+          </a:xfrm>
+          <a:prstGeom prst="rect">
+            <a:avLst/>
+          </a:prstGeom>
+          <a:noFill/>
+        </p:spPr>
+        <p:txBody>
+          <a:bodyPr wrap="square" anchor="t" lIns="0" rIns="0" tIns="0" bIns="0"/>
+          <a:lstStyle/>
+          <a:p>
+            <a:pPr algn="l"/>
+            <a:r>
+              <a:rPr sz="1100" b="1" i="0">
+                <a:solidFill>
+                  <a:srgbClr val="54595D"/>
+                </a:solidFill>
+                <a:latin typeface="Calibri"/>
+              </a:rPr>
+              <a:t>CYBER SECURITY  ·  Cyber Security Content Area 2</a:t>
+            </a:r>
+          </a:p>
+        </p:txBody>
+      </p:sp>
+      <p:sp>
+        <p:nvSpPr>
+          <p:cNvPr id="3" name="TextBox 2"/>
+          <p:cNvSpPr txBox="1"/>
+          <p:nvPr/>
+        </p:nvSpPr>
+        <p:spPr>
+          <a:xfrm>
+            <a:off x="548640" y="566928"/>
+            <a:ext cx="11094415" cy="822960"/>
+          </a:xfrm>
+          <a:prstGeom prst="rect">
+            <a:avLst/>
+          </a:prstGeom>
+          <a:noFill/>
+        </p:spPr>
+        <p:txBody>
+          <a:bodyPr wrap="square" anchor="ctr" lIns="0" rIns="0" tIns="0" bIns="0"/>
+          <a:lstStyle/>
+          <a:p>
+            <a:pPr algn="l"/>
+            <a:r>
+              <a:rPr sz="3200" b="1" i="0">
+                <a:solidFill>
+                  <a:srgbClr val="03306E"/>
+                </a:solidFill>
+                <a:latin typeface="Cambria"/>
+              </a:rPr>
+              <a:t>Answers</a:t>
+            </a:r>
+          </a:p>
+        </p:txBody>
+      </p:sp>
+      <p:sp>
+        <p:nvSpPr>
+          <p:cNvPr id="4" name="TextBox 3"/>
+          <p:cNvSpPr txBox="1"/>
+          <p:nvPr/>
+        </p:nvSpPr>
+        <p:spPr>
+          <a:xfrm>
+            <a:off x="548640" y="6446520"/>
+            <a:ext cx="8229600" cy="274320"/>
+          </a:xfrm>
+          <a:prstGeom prst="rect">
+            <a:avLst/>
+          </a:prstGeom>
+          <a:noFill/>
+        </p:spPr>
+        <p:txBody>
+          <a:bodyPr wrap="square" anchor="t" lIns="0" rIns="0" tIns="0" bIns="0"/>
+          <a:lstStyle/>
+          <a:p>
+            <a:pPr algn="l"/>
+            <a:r>
+              <a:rPr sz="1000" b="0" i="0">
+                <a:solidFill>
+                  <a:srgbClr val="54595D"/>
+                </a:solidFill>
+                <a:latin typeface="Calibri"/>
+              </a:rPr>
+              <a:t>Digital Support and Security T Level  ·  Incident Management and Digital Forensics</a:t>
+            </a:r>
+          </a:p>
+        </p:txBody>
+      </p:sp>
+      <p:sp>
+        <p:nvSpPr>
+          <p:cNvPr id="5" name="TextBox 4"/>
+          <p:cNvSpPr txBox="1"/>
+          <p:nvPr/>
+        </p:nvSpPr>
+        <p:spPr>
+          <a:xfrm>
+            <a:off x="10728655" y="6446520"/>
+            <a:ext cx="914400" cy="274320"/>
+          </a:xfrm>
+          <a:prstGeom prst="rect">
+            <a:avLst/>
+          </a:prstGeom>
+          <a:noFill/>
+        </p:spPr>
+        <p:txBody>
+          <a:bodyPr wrap="square" anchor="t" lIns="0" rIns="0" tIns="0" bIns="0"/>
+          <a:lstStyle/>
+          <a:p>
+            <a:pPr algn="r"/>
+            <a:r>
+              <a:rPr sz="1000" b="0" i="0">
+                <a:solidFill>
+                  <a:srgbClr val="54595D"/>
+                </a:solidFill>
+                <a:latin typeface="Calibri"/>
+              </a:rPr>
+              <a:t>14</a:t>
+            </a:r>
+          </a:p>
+        </p:txBody>
+      </p:sp>
+      <p:sp>
+        <p:nvSpPr>
+          <p:cNvPr id="6" name="Oval 5"/>
+          <p:cNvSpPr/>
+          <p:nvPr/>
+        </p:nvSpPr>
+        <p:spPr>
+          <a:xfrm>
+            <a:off x="548640" y="1618488"/>
+            <a:ext cx="411480" cy="411480"/>
+          </a:xfrm>
+          <a:prstGeom prst="ellipse">
+            <a:avLst/>
+          </a:prstGeom>
+          <a:solidFill>
+            <a:srgbClr val="E0463A"/>
+          </a:solidFill>
+          <a:ln>
+            <a:noFill/>
+          </a:ln>
+          <a:effectLst/>
+        </p:spPr>
+        <p:style>
+          <a:lnRef idx="1">
+            <a:schemeClr val="accent1"/>
+          </a:lnRef>
+          <a:fillRef idx="3">
+            <a:schemeClr val="accent1"/>
+          </a:fillRef>
+          <a:effectRef idx="2">
+            <a:schemeClr val="accent1"/>
+          </a:effectRef>
+          <a:fontRef idx="minor">
+            <a:schemeClr val="lt1"/>
+          </a:fontRef>
+        </p:style>
+        <p:txBody>
+          <a:bodyPr rtlCol="0" anchor="ctr" lIns="0" rIns="0" tIns="0" bIns="0"/>
+          <a:lstStyle/>
+          <a:p>
+            <a:pPr algn="ctr"/>
+            <a:r>
+              <a:rPr sz="1400" b="1">
+                <a:solidFill>
+                  <a:srgbClr val="FFFFFF"/>
+                </a:solidFill>
+                <a:latin typeface="Calibri"/>
+              </a:rPr>
+              <a:t>1</a:t>
+            </a:r>
+          </a:p>
+        </p:txBody>
+      </p:sp>
+      <p:sp>
+        <p:nvSpPr>
+          <p:cNvPr id="7" name="TextBox 6"/>
+          <p:cNvSpPr txBox="1"/>
+          <p:nvPr/>
+        </p:nvSpPr>
+        <p:spPr>
+          <a:xfrm>
+            <a:off x="1234440" y="1600200"/>
+            <a:ext cx="10408615" cy="1030986"/>
+          </a:xfrm>
+          <a:prstGeom prst="rect">
+            <a:avLst/>
+          </a:prstGeom>
+          <a:noFill/>
+        </p:spPr>
+        <p:txBody>
+          <a:bodyPr wrap="square" anchor="t" lIns="0" rIns="0" tIns="0" bIns="0"/>
+          <a:lstStyle/>
+          <a:p>
+            <a:pPr algn="l"/>
+            <a:r>
+              <a:rPr sz="1800" b="0" i="0">
+                <a:solidFill>
+                  <a:srgbClr val="54595D"/>
+                </a:solidFill>
+                <a:latin typeface="Calibri"/>
+              </a:rPr>
+              <a:t>What is the second stage of the forensic compliance model?</a:t>
+            </a:r>
+          </a:p>
+          <a:p>
+            <a:r>
+              <a:rPr sz="1800" b="1">
+                <a:solidFill>
+                  <a:srgbClr val="03306E"/>
+                </a:solidFill>
+                <a:latin typeface="Calibri"/>
+              </a:rPr>
+              <a:t>Preservation.</a:t>
+            </a:r>
+          </a:p>
+        </p:txBody>
+      </p:sp>
+      <p:sp>
+        <p:nvSpPr>
+          <p:cNvPr id="8" name="Oval 7"/>
+          <p:cNvSpPr/>
+          <p:nvPr/>
+        </p:nvSpPr>
+        <p:spPr>
+          <a:xfrm>
+            <a:off x="548640" y="2814066"/>
+            <a:ext cx="411480" cy="411480"/>
+          </a:xfrm>
+          <a:prstGeom prst="ellipse">
+            <a:avLst/>
+          </a:prstGeom>
+          <a:solidFill>
+            <a:srgbClr val="E0463A"/>
+          </a:solidFill>
+          <a:ln>
+            <a:noFill/>
+          </a:ln>
+          <a:effectLst/>
+        </p:spPr>
+        <p:style>
+          <a:lnRef idx="1">
+            <a:schemeClr val="accent1"/>
+          </a:lnRef>
+          <a:fillRef idx="3">
+            <a:schemeClr val="accent1"/>
+          </a:fillRef>
+          <a:effectRef idx="2">
+            <a:schemeClr val="accent1"/>
+          </a:effectRef>
+          <a:fontRef idx="minor">
+            <a:schemeClr val="lt1"/>
+          </a:fontRef>
+        </p:style>
+        <p:txBody>
+          <a:bodyPr rtlCol="0" anchor="ctr" lIns="0" rIns="0" tIns="0" bIns="0"/>
+          <a:lstStyle/>
+          <a:p>
+            <a:pPr algn="ctr"/>
+            <a:r>
+              <a:rPr sz="1400" b="1">
+                <a:solidFill>
+                  <a:srgbClr val="FFFFFF"/>
+                </a:solidFill>
+                <a:latin typeface="Calibri"/>
+              </a:rPr>
+              <a:t>2</a:t>
+            </a:r>
+          </a:p>
+        </p:txBody>
+      </p:sp>
+      <p:sp>
+        <p:nvSpPr>
+          <p:cNvPr id="9" name="TextBox 8"/>
+          <p:cNvSpPr txBox="1"/>
+          <p:nvPr/>
+        </p:nvSpPr>
+        <p:spPr>
+          <a:xfrm>
+            <a:off x="1234440" y="2795778"/>
+            <a:ext cx="10408615" cy="1030986"/>
+          </a:xfrm>
+          <a:prstGeom prst="rect">
+            <a:avLst/>
+          </a:prstGeom>
+          <a:noFill/>
+        </p:spPr>
+        <p:txBody>
+          <a:bodyPr wrap="square" anchor="t" lIns="0" rIns="0" tIns="0" bIns="0"/>
+          <a:lstStyle/>
+          <a:p>
+            <a:pPr algn="l"/>
+            <a:r>
+              <a:rPr sz="1800" b="0" i="0">
+                <a:solidFill>
+                  <a:srgbClr val="54595D"/>
+                </a:solidFill>
+                <a:latin typeface="Calibri"/>
+              </a:rPr>
+              <a:t>Who should a personal data breach be reported to?</a:t>
+            </a:r>
+          </a:p>
+          <a:p>
+            <a:r>
+              <a:rPr sz="1800" b="1">
+                <a:solidFill>
+                  <a:srgbClr val="03306E"/>
+                </a:solidFill>
+                <a:latin typeface="Calibri"/>
+              </a:rPr>
+              <a:t>The ICO.</a:t>
+            </a:r>
+          </a:p>
+        </p:txBody>
+      </p:sp>
+      <p:sp>
+        <p:nvSpPr>
+          <p:cNvPr id="10" name="Oval 9"/>
+          <p:cNvSpPr/>
+          <p:nvPr/>
+        </p:nvSpPr>
+        <p:spPr>
+          <a:xfrm>
+            <a:off x="548640" y="4009644"/>
+            <a:ext cx="411480" cy="411480"/>
+          </a:xfrm>
+          <a:prstGeom prst="ellipse">
+            <a:avLst/>
+          </a:prstGeom>
+          <a:solidFill>
+            <a:srgbClr val="E0463A"/>
+          </a:solidFill>
+          <a:ln>
+            <a:noFill/>
+          </a:ln>
+          <a:effectLst/>
+        </p:spPr>
+        <p:style>
+          <a:lnRef idx="1">
+            <a:schemeClr val="accent1"/>
+          </a:lnRef>
+          <a:fillRef idx="3">
+            <a:schemeClr val="accent1"/>
+          </a:fillRef>
+          <a:effectRef idx="2">
+            <a:schemeClr val="accent1"/>
+          </a:effectRef>
+          <a:fontRef idx="minor">
+            <a:schemeClr val="lt1"/>
+          </a:fontRef>
+        </p:style>
+        <p:txBody>
+          <a:bodyPr rtlCol="0" anchor="ctr" lIns="0" rIns="0" tIns="0" bIns="0"/>
+          <a:lstStyle/>
+          <a:p>
+            <a:pPr algn="ctr"/>
+            <a:r>
+              <a:rPr sz="1400" b="1">
+                <a:solidFill>
+                  <a:srgbClr val="FFFFFF"/>
+                </a:solidFill>
+                <a:latin typeface="Calibri"/>
+              </a:rPr>
+              <a:t>3</a:t>
+            </a:r>
+          </a:p>
+        </p:txBody>
+      </p:sp>
+      <p:sp>
+        <p:nvSpPr>
+          <p:cNvPr id="11" name="TextBox 10"/>
+          <p:cNvSpPr txBox="1"/>
+          <p:nvPr/>
+        </p:nvSpPr>
+        <p:spPr>
+          <a:xfrm>
+            <a:off x="1234440" y="3991356"/>
+            <a:ext cx="10408615" cy="1030986"/>
+          </a:xfrm>
+          <a:prstGeom prst="rect">
+            <a:avLst/>
+          </a:prstGeom>
+          <a:noFill/>
+        </p:spPr>
+        <p:txBody>
+          <a:bodyPr wrap="square" anchor="t" lIns="0" rIns="0" tIns="0" bIns="0"/>
+          <a:lstStyle/>
+          <a:p>
+            <a:pPr algn="l"/>
+            <a:r>
+              <a:rPr sz="1800" b="0" i="0">
+                <a:solidFill>
+                  <a:srgbClr val="54595D"/>
+                </a:solidFill>
+                <a:latin typeface="Calibri"/>
+              </a:rPr>
+              <a:t>Name three sections of an incident report.</a:t>
+            </a:r>
+          </a:p>
+          <a:p>
+            <a:r>
+              <a:rPr sz="1800" b="1">
+                <a:solidFill>
+                  <a:srgbClr val="03306E"/>
+                </a:solidFill>
+                <a:latin typeface="Calibri"/>
+              </a:rPr>
+              <a:t>Any three of: executive summary, discovery and investigation, impact, mitigation, recommendations, ongoing risk.</a:t>
+            </a:r>
+          </a:p>
+        </p:txBody>
+      </p:sp>
+      <p:sp>
+        <p:nvSpPr>
+          <p:cNvPr id="12" name="Oval 11"/>
+          <p:cNvSpPr/>
+          <p:nvPr/>
+        </p:nvSpPr>
+        <p:spPr>
+          <a:xfrm>
+            <a:off x="548640" y="5205221"/>
+            <a:ext cx="411480" cy="411480"/>
+          </a:xfrm>
+          <a:prstGeom prst="ellipse">
+            <a:avLst/>
+          </a:prstGeom>
+          <a:solidFill>
+            <a:srgbClr val="E0463A"/>
+          </a:solidFill>
+          <a:ln>
+            <a:noFill/>
+          </a:ln>
+          <a:effectLst/>
+        </p:spPr>
+        <p:style>
+          <a:lnRef idx="1">
+            <a:schemeClr val="accent1"/>
+          </a:lnRef>
+          <a:fillRef idx="3">
+            <a:schemeClr val="accent1"/>
+          </a:fillRef>
+          <a:effectRef idx="2">
+            <a:schemeClr val="accent1"/>
+          </a:effectRef>
+          <a:fontRef idx="minor">
+            <a:schemeClr val="lt1"/>
+          </a:fontRef>
+        </p:style>
+        <p:txBody>
+          <a:bodyPr rtlCol="0" anchor="ctr" lIns="0" rIns="0" tIns="0" bIns="0"/>
+          <a:lstStyle/>
+          <a:p>
+            <a:pPr algn="ctr"/>
+            <a:r>
+              <a:rPr sz="1400" b="1">
+                <a:solidFill>
+                  <a:srgbClr val="FFFFFF"/>
+                </a:solidFill>
+                <a:latin typeface="Calibri"/>
+              </a:rPr>
+              <a:t>4</a:t>
+            </a:r>
+          </a:p>
+        </p:txBody>
+      </p:sp>
+      <p:sp>
+        <p:nvSpPr>
+          <p:cNvPr id="13" name="TextBox 12"/>
+          <p:cNvSpPr txBox="1"/>
+          <p:nvPr/>
+        </p:nvSpPr>
+        <p:spPr>
+          <a:xfrm>
+            <a:off x="1234440" y="5186933"/>
+            <a:ext cx="10408615" cy="1030986"/>
+          </a:xfrm>
+          <a:prstGeom prst="rect">
+            <a:avLst/>
+          </a:prstGeom>
+          <a:noFill/>
+        </p:spPr>
+        <p:txBody>
+          <a:bodyPr wrap="square" anchor="t" lIns="0" rIns="0" tIns="0" bIns="0"/>
+          <a:lstStyle/>
+          <a:p>
+            <a:pPr algn="l"/>
+            <a:r>
+              <a:rPr sz="1800" b="0" i="0">
+                <a:solidFill>
+                  <a:srgbClr val="54595D"/>
+                </a:solidFill>
+                <a:latin typeface="Calibri"/>
+              </a:rPr>
+              <a:t>Why isolate a device rather than switch it off?</a:t>
+            </a:r>
+          </a:p>
+          <a:p>
+            <a:r>
+              <a:rPr sz="1800" b="1">
+                <a:solidFill>
+                  <a:srgbClr val="03306E"/>
+                </a:solidFill>
+                <a:latin typeface="Calibri"/>
+              </a:rPr>
+              <a:t>To stop the spread while preserving evidence held in memory.</a:t>
+            </a:r>
+          </a:p>
+        </p:txBody>
+      </p:sp>
+    </p:spTree>
+  </p:cSld>
+  <p:clrMapOvr>
+    <a:masterClrMapping/>
+  </p:clrMapOvr>
+</p:sld>
+</file>
+
+<file path=ppt/slides/slide15.xml><?xml version="1.0" encoding="utf-8"?>
+<p:sld xmlns:a="http://schemas.openxmlformats.org/drawingml/2006/main" xmlns:p="http://schemas.openxmlformats.org/presentationml/2006/main" xmlns:r="http://schemas.openxmlformats.org/officeDocument/2006/relationships">
+  <p:cSld>
+    <p:bg>
+      <p:bgPr>
+        <a:solidFill>
+          <a:srgbClr val="FFFFFF"/>
+        </a:solidFill>
+        <a:effectLst/>
+      </p:bgPr>
+    </p:bg>
+    <p:spTree>
+      <p:nvGrpSpPr>
+        <p:cNvPr id="1" name=""/>
+        <p:cNvGrpSpPr/>
+        <p:nvPr/>
+      </p:nvGrpSpPr>
+      <p:grpSpPr/>
+      <p:sp>
+        <p:nvSpPr>
+          <p:cNvPr id="2" name="TextBox 1"/>
+          <p:cNvSpPr txBox="1"/>
+          <p:nvPr/>
+        </p:nvSpPr>
+        <p:spPr>
+          <a:xfrm>
+            <a:off x="548640" y="320040"/>
+            <a:ext cx="11094415" cy="274320"/>
+          </a:xfrm>
+          <a:prstGeom prst="rect">
+            <a:avLst/>
+          </a:prstGeom>
+          <a:noFill/>
+        </p:spPr>
+        <p:txBody>
+          <a:bodyPr wrap="square" anchor="t" lIns="0" rIns="0" tIns="0" bIns="0"/>
+          <a:lstStyle/>
+          <a:p>
+            <a:pPr algn="l"/>
+            <a:r>
+              <a:rPr sz="1100" b="1" i="0">
+                <a:solidFill>
+                  <a:srgbClr val="54595D"/>
+                </a:solidFill>
+                <a:latin typeface="Calibri"/>
+              </a:rPr>
+              <a:t>CYBER SECURITY  ·  Cyber Security Content Area 2</a:t>
+            </a:r>
+          </a:p>
+        </p:txBody>
+      </p:sp>
+      <p:sp>
+        <p:nvSpPr>
+          <p:cNvPr id="3" name="TextBox 2"/>
+          <p:cNvSpPr txBox="1"/>
+          <p:nvPr/>
+        </p:nvSpPr>
+        <p:spPr>
+          <a:xfrm>
+            <a:off x="548640" y="566928"/>
+            <a:ext cx="11094415" cy="822960"/>
+          </a:xfrm>
+          <a:prstGeom prst="rect">
+            <a:avLst/>
+          </a:prstGeom>
+          <a:noFill/>
+        </p:spPr>
+        <p:txBody>
+          <a:bodyPr wrap="square" anchor="ctr" lIns="0" rIns="0" tIns="0" bIns="0"/>
+          <a:lstStyle/>
+          <a:p>
+            <a:pPr algn="l"/>
+            <a:r>
+              <a:rPr sz="3200" b="1" i="0">
+                <a:solidFill>
+                  <a:srgbClr val="03306E"/>
+                </a:solidFill>
+                <a:latin typeface="Cambria"/>
+              </a:rPr>
+              <a:t>Activity: Handle the incident</a:t>
+            </a:r>
+          </a:p>
+        </p:txBody>
+      </p:sp>
+      <p:sp>
+        <p:nvSpPr>
+          <p:cNvPr id="4" name="TextBox 3"/>
+          <p:cNvSpPr txBox="1"/>
+          <p:nvPr/>
+        </p:nvSpPr>
+        <p:spPr>
+          <a:xfrm>
+            <a:off x="548640" y="6446520"/>
+            <a:ext cx="8229600" cy="274320"/>
+          </a:xfrm>
+          <a:prstGeom prst="rect">
+            <a:avLst/>
+          </a:prstGeom>
+          <a:noFill/>
+        </p:spPr>
+        <p:txBody>
+          <a:bodyPr wrap="square" anchor="t" lIns="0" rIns="0" tIns="0" bIns="0"/>
+          <a:lstStyle/>
+          <a:p>
+            <a:pPr algn="l"/>
+            <a:r>
+              <a:rPr sz="1000" b="0" i="0">
+                <a:solidFill>
+                  <a:srgbClr val="54595D"/>
+                </a:solidFill>
+                <a:latin typeface="Calibri"/>
+              </a:rPr>
+              <a:t>Digital Support and Security T Level  ·  Incident Management and Digital Forensics</a:t>
+            </a:r>
+          </a:p>
+        </p:txBody>
+      </p:sp>
+      <p:sp>
+        <p:nvSpPr>
+          <p:cNvPr id="5" name="TextBox 4"/>
+          <p:cNvSpPr txBox="1"/>
+          <p:nvPr/>
+        </p:nvSpPr>
+        <p:spPr>
+          <a:xfrm>
+            <a:off x="10728655" y="6446520"/>
+            <a:ext cx="914400" cy="274320"/>
+          </a:xfrm>
+          <a:prstGeom prst="rect">
+            <a:avLst/>
+          </a:prstGeom>
+          <a:noFill/>
+        </p:spPr>
+        <p:txBody>
+          <a:bodyPr wrap="square" anchor="t" lIns="0" rIns="0" tIns="0" bIns="0"/>
+          <a:lstStyle/>
+          <a:p>
+            <a:pPr algn="r"/>
+            <a:r>
+              <a:rPr sz="1000" b="0" i="0">
+                <a:solidFill>
+                  <a:srgbClr val="54595D"/>
+                </a:solidFill>
+                <a:latin typeface="Calibri"/>
+              </a:rPr>
+              <a:t>15</a:t>
+            </a:r>
+          </a:p>
+        </p:txBody>
+      </p:sp>
+      <p:sp>
+        <p:nvSpPr>
+          <p:cNvPr id="6" name="Rounded Rectangle 5"/>
+          <p:cNvSpPr/>
+          <p:nvPr/>
+        </p:nvSpPr>
+        <p:spPr>
+          <a:xfrm>
+            <a:off x="548640" y="1508760"/>
+            <a:ext cx="2011680" cy="457200"/>
+          </a:xfrm>
+          <a:prstGeom prst="roundRect">
+            <a:avLst>
+              <a:gd name="adj" fmla="val 50000"/>
+            </a:avLst>
+          </a:prstGeom>
+          <a:solidFill>
+            <a:srgbClr val="E0463A"/>
+          </a:solidFill>
+          <a:ln>
+            <a:noFill/>
+          </a:ln>
+          <a:effectLst/>
+        </p:spPr>
+        <p:style>
+          <a:lnRef idx="1">
+            <a:schemeClr val="accent1"/>
+          </a:lnRef>
+          <a:fillRef idx="3">
+            <a:schemeClr val="accent1"/>
+          </a:fillRef>
+          <a:effectRef idx="2">
+            <a:schemeClr val="accent1"/>
+          </a:effectRef>
+          <a:fontRef idx="minor">
+            <a:schemeClr val="lt1"/>
+          </a:fontRef>
+        </p:style>
+        <p:txBody>
+          <a:bodyPr rtlCol="0" anchor="ctr"/>
+          <a:lstStyle/>
+          <a:p/>
+        </p:txBody>
+      </p:sp>
+      <p:sp>
+        <p:nvSpPr>
+          <p:cNvPr id="7" name="TextBox 6"/>
+          <p:cNvSpPr txBox="1"/>
+          <p:nvPr/>
+        </p:nvSpPr>
+        <p:spPr>
+          <a:xfrm>
+            <a:off x="548640" y="1508760"/>
+            <a:ext cx="2011680" cy="457200"/>
+          </a:xfrm>
+          <a:prstGeom prst="rect">
+            <a:avLst/>
+          </a:prstGeom>
+          <a:noFill/>
+        </p:spPr>
+        <p:txBody>
+          <a:bodyPr wrap="square" anchor="ctr" lIns="0" rIns="0" tIns="0" bIns="0"/>
+          <a:lstStyle/>
+          <a:p>
+            <a:pPr algn="ctr"/>
+            <a:r>
+              <a:rPr sz="1400" b="1" i="0">
+                <a:solidFill>
+                  <a:srgbClr val="FFFFFF"/>
+                </a:solidFill>
+                <a:latin typeface="Calibri"/>
+              </a:rPr>
+              <a:t>30 minutes</a:t>
+            </a:r>
+          </a:p>
+        </p:txBody>
+      </p:sp>
+      <p:sp>
+        <p:nvSpPr>
+          <p:cNvPr id="8" name="TextBox 7"/>
+          <p:cNvSpPr txBox="1"/>
+          <p:nvPr/>
+        </p:nvSpPr>
+        <p:spPr>
+          <a:xfrm>
+            <a:off x="2743200" y="1508760"/>
+            <a:ext cx="4754880" cy="457200"/>
+          </a:xfrm>
+          <a:prstGeom prst="rect">
+            <a:avLst/>
+          </a:prstGeom>
+          <a:noFill/>
+        </p:spPr>
+        <p:txBody>
+          <a:bodyPr wrap="square" anchor="ctr" lIns="0" rIns="0" tIns="0" bIns="0"/>
+          <a:lstStyle/>
+          <a:p>
+            <a:pPr algn="l"/>
+            <a:r>
+              <a:rPr sz="1400" b="0" i="1">
+                <a:solidFill>
+                  <a:srgbClr val="54595D"/>
+                </a:solidFill>
+                <a:latin typeface="Calibri"/>
+              </a:rPr>
+              <a:t>Small groups</a:t>
+            </a:r>
+          </a:p>
+        </p:txBody>
+      </p:sp>
+      <p:sp>
+        <p:nvSpPr>
+          <p:cNvPr id="9" name="Oval 8"/>
+          <p:cNvSpPr/>
+          <p:nvPr/>
+        </p:nvSpPr>
+        <p:spPr>
+          <a:xfrm>
+            <a:off x="548640" y="2482596"/>
+            <a:ext cx="384048" cy="384048"/>
+          </a:xfrm>
+          <a:prstGeom prst="ellipse">
+            <a:avLst/>
+          </a:prstGeom>
+          <a:solidFill>
+            <a:srgbClr val="0645AD"/>
+          </a:solidFill>
+          <a:ln>
+            <a:noFill/>
+          </a:ln>
+          <a:effectLst/>
+        </p:spPr>
+        <p:style>
+          <a:lnRef idx="1">
+            <a:schemeClr val="accent1"/>
+          </a:lnRef>
+          <a:fillRef idx="3">
+            <a:schemeClr val="accent1"/>
+          </a:fillRef>
+          <a:effectRef idx="2">
+            <a:schemeClr val="accent1"/>
+          </a:effectRef>
+          <a:fontRef idx="minor">
+            <a:schemeClr val="lt1"/>
+          </a:fontRef>
+        </p:style>
+        <p:txBody>
+          <a:bodyPr rtlCol="0" anchor="ctr" lIns="0" rIns="0" tIns="0" bIns="0"/>
+          <a:lstStyle/>
+          <a:p>
+            <a:pPr algn="ctr"/>
+            <a:r>
+              <a:rPr sz="1300" b="1">
+                <a:solidFill>
+                  <a:srgbClr val="FFFFFF"/>
+                </a:solidFill>
+                <a:latin typeface="Calibri"/>
+              </a:rPr>
+              <a:t>1</a:t>
+            </a:r>
+          </a:p>
+        </p:txBody>
+      </p:sp>
+      <p:sp>
+        <p:nvSpPr>
+          <p:cNvPr id="10" name="TextBox 9"/>
+          <p:cNvSpPr txBox="1"/>
+          <p:nvPr/>
+        </p:nvSpPr>
+        <p:spPr>
+          <a:xfrm>
+            <a:off x="1143000" y="2240280"/>
+            <a:ext cx="5943600" cy="868680"/>
+          </a:xfrm>
+          <a:prstGeom prst="rect">
+            <a:avLst/>
+          </a:prstGeom>
+          <a:noFill/>
+        </p:spPr>
+        <p:txBody>
+          <a:bodyPr wrap="square" anchor="ctr" lIns="0" rIns="0" tIns="0" bIns="0"/>
+          <a:lstStyle/>
+          <a:p>
+            <a:pPr algn="l"/>
+            <a:r>
+              <a:rPr sz="1700" b="0" i="0">
+                <a:solidFill>
+                  <a:srgbClr val="202122"/>
+                </a:solidFill>
+                <a:latin typeface="Calibri"/>
+              </a:rPr>
+              <a:t>Scenario: at 09:40 a finance clerk reports a pop-up demanding bitcoin. Two shared drives are now unreadable.</a:t>
+            </a:r>
+          </a:p>
+        </p:txBody>
+      </p:sp>
+      <p:sp>
+        <p:nvSpPr>
+          <p:cNvPr id="11" name="Oval 10"/>
+          <p:cNvSpPr/>
+          <p:nvPr/>
+        </p:nvSpPr>
+        <p:spPr>
+          <a:xfrm>
+            <a:off x="548640" y="3461004"/>
+            <a:ext cx="384048" cy="384048"/>
+          </a:xfrm>
+          <a:prstGeom prst="ellipse">
+            <a:avLst/>
+          </a:prstGeom>
+          <a:solidFill>
+            <a:srgbClr val="0645AD"/>
+          </a:solidFill>
+          <a:ln>
+            <a:noFill/>
+          </a:ln>
+          <a:effectLst/>
+        </p:spPr>
+        <p:style>
+          <a:lnRef idx="1">
+            <a:schemeClr val="accent1"/>
+          </a:lnRef>
+          <a:fillRef idx="3">
+            <a:schemeClr val="accent1"/>
+          </a:fillRef>
+          <a:effectRef idx="2">
+            <a:schemeClr val="accent1"/>
+          </a:effectRef>
+          <a:fontRef idx="minor">
+            <a:schemeClr val="lt1"/>
+          </a:fontRef>
+        </p:style>
+        <p:txBody>
+          <a:bodyPr rtlCol="0" anchor="ctr" lIns="0" rIns="0" tIns="0" bIns="0"/>
+          <a:lstStyle/>
+          <a:p>
+            <a:pPr algn="ctr"/>
+            <a:r>
+              <a:rPr sz="1300" b="1">
+                <a:solidFill>
+                  <a:srgbClr val="FFFFFF"/>
+                </a:solidFill>
+                <a:latin typeface="Calibri"/>
+              </a:rPr>
+              <a:t>2</a:t>
+            </a:r>
+          </a:p>
+        </p:txBody>
+      </p:sp>
+      <p:sp>
+        <p:nvSpPr>
+          <p:cNvPr id="12" name="TextBox 11"/>
+          <p:cNvSpPr txBox="1"/>
+          <p:nvPr/>
+        </p:nvSpPr>
+        <p:spPr>
+          <a:xfrm>
+            <a:off x="1143000" y="3218688"/>
+            <a:ext cx="5943600" cy="868680"/>
+          </a:xfrm>
+          <a:prstGeom prst="rect">
+            <a:avLst/>
+          </a:prstGeom>
+          <a:noFill/>
+        </p:spPr>
+        <p:txBody>
+          <a:bodyPr wrap="square" anchor="ctr" lIns="0" rIns="0" tIns="0" bIns="0"/>
+          <a:lstStyle/>
+          <a:p>
+            <a:pPr algn="l"/>
+            <a:r>
+              <a:rPr sz="1700" b="0" i="0">
+                <a:solidFill>
+                  <a:srgbClr val="202122"/>
+                </a:solidFill>
+                <a:latin typeface="Calibri"/>
+              </a:rPr>
+              <a:t>Work through each incident management stage and record your actions.</a:t>
+            </a:r>
+          </a:p>
+        </p:txBody>
+      </p:sp>
+      <p:sp>
+        <p:nvSpPr>
+          <p:cNvPr id="13" name="Oval 12"/>
+          <p:cNvSpPr/>
+          <p:nvPr/>
+        </p:nvSpPr>
+        <p:spPr>
+          <a:xfrm>
+            <a:off x="548640" y="4439412"/>
+            <a:ext cx="384048" cy="384048"/>
+          </a:xfrm>
+          <a:prstGeom prst="ellipse">
+            <a:avLst/>
+          </a:prstGeom>
+          <a:solidFill>
+            <a:srgbClr val="0645AD"/>
+          </a:solidFill>
+          <a:ln>
+            <a:noFill/>
+          </a:ln>
+          <a:effectLst/>
+        </p:spPr>
+        <p:style>
+          <a:lnRef idx="1">
+            <a:schemeClr val="accent1"/>
+          </a:lnRef>
+          <a:fillRef idx="3">
+            <a:schemeClr val="accent1"/>
+          </a:fillRef>
+          <a:effectRef idx="2">
+            <a:schemeClr val="accent1"/>
+          </a:effectRef>
+          <a:fontRef idx="minor">
+            <a:schemeClr val="lt1"/>
+          </a:fontRef>
+        </p:style>
+        <p:txBody>
+          <a:bodyPr rtlCol="0" anchor="ctr" lIns="0" rIns="0" tIns="0" bIns="0"/>
+          <a:lstStyle/>
+          <a:p>
+            <a:pPr algn="ctr"/>
+            <a:r>
+              <a:rPr sz="1300" b="1">
+                <a:solidFill>
+                  <a:srgbClr val="FFFFFF"/>
+                </a:solidFill>
+                <a:latin typeface="Calibri"/>
+              </a:rPr>
+              <a:t>3</a:t>
+            </a:r>
+          </a:p>
+        </p:txBody>
+      </p:sp>
+      <p:sp>
+        <p:nvSpPr>
+          <p:cNvPr id="14" name="TextBox 13"/>
+          <p:cNvSpPr txBox="1"/>
+          <p:nvPr/>
+        </p:nvSpPr>
+        <p:spPr>
+          <a:xfrm>
+            <a:off x="1143000" y="4197096"/>
+            <a:ext cx="5943600" cy="868680"/>
+          </a:xfrm>
+          <a:prstGeom prst="rect">
+            <a:avLst/>
+          </a:prstGeom>
+          <a:noFill/>
+        </p:spPr>
+        <p:txBody>
+          <a:bodyPr wrap="square" anchor="ctr" lIns="0" rIns="0" tIns="0" bIns="0"/>
+          <a:lstStyle/>
+          <a:p>
+            <a:pPr algn="l"/>
+            <a:r>
+              <a:rPr sz="1700" b="0" i="0">
+                <a:solidFill>
+                  <a:srgbClr val="202122"/>
+                </a:solidFill>
+                <a:latin typeface="Calibri"/>
+              </a:rPr>
+              <a:t>List the evidence you would preserve and how.</a:t>
+            </a:r>
+          </a:p>
+        </p:txBody>
+      </p:sp>
+      <p:sp>
+        <p:nvSpPr>
+          <p:cNvPr id="15" name="Oval 14"/>
+          <p:cNvSpPr/>
+          <p:nvPr/>
+        </p:nvSpPr>
+        <p:spPr>
+          <a:xfrm>
+            <a:off x="548640" y="5417820"/>
+            <a:ext cx="384048" cy="384048"/>
+          </a:xfrm>
+          <a:prstGeom prst="ellipse">
+            <a:avLst/>
+          </a:prstGeom>
+          <a:solidFill>
+            <a:srgbClr val="0645AD"/>
+          </a:solidFill>
+          <a:ln>
+            <a:noFill/>
+          </a:ln>
+          <a:effectLst/>
+        </p:spPr>
+        <p:style>
+          <a:lnRef idx="1">
+            <a:schemeClr val="accent1"/>
+          </a:lnRef>
+          <a:fillRef idx="3">
+            <a:schemeClr val="accent1"/>
+          </a:fillRef>
+          <a:effectRef idx="2">
+            <a:schemeClr val="accent1"/>
+          </a:effectRef>
+          <a:fontRef idx="minor">
+            <a:schemeClr val="lt1"/>
+          </a:fontRef>
+        </p:style>
+        <p:txBody>
+          <a:bodyPr rtlCol="0" anchor="ctr" lIns="0" rIns="0" tIns="0" bIns="0"/>
+          <a:lstStyle/>
+          <a:p>
+            <a:pPr algn="ctr"/>
+            <a:r>
+              <a:rPr sz="1300" b="1">
+                <a:solidFill>
+                  <a:srgbClr val="FFFFFF"/>
+                </a:solidFill>
+                <a:latin typeface="Calibri"/>
+              </a:rPr>
+              <a:t>4</a:t>
+            </a:r>
+          </a:p>
+        </p:txBody>
+      </p:sp>
+      <p:sp>
+        <p:nvSpPr>
+          <p:cNvPr id="16" name="TextBox 15"/>
+          <p:cNvSpPr txBox="1"/>
+          <p:nvPr/>
+        </p:nvSpPr>
+        <p:spPr>
+          <a:xfrm>
+            <a:off x="1143000" y="5175504"/>
+            <a:ext cx="5943600" cy="868680"/>
+          </a:xfrm>
+          <a:prstGeom prst="rect">
+            <a:avLst/>
+          </a:prstGeom>
+          <a:noFill/>
+        </p:spPr>
+        <p:txBody>
+          <a:bodyPr wrap="square" anchor="ctr" lIns="0" rIns="0" tIns="0" bIns="0"/>
+          <a:lstStyle/>
+          <a:p>
+            <a:pPr algn="l"/>
+            <a:r>
+              <a:rPr sz="1700" b="0" i="0">
+                <a:solidFill>
+                  <a:srgbClr val="202122"/>
+                </a:solidFill>
+                <a:latin typeface="Calibri"/>
+              </a:rPr>
+              <a:t>Write the executive summary of the incident report.</a:t>
+            </a:r>
+          </a:p>
+        </p:txBody>
+      </p:sp>
+      <p:sp>
+        <p:nvSpPr>
+          <p:cNvPr id="17" name="Rounded Rectangle 16"/>
+          <p:cNvSpPr/>
+          <p:nvPr/>
+        </p:nvSpPr>
+        <p:spPr>
+          <a:xfrm>
+            <a:off x="7772400" y="1508760"/>
+            <a:ext cx="3867912" cy="4572000"/>
+          </a:xfrm>
+          <a:prstGeom prst="roundRect">
+            <a:avLst>
+              <a:gd name="adj" fmla="val 8000"/>
+            </a:avLst>
+          </a:prstGeom>
+          <a:solidFill>
+            <a:srgbClr val="EAF3FF"/>
+          </a:solidFill>
+          <a:ln>
+            <a:noFill/>
+          </a:ln>
+          <a:effectLst/>
+        </p:spPr>
+        <p:style>
+          <a:lnRef idx="1">
+            <a:schemeClr val="accent1"/>
+          </a:lnRef>
+          <a:fillRef idx="3">
+            <a:schemeClr val="accent1"/>
+          </a:fillRef>
+          <a:effectRef idx="2">
+            <a:schemeClr val="accent1"/>
+          </a:effectRef>
+          <a:fontRef idx="minor">
+            <a:schemeClr val="lt1"/>
+          </a:fontRef>
+        </p:style>
+        <p:txBody>
+          <a:bodyPr rtlCol="0" anchor="ctr"/>
+          <a:lstStyle/>
+          <a:p/>
+        </p:txBody>
+      </p:sp>
+      <p:sp>
+        <p:nvSpPr>
+          <p:cNvPr id="18" name="TextBox 17"/>
+          <p:cNvSpPr txBox="1"/>
+          <p:nvPr/>
+        </p:nvSpPr>
+        <p:spPr>
+          <a:xfrm>
+            <a:off x="8046720" y="1737360"/>
+            <a:ext cx="3291840" cy="365760"/>
+          </a:xfrm>
+          <a:prstGeom prst="rect">
+            <a:avLst/>
+          </a:prstGeom>
+          <a:noFill/>
+        </p:spPr>
+        <p:txBody>
+          <a:bodyPr wrap="square" anchor="t" lIns="0" rIns="0" tIns="0" bIns="0"/>
+          <a:lstStyle/>
+          <a:p>
+            <a:pPr algn="l"/>
+            <a:r>
+              <a:rPr sz="1300" b="1" i="0">
+                <a:solidFill>
+                  <a:srgbClr val="0645AD"/>
+                </a:solidFill>
+                <a:latin typeface="Calibri"/>
+              </a:rPr>
+              <a:t>SUCCESS CRITERIA</a:t>
+            </a:r>
+          </a:p>
+        </p:txBody>
+      </p:sp>
+      <p:sp>
+        <p:nvSpPr>
+          <p:cNvPr id="19" name="TextBox 18"/>
+          <p:cNvSpPr txBox="1"/>
+          <p:nvPr/>
+        </p:nvSpPr>
+        <p:spPr>
+          <a:xfrm>
+            <a:off x="8046720" y="2240280"/>
+            <a:ext cx="3337560" cy="3657600"/>
+          </a:xfrm>
+          <a:prstGeom prst="rect">
+            <a:avLst/>
+          </a:prstGeom>
+          <a:noFill/>
+        </p:spPr>
+        <p:txBody>
+          <a:bodyPr wrap="square" lIns="0" rIns="0" tIns="0" bIns="0">
+            <a:spAutoFit/>
+          </a:bodyPr>
+          <a:lstStyle/>
+          <a:p>
+            <a:pPr marL="274320" indent="-274320">
+              <a:spcAft>
+                <a:spcPts val="810"/>
+              </a:spcAft>
+              <a:buClr>
+                <a:srgbClr val="0645AD"/>
+              </a:buClr>
+              <a:buFont typeface="Arial"/>
+              <a:buChar char="•"/>
+            </a:pPr>
+            <a:r>
+              <a:rPr sz="1800" b="0">
+                <a:solidFill>
+                  <a:srgbClr val="202122"/>
+                </a:solidFill>
+                <a:latin typeface="Calibri"/>
+              </a:rPr>
+              <a:t>Stages in the correct order</a:t>
+            </a:r>
+          </a:p>
+          <a:p>
+            <a:pPr marL="274320" indent="-274320">
+              <a:spcAft>
+                <a:spcPts val="810"/>
+              </a:spcAft>
+              <a:buClr>
+                <a:srgbClr val="0645AD"/>
+              </a:buClr>
+              <a:buFont typeface="Arial"/>
+              <a:buChar char="•"/>
+            </a:pPr>
+            <a:r>
+              <a:rPr sz="1800" b="0">
+                <a:solidFill>
+                  <a:srgbClr val="202122"/>
+                </a:solidFill>
+                <a:latin typeface="Calibri"/>
+              </a:rPr>
+              <a:t>Evidence preserved before remediation</a:t>
+            </a:r>
+          </a:p>
+          <a:p>
+            <a:pPr marL="274320" indent="-274320">
+              <a:spcAft>
+                <a:spcPts val="810"/>
+              </a:spcAft>
+              <a:buClr>
+                <a:srgbClr val="0645AD"/>
+              </a:buClr>
+              <a:buFont typeface="Arial"/>
+              <a:buChar char="•"/>
+            </a:pPr>
+            <a:r>
+              <a:rPr sz="1800" b="0">
+                <a:solidFill>
+                  <a:srgbClr val="202122"/>
+                </a:solidFill>
+                <a:latin typeface="Calibri"/>
+              </a:rPr>
+              <a:t>ICO reporting considered</a:t>
+            </a:r>
+          </a:p>
+          <a:p>
+            <a:pPr marL="274320" indent="-274320">
+              <a:spcAft>
+                <a:spcPts val="810"/>
+              </a:spcAft>
+              <a:buClr>
+                <a:srgbClr val="0645AD"/>
+              </a:buClr>
+              <a:buFont typeface="Arial"/>
+              <a:buChar char="•"/>
+            </a:pPr>
+            <a:r>
+              <a:rPr sz="1800" b="0">
+                <a:solidFill>
+                  <a:srgbClr val="202122"/>
+                </a:solidFill>
+                <a:latin typeface="Calibri"/>
+              </a:rPr>
+              <a:t>Summary is clear to a manager</a:t>
+            </a:r>
+          </a:p>
+        </p:txBody>
+      </p:sp>
+    </p:spTree>
+  </p:cSld>
+  <p:clrMapOvr>
+    <a:masterClrMapping/>
+  </p:clrMapOvr>
+</p:sld>
+</file>
+
+<file path=ppt/slides/slide16.xml><?xml version="1.0" encoding="utf-8"?>
+<p:sld xmlns:a="http://schemas.openxmlformats.org/drawingml/2006/main" xmlns:p="http://schemas.openxmlformats.org/presentationml/2006/main" xmlns:r="http://schemas.openxmlformats.org/officeDocument/2006/relationships">
+  <p:cSld>
+    <p:bg>
+      <p:bgPr>
+        <a:solidFill>
           <a:srgbClr val="03306E"/>
         </a:solidFill>
         <a:effectLst/>
@@ -5353,20 +9184,102 @@
       </p:sp>
       <p:sp>
         <p:nvSpPr>
-          <p:cNvPr id="6" name="Rectangle 5"/>
+          <p:cNvPr id="6" name="TextBox 5"/>
+          <p:cNvSpPr txBox="1"/>
+          <p:nvPr/>
+        </p:nvSpPr>
+        <p:spPr>
+          <a:xfrm>
+            <a:off x="548640" y="1554480"/>
+            <a:ext cx="6720840" cy="4617720"/>
+          </a:xfrm>
+          <a:prstGeom prst="rect">
+            <a:avLst/>
+          </a:prstGeom>
+          <a:noFill/>
+        </p:spPr>
+        <p:txBody>
+          <a:bodyPr wrap="square" lIns="0" rIns="0" tIns="0" bIns="0">
+            <a:spAutoFit/>
+          </a:bodyPr>
+          <a:lstStyle/>
+          <a:p>
+            <a:pPr>
+              <a:spcAft>
+                <a:spcPts val="1260"/>
+              </a:spcAft>
+            </a:pPr>
+            <a:r>
+              <a:rPr sz="2100" b="0">
+                <a:solidFill>
+                  <a:srgbClr val="202122"/>
+                </a:solidFill>
+                <a:latin typeface="Calibri"/>
+              </a:rPr>
+              <a:t>Digital forensics gathers evidence from devices and networks that can stand up in court or an investigation. It follows five stages.</a:t>
+            </a:r>
+          </a:p>
+          <a:p>
+            <a:pPr>
+              <a:spcAft>
+                <a:spcPts val="1260"/>
+              </a:spcAft>
+            </a:pPr>
+            <a:r>
+              <a:rPr sz="2100" b="1">
+                <a:solidFill>
+                  <a:srgbClr val="202122"/>
+                </a:solidFill>
+                <a:latin typeface="Calibri"/>
+              </a:rPr>
+              <a:t>Identification:</a:t>
+            </a:r>
+            <a:r>
+              <a:rPr sz="2100" b="0">
+                <a:solidFill>
+                  <a:srgbClr val="202122"/>
+                </a:solidFill>
+                <a:latin typeface="Calibri"/>
+              </a:rPr>
+              <a:t> what evidence exists, where it is and how it's stored. Preservation: isolate and secure it without changing it, in chronological order and within legal retention periods. Analysis: rebuild fragments of data and draw conclusions based only on the evidence. Documentation: record every finding and every step taken. Presentation: report to the right body, such as the police.</a:t>
+            </a:r>
+          </a:p>
+          <a:p>
+            <a:pPr>
+              <a:spcAft>
+                <a:spcPts val="1260"/>
+              </a:spcAft>
+            </a:pPr>
+            <a:r>
+              <a:rPr sz="2100" b="0">
+                <a:solidFill>
+                  <a:srgbClr val="202122"/>
+                </a:solidFill>
+                <a:latin typeface="Calibri"/>
+              </a:rPr>
+              <a:t>If evidence is altered or its handling isn't recorded, it may be unusable.</a:t>
+            </a:r>
+          </a:p>
+        </p:txBody>
+      </p:sp>
+      <p:sp>
+        <p:nvSpPr>
+          <p:cNvPr id="7" name="Rounded Rectangle 6"/>
           <p:cNvSpPr/>
           <p:nvPr/>
         </p:nvSpPr>
         <p:spPr>
           <a:xfrm>
-            <a:off x="1603217" y="2656332"/>
-            <a:ext cx="8985260" cy="36576"/>
-          </a:xfrm>
-          <a:prstGeom prst="rect">
-            <a:avLst/>
+            <a:off x="7772400" y="1554480"/>
+            <a:ext cx="3867912" cy="4526280"/>
+          </a:xfrm>
+          <a:prstGeom prst="roundRect">
+            <a:avLst>
+              <a:gd name="adj" fmla="val 8000"/>
+            </a:avLst>
           </a:prstGeom>
           <a:solidFill>
-            <a:srgbClr val="A9C8F0"/>
+            <a:srgbClr val="03306E"/>
           </a:solidFill>
           <a:ln>
             <a:noFill/>
@@ -5395,14 +9308,14 @@
       </p:sp>
       <p:sp>
         <p:nvSpPr>
-          <p:cNvPr id="7" name="Oval 6"/>
+          <p:cNvPr id="8" name="Oval 7"/>
           <p:cNvSpPr/>
           <p:nvPr/>
         </p:nvSpPr>
         <p:spPr>
           <a:xfrm>
-            <a:off x="1283177" y="2354580"/>
-            <a:ext cx="640080" cy="640080"/>
+            <a:off x="8046720" y="1828800"/>
+            <a:ext cx="548640" cy="548640"/>
           </a:xfrm>
           <a:prstGeom prst="ellipse">
             <a:avLst/>
@@ -5435,27 +9348,27 @@
           <a:p>
             <a:pPr algn="ctr"/>
             <a:r>
-              <a:rPr sz="2000" b="1">
+              <a:rPr sz="1300" b="1">
                 <a:solidFill>
                   <a:srgbClr val="FFFFFF"/>
                 </a:solidFill>
                 <a:latin typeface="Calibri"/>
               </a:rPr>
-              <a:t>1</a:t>
-            </a:r>
-          </a:p>
-        </p:txBody>
-      </p:sp>
-      <p:sp>
-        <p:nvSpPr>
-          <p:cNvPr id="8" name="TextBox 7"/>
-          <p:cNvSpPr txBox="1"/>
-          <p:nvPr/>
-        </p:nvSpPr>
-        <p:spPr>
-          <a:xfrm>
-            <a:off x="548640" y="3131820"/>
-            <a:ext cx="2109155" cy="731520"/>
+              <a:t>e.g.</a:t>
+            </a:r>
+          </a:p>
+        </p:txBody>
+      </p:sp>
+      <p:sp>
+        <p:nvSpPr>
+          <p:cNvPr id="9" name="TextBox 8"/>
+          <p:cNvSpPr txBox="1"/>
+          <p:nvPr/>
+        </p:nvSpPr>
+        <p:spPr>
+          <a:xfrm>
+            <a:off x="8046720" y="2560320"/>
+            <a:ext cx="3291840" cy="365760"/>
           </a:xfrm>
           <a:prstGeom prst="rect">
             <a:avLst/>
@@ -5466,61 +9379,17 @@
           <a:bodyPr wrap="square" anchor="t" lIns="0" rIns="0" tIns="0" bIns="0"/>
           <a:lstStyle/>
           <a:p>
-            <a:pPr algn="ctr"/>
-            <a:r>
-              <a:rPr sz="1700" b="1" i="0">
-                <a:solidFill>
-                  <a:srgbClr val="03306E"/>
-                </a:solidFill>
-                <a:latin typeface="Calibri"/>
-              </a:rPr>
-              <a:t>Identification</a:t>
-            </a:r>
-          </a:p>
-        </p:txBody>
-      </p:sp>
-      <p:sp>
-        <p:nvSpPr>
-          <p:cNvPr id="9" name="Rounded Rectangle 8"/>
-          <p:cNvSpPr/>
-          <p:nvPr/>
-        </p:nvSpPr>
-        <p:spPr>
-          <a:xfrm>
-            <a:off x="548640" y="3909060"/>
-            <a:ext cx="2109155" cy="1508760"/>
-          </a:xfrm>
-          <a:prstGeom prst="roundRect">
-            <a:avLst>
-              <a:gd name="adj" fmla="val 6000"/>
-            </a:avLst>
-          </a:prstGeom>
-          <a:solidFill>
-            <a:srgbClr val="EAF3FF"/>
-          </a:solidFill>
-          <a:ln>
-            <a:noFill/>
-          </a:ln>
-          <a:effectLst/>
-        </p:spPr>
-        <p:style>
-          <a:lnRef idx="1">
-            <a:schemeClr val="accent1"/>
-          </a:lnRef>
-          <a:fillRef idx="3">
-            <a:schemeClr val="accent1"/>
-          </a:fillRef>
-          <a:effectRef idx="2">
-            <a:schemeClr val="accent1"/>
-          </a:effectRef>
-          <a:fontRef idx="minor">
-            <a:schemeClr val="lt1"/>
-          </a:fontRef>
-        </p:style>
-        <p:txBody>
-          <a:bodyPr rtlCol="0" anchor="ctr"/>
-          <a:lstStyle/>
-          <a:p/>
+            <a:pPr algn="l"/>
+            <a:r>
+              <a:rPr sz="1300" b="1" i="0">
+                <a:solidFill>
+                  <a:srgbClr val="A9C8F0"/>
+                </a:solidFill>
+                <a:latin typeface="Calibri"/>
+              </a:rPr>
+              <a:t>EXAMPLE</a:t>
+            </a:r>
+          </a:p>
         </p:txBody>
       </p:sp>
       <p:sp>
@@ -5531,8 +9400,8 @@
         </p:nvSpPr>
         <p:spPr>
           <a:xfrm>
-            <a:off x="685800" y="4046220"/>
-            <a:ext cx="1834835" cy="1234439"/>
+            <a:off x="8046720" y="2971800"/>
+            <a:ext cx="3291840" cy="2971800"/>
           </a:xfrm>
           <a:prstGeom prst="rect">
             <a:avLst/>
@@ -5545,665 +9414,13 @@
           <a:p>
             <a:pPr algn="l"/>
             <a:r>
-              <a:rPr sz="1800" b="0" i="0">
-                <a:solidFill>
-                  <a:srgbClr val="202122"/>
-                </a:solidFill>
-                <a:latin typeface="Calibri"/>
-              </a:rPr>
-              <a:t>What evidence exists, where and how it is stored.</a:t>
-            </a:r>
-          </a:p>
-        </p:txBody>
-      </p:sp>
-      <p:sp>
-        <p:nvSpPr>
-          <p:cNvPr id="11" name="Oval 10"/>
-          <p:cNvSpPr/>
-          <p:nvPr/>
-        </p:nvSpPr>
-        <p:spPr>
-          <a:xfrm>
-            <a:off x="3529492" y="2354580"/>
-            <a:ext cx="640080" cy="640080"/>
-          </a:xfrm>
-          <a:prstGeom prst="ellipse">
-            <a:avLst/>
-          </a:prstGeom>
-          <a:solidFill>
-            <a:srgbClr val="E0463A"/>
-          </a:solidFill>
-          <a:ln>
-            <a:noFill/>
-          </a:ln>
-          <a:effectLst/>
-        </p:spPr>
-        <p:style>
-          <a:lnRef idx="1">
-            <a:schemeClr val="accent1"/>
-          </a:lnRef>
-          <a:fillRef idx="3">
-            <a:schemeClr val="accent1"/>
-          </a:fillRef>
-          <a:effectRef idx="2">
-            <a:schemeClr val="accent1"/>
-          </a:effectRef>
-          <a:fontRef idx="minor">
-            <a:schemeClr val="lt1"/>
-          </a:fontRef>
-        </p:style>
-        <p:txBody>
-          <a:bodyPr rtlCol="0" anchor="ctr" lIns="0" rIns="0" tIns="0" bIns="0"/>
-          <a:lstStyle/>
-          <a:p>
-            <a:pPr algn="ctr"/>
-            <a:r>
-              <a:rPr sz="2000" b="1">
+              <a:rPr sz="1900" b="0" i="0">
                 <a:solidFill>
                   <a:srgbClr val="FFFFFF"/>
                 </a:solidFill>
-                <a:latin typeface="Calibri"/>
-              </a:rPr>
-              <a:t>2</a:t>
-            </a:r>
-          </a:p>
-        </p:txBody>
-      </p:sp>
-      <p:sp>
-        <p:nvSpPr>
-          <p:cNvPr id="12" name="TextBox 11"/>
-          <p:cNvSpPr txBox="1"/>
-          <p:nvPr/>
-        </p:nvSpPr>
-        <p:spPr>
-          <a:xfrm>
-            <a:off x="2794955" y="3131820"/>
-            <a:ext cx="2109155" cy="731520"/>
-          </a:xfrm>
-          <a:prstGeom prst="rect">
-            <a:avLst/>
-          </a:prstGeom>
-          <a:noFill/>
-        </p:spPr>
-        <p:txBody>
-          <a:bodyPr wrap="square" anchor="t" lIns="0" rIns="0" tIns="0" bIns="0"/>
-          <a:lstStyle/>
-          <a:p>
-            <a:pPr algn="ctr"/>
-            <a:r>
-              <a:rPr sz="1700" b="1" i="0">
-                <a:solidFill>
-                  <a:srgbClr val="03306E"/>
-                </a:solidFill>
-                <a:latin typeface="Calibri"/>
-              </a:rPr>
-              <a:t>Preservation</a:t>
-            </a:r>
-          </a:p>
-        </p:txBody>
-      </p:sp>
-      <p:sp>
-        <p:nvSpPr>
-          <p:cNvPr id="13" name="Rounded Rectangle 12"/>
-          <p:cNvSpPr/>
-          <p:nvPr/>
-        </p:nvSpPr>
-        <p:spPr>
-          <a:xfrm>
-            <a:off x="2794955" y="3909060"/>
-            <a:ext cx="2109155" cy="1508760"/>
-          </a:xfrm>
-          <a:prstGeom prst="roundRect">
-            <a:avLst>
-              <a:gd name="adj" fmla="val 6000"/>
-            </a:avLst>
-          </a:prstGeom>
-          <a:solidFill>
-            <a:srgbClr val="EAF3FF"/>
-          </a:solidFill>
-          <a:ln>
-            <a:noFill/>
-          </a:ln>
-          <a:effectLst/>
-        </p:spPr>
-        <p:style>
-          <a:lnRef idx="1">
-            <a:schemeClr val="accent1"/>
-          </a:lnRef>
-          <a:fillRef idx="3">
-            <a:schemeClr val="accent1"/>
-          </a:fillRef>
-          <a:effectRef idx="2">
-            <a:schemeClr val="accent1"/>
-          </a:effectRef>
-          <a:fontRef idx="minor">
-            <a:schemeClr val="lt1"/>
-          </a:fontRef>
-        </p:style>
-        <p:txBody>
-          <a:bodyPr rtlCol="0" anchor="ctr"/>
-          <a:lstStyle/>
-          <a:p/>
-        </p:txBody>
-      </p:sp>
-      <p:sp>
-        <p:nvSpPr>
-          <p:cNvPr id="14" name="TextBox 13"/>
-          <p:cNvSpPr txBox="1"/>
-          <p:nvPr/>
-        </p:nvSpPr>
-        <p:spPr>
-          <a:xfrm>
-            <a:off x="2932115" y="4046220"/>
-            <a:ext cx="1834835" cy="1234439"/>
-          </a:xfrm>
-          <a:prstGeom prst="rect">
-            <a:avLst/>
-          </a:prstGeom>
-          <a:noFill/>
-        </p:spPr>
-        <p:txBody>
-          <a:bodyPr wrap="square" anchor="t" lIns="0" rIns="0" tIns="0" bIns="0"/>
-          <a:lstStyle/>
-          <a:p>
-            <a:pPr algn="l"/>
-            <a:r>
-              <a:rPr sz="1800" b="0" i="0">
-                <a:solidFill>
-                  <a:srgbClr val="202122"/>
-                </a:solidFill>
-                <a:latin typeface="Calibri"/>
-              </a:rPr>
-              <a:t>Isolate and secure it in order, without tampering.</a:t>
-            </a:r>
-          </a:p>
-        </p:txBody>
-      </p:sp>
-      <p:sp>
-        <p:nvSpPr>
-          <p:cNvPr id="15" name="Oval 14"/>
-          <p:cNvSpPr/>
-          <p:nvPr/>
-        </p:nvSpPr>
-        <p:spPr>
-          <a:xfrm>
-            <a:off x="5775807" y="2354580"/>
-            <a:ext cx="640080" cy="640080"/>
-          </a:xfrm>
-          <a:prstGeom prst="ellipse">
-            <a:avLst/>
-          </a:prstGeom>
-          <a:solidFill>
-            <a:srgbClr val="E0463A"/>
-          </a:solidFill>
-          <a:ln>
-            <a:noFill/>
-          </a:ln>
-          <a:effectLst/>
-        </p:spPr>
-        <p:style>
-          <a:lnRef idx="1">
-            <a:schemeClr val="accent1"/>
-          </a:lnRef>
-          <a:fillRef idx="3">
-            <a:schemeClr val="accent1"/>
-          </a:fillRef>
-          <a:effectRef idx="2">
-            <a:schemeClr val="accent1"/>
-          </a:effectRef>
-          <a:fontRef idx="minor">
-            <a:schemeClr val="lt1"/>
-          </a:fontRef>
-        </p:style>
-        <p:txBody>
-          <a:bodyPr rtlCol="0" anchor="ctr" lIns="0" rIns="0" tIns="0" bIns="0"/>
-          <a:lstStyle/>
-          <a:p>
-            <a:pPr algn="ctr"/>
-            <a:r>
-              <a:rPr sz="2000" b="1">
-                <a:solidFill>
-                  <a:srgbClr val="FFFFFF"/>
-                </a:solidFill>
-                <a:latin typeface="Calibri"/>
-              </a:rPr>
-              <a:t>3</a:t>
-            </a:r>
-          </a:p>
-        </p:txBody>
-      </p:sp>
-      <p:sp>
-        <p:nvSpPr>
-          <p:cNvPr id="16" name="TextBox 15"/>
-          <p:cNvSpPr txBox="1"/>
-          <p:nvPr/>
-        </p:nvSpPr>
-        <p:spPr>
-          <a:xfrm>
-            <a:off x="5041270" y="3131820"/>
-            <a:ext cx="2109155" cy="731520"/>
-          </a:xfrm>
-          <a:prstGeom prst="rect">
-            <a:avLst/>
-          </a:prstGeom>
-          <a:noFill/>
-        </p:spPr>
-        <p:txBody>
-          <a:bodyPr wrap="square" anchor="t" lIns="0" rIns="0" tIns="0" bIns="0"/>
-          <a:lstStyle/>
-          <a:p>
-            <a:pPr algn="ctr"/>
-            <a:r>
-              <a:rPr sz="1700" b="1" i="0">
-                <a:solidFill>
-                  <a:srgbClr val="03306E"/>
-                </a:solidFill>
-                <a:latin typeface="Calibri"/>
-              </a:rPr>
-              <a:t>Analysis</a:t>
-            </a:r>
-          </a:p>
-        </p:txBody>
-      </p:sp>
-      <p:sp>
-        <p:nvSpPr>
-          <p:cNvPr id="17" name="Rounded Rectangle 16"/>
-          <p:cNvSpPr/>
-          <p:nvPr/>
-        </p:nvSpPr>
-        <p:spPr>
-          <a:xfrm>
-            <a:off x="5041270" y="3909060"/>
-            <a:ext cx="2109155" cy="1508760"/>
-          </a:xfrm>
-          <a:prstGeom prst="roundRect">
-            <a:avLst>
-              <a:gd name="adj" fmla="val 6000"/>
-            </a:avLst>
-          </a:prstGeom>
-          <a:solidFill>
-            <a:srgbClr val="EAF3FF"/>
-          </a:solidFill>
-          <a:ln>
-            <a:noFill/>
-          </a:ln>
-          <a:effectLst/>
-        </p:spPr>
-        <p:style>
-          <a:lnRef idx="1">
-            <a:schemeClr val="accent1"/>
-          </a:lnRef>
-          <a:fillRef idx="3">
-            <a:schemeClr val="accent1"/>
-          </a:fillRef>
-          <a:effectRef idx="2">
-            <a:schemeClr val="accent1"/>
-          </a:effectRef>
-          <a:fontRef idx="minor">
-            <a:schemeClr val="lt1"/>
-          </a:fontRef>
-        </p:style>
-        <p:txBody>
-          <a:bodyPr rtlCol="0" anchor="ctr"/>
-          <a:lstStyle/>
-          <a:p/>
-        </p:txBody>
-      </p:sp>
-      <p:sp>
-        <p:nvSpPr>
-          <p:cNvPr id="18" name="TextBox 17"/>
-          <p:cNvSpPr txBox="1"/>
-          <p:nvPr/>
-        </p:nvSpPr>
-        <p:spPr>
-          <a:xfrm>
-            <a:off x="5178430" y="4046220"/>
-            <a:ext cx="1834835" cy="1234439"/>
-          </a:xfrm>
-          <a:prstGeom prst="rect">
-            <a:avLst/>
-          </a:prstGeom>
-          <a:noFill/>
-        </p:spPr>
-        <p:txBody>
-          <a:bodyPr wrap="square" anchor="t" lIns="0" rIns="0" tIns="0" bIns="0"/>
-          <a:lstStyle/>
-          <a:p>
-            <a:pPr algn="l"/>
-            <a:r>
-              <a:rPr sz="1800" b="0" i="0">
-                <a:solidFill>
-                  <a:srgbClr val="202122"/>
-                </a:solidFill>
-                <a:latin typeface="Calibri"/>
-              </a:rPr>
-              <a:t>Reconstruct fragments and draw evidence-based conclusions.</a:t>
-            </a:r>
-          </a:p>
-        </p:txBody>
-      </p:sp>
-      <p:sp>
-        <p:nvSpPr>
-          <p:cNvPr id="19" name="Oval 18"/>
-          <p:cNvSpPr/>
-          <p:nvPr/>
-        </p:nvSpPr>
-        <p:spPr>
-          <a:xfrm>
-            <a:off x="8022122" y="2354580"/>
-            <a:ext cx="640080" cy="640080"/>
-          </a:xfrm>
-          <a:prstGeom prst="ellipse">
-            <a:avLst/>
-          </a:prstGeom>
-          <a:solidFill>
-            <a:srgbClr val="E0463A"/>
-          </a:solidFill>
-          <a:ln>
-            <a:noFill/>
-          </a:ln>
-          <a:effectLst/>
-        </p:spPr>
-        <p:style>
-          <a:lnRef idx="1">
-            <a:schemeClr val="accent1"/>
-          </a:lnRef>
-          <a:fillRef idx="3">
-            <a:schemeClr val="accent1"/>
-          </a:fillRef>
-          <a:effectRef idx="2">
-            <a:schemeClr val="accent1"/>
-          </a:effectRef>
-          <a:fontRef idx="minor">
-            <a:schemeClr val="lt1"/>
-          </a:fontRef>
-        </p:style>
-        <p:txBody>
-          <a:bodyPr rtlCol="0" anchor="ctr" lIns="0" rIns="0" tIns="0" bIns="0"/>
-          <a:lstStyle/>
-          <a:p>
-            <a:pPr algn="ctr"/>
-            <a:r>
-              <a:rPr sz="2000" b="1">
-                <a:solidFill>
-                  <a:srgbClr val="FFFFFF"/>
-                </a:solidFill>
-                <a:latin typeface="Calibri"/>
-              </a:rPr>
-              <a:t>4</a:t>
-            </a:r>
-          </a:p>
-        </p:txBody>
-      </p:sp>
-      <p:sp>
-        <p:nvSpPr>
-          <p:cNvPr id="20" name="TextBox 19"/>
-          <p:cNvSpPr txBox="1"/>
-          <p:nvPr/>
-        </p:nvSpPr>
-        <p:spPr>
-          <a:xfrm>
-            <a:off x="7287585" y="3131820"/>
-            <a:ext cx="2109155" cy="731520"/>
-          </a:xfrm>
-          <a:prstGeom prst="rect">
-            <a:avLst/>
-          </a:prstGeom>
-          <a:noFill/>
-        </p:spPr>
-        <p:txBody>
-          <a:bodyPr wrap="square" anchor="t" lIns="0" rIns="0" tIns="0" bIns="0"/>
-          <a:lstStyle/>
-          <a:p>
-            <a:pPr algn="ctr"/>
-            <a:r>
-              <a:rPr sz="1700" b="1" i="0">
-                <a:solidFill>
-                  <a:srgbClr val="03306E"/>
-                </a:solidFill>
-                <a:latin typeface="Calibri"/>
-              </a:rPr>
-              <a:t>Documentation</a:t>
-            </a:r>
-          </a:p>
-        </p:txBody>
-      </p:sp>
-      <p:sp>
-        <p:nvSpPr>
-          <p:cNvPr id="21" name="Rounded Rectangle 20"/>
-          <p:cNvSpPr/>
-          <p:nvPr/>
-        </p:nvSpPr>
-        <p:spPr>
-          <a:xfrm>
-            <a:off x="7287585" y="3909060"/>
-            <a:ext cx="2109155" cy="1508760"/>
-          </a:xfrm>
-          <a:prstGeom prst="roundRect">
-            <a:avLst>
-              <a:gd name="adj" fmla="val 6000"/>
-            </a:avLst>
-          </a:prstGeom>
-          <a:solidFill>
-            <a:srgbClr val="EAF3FF"/>
-          </a:solidFill>
-          <a:ln>
-            <a:noFill/>
-          </a:ln>
-          <a:effectLst/>
-        </p:spPr>
-        <p:style>
-          <a:lnRef idx="1">
-            <a:schemeClr val="accent1"/>
-          </a:lnRef>
-          <a:fillRef idx="3">
-            <a:schemeClr val="accent1"/>
-          </a:fillRef>
-          <a:effectRef idx="2">
-            <a:schemeClr val="accent1"/>
-          </a:effectRef>
-          <a:fontRef idx="minor">
-            <a:schemeClr val="lt1"/>
-          </a:fontRef>
-        </p:style>
-        <p:txBody>
-          <a:bodyPr rtlCol="0" anchor="ctr"/>
-          <a:lstStyle/>
-          <a:p/>
-        </p:txBody>
-      </p:sp>
-      <p:sp>
-        <p:nvSpPr>
-          <p:cNvPr id="22" name="TextBox 21"/>
-          <p:cNvSpPr txBox="1"/>
-          <p:nvPr/>
-        </p:nvSpPr>
-        <p:spPr>
-          <a:xfrm>
-            <a:off x="7424745" y="4046220"/>
-            <a:ext cx="1834835" cy="1234439"/>
-          </a:xfrm>
-          <a:prstGeom prst="rect">
-            <a:avLst/>
-          </a:prstGeom>
-          <a:noFill/>
-        </p:spPr>
-        <p:txBody>
-          <a:bodyPr wrap="square" anchor="t" lIns="0" rIns="0" tIns="0" bIns="0"/>
-          <a:lstStyle/>
-          <a:p>
-            <a:pPr algn="l"/>
-            <a:r>
-              <a:rPr sz="1800" b="0" i="0">
-                <a:solidFill>
-                  <a:srgbClr val="202122"/>
-                </a:solidFill>
-                <a:latin typeface="Calibri"/>
-              </a:rPr>
-              <a:t>Record every finding and every step.</a:t>
-            </a:r>
-          </a:p>
-        </p:txBody>
-      </p:sp>
-      <p:sp>
-        <p:nvSpPr>
-          <p:cNvPr id="23" name="Oval 22"/>
-          <p:cNvSpPr/>
-          <p:nvPr/>
-        </p:nvSpPr>
-        <p:spPr>
-          <a:xfrm>
-            <a:off x="10268437" y="2354580"/>
-            <a:ext cx="640080" cy="640080"/>
-          </a:xfrm>
-          <a:prstGeom prst="ellipse">
-            <a:avLst/>
-          </a:prstGeom>
-          <a:solidFill>
-            <a:srgbClr val="E0463A"/>
-          </a:solidFill>
-          <a:ln>
-            <a:noFill/>
-          </a:ln>
-          <a:effectLst/>
-        </p:spPr>
-        <p:style>
-          <a:lnRef idx="1">
-            <a:schemeClr val="accent1"/>
-          </a:lnRef>
-          <a:fillRef idx="3">
-            <a:schemeClr val="accent1"/>
-          </a:fillRef>
-          <a:effectRef idx="2">
-            <a:schemeClr val="accent1"/>
-          </a:effectRef>
-          <a:fontRef idx="minor">
-            <a:schemeClr val="lt1"/>
-          </a:fontRef>
-        </p:style>
-        <p:txBody>
-          <a:bodyPr rtlCol="0" anchor="ctr" lIns="0" rIns="0" tIns="0" bIns="0"/>
-          <a:lstStyle/>
-          <a:p>
-            <a:pPr algn="ctr"/>
-            <a:r>
-              <a:rPr sz="2000" b="1">
-                <a:solidFill>
-                  <a:srgbClr val="FFFFFF"/>
-                </a:solidFill>
-                <a:latin typeface="Calibri"/>
-              </a:rPr>
-              <a:t>5</a:t>
-            </a:r>
-          </a:p>
-        </p:txBody>
-      </p:sp>
-      <p:sp>
-        <p:nvSpPr>
-          <p:cNvPr id="24" name="TextBox 23"/>
-          <p:cNvSpPr txBox="1"/>
-          <p:nvPr/>
-        </p:nvSpPr>
-        <p:spPr>
-          <a:xfrm>
-            <a:off x="9533900" y="3131820"/>
-            <a:ext cx="2109155" cy="731520"/>
-          </a:xfrm>
-          <a:prstGeom prst="rect">
-            <a:avLst/>
-          </a:prstGeom>
-          <a:noFill/>
-        </p:spPr>
-        <p:txBody>
-          <a:bodyPr wrap="square" anchor="t" lIns="0" rIns="0" tIns="0" bIns="0"/>
-          <a:lstStyle/>
-          <a:p>
-            <a:pPr algn="ctr"/>
-            <a:r>
-              <a:rPr sz="1700" b="1" i="0">
-                <a:solidFill>
-                  <a:srgbClr val="03306E"/>
-                </a:solidFill>
-                <a:latin typeface="Calibri"/>
-              </a:rPr>
-              <a:t>Presentation</a:t>
-            </a:r>
-          </a:p>
-        </p:txBody>
-      </p:sp>
-      <p:sp>
-        <p:nvSpPr>
-          <p:cNvPr id="25" name="Rounded Rectangle 24"/>
-          <p:cNvSpPr/>
-          <p:nvPr/>
-        </p:nvSpPr>
-        <p:spPr>
-          <a:xfrm>
-            <a:off x="9533900" y="3909060"/>
-            <a:ext cx="2109155" cy="1508760"/>
-          </a:xfrm>
-          <a:prstGeom prst="roundRect">
-            <a:avLst>
-              <a:gd name="adj" fmla="val 6000"/>
-            </a:avLst>
-          </a:prstGeom>
-          <a:solidFill>
-            <a:srgbClr val="EAF3FF"/>
-          </a:solidFill>
-          <a:ln>
-            <a:noFill/>
-          </a:ln>
-          <a:effectLst/>
-        </p:spPr>
-        <p:style>
-          <a:lnRef idx="1">
-            <a:schemeClr val="accent1"/>
-          </a:lnRef>
-          <a:fillRef idx="3">
-            <a:schemeClr val="accent1"/>
-          </a:fillRef>
-          <a:effectRef idx="2">
-            <a:schemeClr val="accent1"/>
-          </a:effectRef>
-          <a:fontRef idx="minor">
-            <a:schemeClr val="lt1"/>
-          </a:fontRef>
-        </p:style>
-        <p:txBody>
-          <a:bodyPr rtlCol="0" anchor="ctr"/>
-          <a:lstStyle/>
-          <a:p/>
-        </p:txBody>
-      </p:sp>
-      <p:sp>
-        <p:nvSpPr>
-          <p:cNvPr id="26" name="TextBox 25"/>
-          <p:cNvSpPr txBox="1"/>
-          <p:nvPr/>
-        </p:nvSpPr>
-        <p:spPr>
-          <a:xfrm>
-            <a:off x="9671060" y="4046220"/>
-            <a:ext cx="1834835" cy="1234439"/>
-          </a:xfrm>
-          <a:prstGeom prst="rect">
-            <a:avLst/>
-          </a:prstGeom>
-          <a:noFill/>
-        </p:spPr>
-        <p:txBody>
-          <a:bodyPr wrap="square" anchor="t" lIns="0" rIns="0" tIns="0" bIns="0"/>
-          <a:lstStyle/>
-          <a:p>
-            <a:pPr algn="l"/>
-            <a:r>
-              <a:rPr sz="1800" b="0" i="0">
-                <a:solidFill>
-                  <a:srgbClr val="202122"/>
-                </a:solidFill>
-                <a:latin typeface="Calibri"/>
-              </a:rPr>
-              <a:t>Report to the right body, e.g. law enforcement.</a:t>
+                <a:latin typeface="Cambria"/>
+              </a:rPr>
+              <a:t>An investigator makes a bit-for-bit copy of a hard drive and works only on the copy, so the original evidence is never changed.</a:t>
             </a:r>
           </a:p>
         </p:txBody>
@@ -6295,7 +9512,7 @@
                 </a:solidFill>
                 <a:latin typeface="Cambria"/>
               </a:rPr>
-              <a:t>Incident and event management</a:t>
+              <a:t>Forensic compliance model</a:t>
             </a:r>
           </a:p>
         </p:txBody>
@@ -6374,8 +9591,8 @@
         </p:nvSpPr>
         <p:spPr>
           <a:xfrm>
-            <a:off x="1282315" y="2808732"/>
-            <a:ext cx="9627064" cy="36576"/>
+            <a:off x="1603217" y="2656332"/>
+            <a:ext cx="8985260" cy="36576"/>
           </a:xfrm>
           <a:prstGeom prst="rect">
             <a:avLst/>
@@ -6416,7 +9633,7 @@
         </p:nvSpPr>
         <p:spPr>
           <a:xfrm>
-            <a:off x="962275" y="2506980"/>
+            <a:off x="1283177" y="2354580"/>
             <a:ext cx="640080" cy="640080"/>
           </a:xfrm>
           <a:prstGeom prst="ellipse">
@@ -6469,8 +9686,8 @@
         </p:nvSpPr>
         <p:spPr>
           <a:xfrm>
-            <a:off x="548640" y="3284219"/>
-            <a:ext cx="1467350" cy="731520"/>
+            <a:off x="548640" y="3131820"/>
+            <a:ext cx="2109155" cy="731520"/>
           </a:xfrm>
           <a:prstGeom prst="rect">
             <a:avLst/>
@@ -6489,7 +9706,7 @@
                 </a:solidFill>
                 <a:latin typeface="Calibri"/>
               </a:rPr>
-              <a:t>Identify</a:t>
+              <a:t>Identification</a:t>
             </a:r>
           </a:p>
         </p:txBody>
@@ -6502,8 +9719,8 @@
         </p:nvSpPr>
         <p:spPr>
           <a:xfrm>
-            <a:off x="548640" y="4061460"/>
-            <a:ext cx="1467350" cy="1203960"/>
+            <a:off x="548640" y="3909060"/>
+            <a:ext cx="2109155" cy="1508760"/>
           </a:xfrm>
           <a:prstGeom prst="roundRect">
             <a:avLst>
@@ -6546,8 +9763,8 @@
         </p:nvSpPr>
         <p:spPr>
           <a:xfrm>
-            <a:off x="685800" y="4198620"/>
-            <a:ext cx="1193030" cy="929640"/>
+            <a:off x="685800" y="4046220"/>
+            <a:ext cx="1834835" cy="1234439"/>
           </a:xfrm>
           <a:prstGeom prst="rect">
             <a:avLst/>
@@ -6560,13 +9777,13 @@
           <a:p>
             <a:pPr algn="l"/>
             <a:r>
-              <a:rPr sz="1300" b="0" i="0">
+              <a:rPr sz="1800" b="0" i="0">
                 <a:solidFill>
                   <a:srgbClr val="202122"/>
                 </a:solidFill>
                 <a:latin typeface="Calibri"/>
               </a:rPr>
-              <a:t>Via service desk, phone, email, SMS or chat.</a:t>
+              <a:t>What evidence exists, where and how it is stored.</a:t>
             </a:r>
           </a:p>
         </p:txBody>
@@ -6579,7 +9796,7 @@
         </p:nvSpPr>
         <p:spPr>
           <a:xfrm>
-            <a:off x="2566786" y="2506980"/>
+            <a:off x="3529492" y="2354580"/>
             <a:ext cx="640080" cy="640080"/>
           </a:xfrm>
           <a:prstGeom prst="ellipse">
@@ -6632,8 +9849,8 @@
         </p:nvSpPr>
         <p:spPr>
           <a:xfrm>
-            <a:off x="2153150" y="3284219"/>
-            <a:ext cx="1467350" cy="731520"/>
+            <a:off x="2794955" y="3131820"/>
+            <a:ext cx="2109155" cy="731520"/>
           </a:xfrm>
           <a:prstGeom prst="rect">
             <a:avLst/>
@@ -6652,7 +9869,7 @@
                 </a:solidFill>
                 <a:latin typeface="Calibri"/>
               </a:rPr>
-              <a:t>Log</a:t>
+              <a:t>Preservation</a:t>
             </a:r>
           </a:p>
         </p:txBody>
@@ -6665,8 +9882,8 @@
         </p:nvSpPr>
         <p:spPr>
           <a:xfrm>
-            <a:off x="2153150" y="4061460"/>
-            <a:ext cx="1467350" cy="1203960"/>
+            <a:off x="2794955" y="3909060"/>
+            <a:ext cx="2109155" cy="1508760"/>
           </a:xfrm>
           <a:prstGeom prst="roundRect">
             <a:avLst>
@@ -6709,8 +9926,8 @@
         </p:nvSpPr>
         <p:spPr>
           <a:xfrm>
-            <a:off x="2290310" y="4198620"/>
-            <a:ext cx="1193030" cy="929640"/>
+            <a:off x="2932115" y="4046220"/>
+            <a:ext cx="1834835" cy="1234439"/>
           </a:xfrm>
           <a:prstGeom prst="rect">
             <a:avLst/>
@@ -6723,13 +9940,13 @@
           <a:p>
             <a:pPr algn="l"/>
             <a:r>
-              <a:rPr sz="1300" b="0" i="0">
+              <a:rPr sz="1800" b="0" i="0">
                 <a:solidFill>
                   <a:srgbClr val="202122"/>
                 </a:solidFill>
                 <a:latin typeface="Calibri"/>
               </a:rPr>
-              <a:t>Manually or automatically by monitoring.</a:t>
+              <a:t>Isolate and secure it in order, without tampering.</a:t>
             </a:r>
           </a:p>
         </p:txBody>
@@ -6742,7 +9959,7 @@
         </p:nvSpPr>
         <p:spPr>
           <a:xfrm>
-            <a:off x="4171296" y="2506980"/>
+            <a:off x="5775807" y="2354580"/>
             <a:ext cx="640080" cy="640080"/>
           </a:xfrm>
           <a:prstGeom prst="ellipse">
@@ -6795,8 +10012,8 @@
         </p:nvSpPr>
         <p:spPr>
           <a:xfrm>
-            <a:off x="3757661" y="3284219"/>
-            <a:ext cx="1467350" cy="731520"/>
+            <a:off x="5041270" y="3131820"/>
+            <a:ext cx="2109155" cy="731520"/>
           </a:xfrm>
           <a:prstGeom prst="rect">
             <a:avLst/>
@@ -6815,7 +10032,7 @@
                 </a:solidFill>
                 <a:latin typeface="Calibri"/>
               </a:rPr>
-              <a:t>Manage</a:t>
+              <a:t>Analysis</a:t>
             </a:r>
           </a:p>
         </p:txBody>
@@ -6828,8 +10045,8 @@
         </p:nvSpPr>
         <p:spPr>
           <a:xfrm>
-            <a:off x="3757661" y="4061460"/>
-            <a:ext cx="1467350" cy="1203960"/>
+            <a:off x="5041270" y="3909060"/>
+            <a:ext cx="2109155" cy="1508760"/>
           </a:xfrm>
           <a:prstGeom prst="roundRect">
             <a:avLst>
@@ -6872,8 +10089,8 @@
         </p:nvSpPr>
         <p:spPr>
           <a:xfrm>
-            <a:off x="3894821" y="4198620"/>
-            <a:ext cx="1193030" cy="929640"/>
+            <a:off x="5178430" y="4046220"/>
+            <a:ext cx="1834835" cy="1234439"/>
           </a:xfrm>
           <a:prstGeom prst="rect">
             <a:avLst/>
@@ -6886,13 +10103,13 @@
           <a:p>
             <a:pPr algn="l"/>
             <a:r>
-              <a:rPr sz="1300" b="0" i="0">
+              <a:rPr sz="1800" b="0" i="0">
                 <a:solidFill>
                   <a:srgbClr val="202122"/>
                 </a:solidFill>
                 <a:latin typeface="Calibri"/>
               </a:rPr>
-              <a:t>Raise a ticket, assign, categorise by impact.</a:t>
+              <a:t>Reconstruct fragments and draw evidence-based conclusions.</a:t>
             </a:r>
           </a:p>
         </p:txBody>
@@ -6905,7 +10122,7 @@
         </p:nvSpPr>
         <p:spPr>
           <a:xfrm>
-            <a:off x="5775807" y="2506980"/>
+            <a:off x="8022122" y="2354580"/>
             <a:ext cx="640080" cy="640080"/>
           </a:xfrm>
           <a:prstGeom prst="ellipse">
@@ -6958,8 +10175,8 @@
         </p:nvSpPr>
         <p:spPr>
           <a:xfrm>
-            <a:off x="5362172" y="3284219"/>
-            <a:ext cx="1467350" cy="731520"/>
+            <a:off x="7287585" y="3131820"/>
+            <a:ext cx="2109155" cy="731520"/>
           </a:xfrm>
           <a:prstGeom prst="rect">
             <a:avLst/>
@@ -6978,7 +10195,7 @@
                 </a:solidFill>
                 <a:latin typeface="Calibri"/>
               </a:rPr>
-              <a:t>Prioritise</a:t>
+              <a:t>Documentation</a:t>
             </a:r>
           </a:p>
         </p:txBody>
@@ -6991,8 +10208,8 @@
         </p:nvSpPr>
         <p:spPr>
           <a:xfrm>
-            <a:off x="5362172" y="4061460"/>
-            <a:ext cx="1467350" cy="1203960"/>
+            <a:off x="7287585" y="3909060"/>
+            <a:ext cx="2109155" cy="1508760"/>
           </a:xfrm>
           <a:prstGeom prst="roundRect">
             <a:avLst>
@@ -7035,8 +10252,8 @@
         </p:nvSpPr>
         <p:spPr>
           <a:xfrm>
-            <a:off x="5499332" y="4198620"/>
-            <a:ext cx="1193030" cy="929640"/>
+            <a:off x="7424745" y="4046220"/>
+            <a:ext cx="1834835" cy="1234439"/>
           </a:xfrm>
           <a:prstGeom prst="rect">
             <a:avLst/>
@@ -7049,13 +10266,13 @@
           <a:p>
             <a:pPr algn="l"/>
             <a:r>
-              <a:rPr sz="1300" b="0" i="0">
+              <a:rPr sz="1800" b="0" i="0">
                 <a:solidFill>
                   <a:srgbClr val="202122"/>
                 </a:solidFill>
                 <a:latin typeface="Calibri"/>
               </a:rPr>
-              <a:t>Urgency, SLAs, escalation; report crimes and breaches.</a:t>
+              <a:t>Record every finding and every step.</a:t>
             </a:r>
           </a:p>
         </p:txBody>
@@ -7068,7 +10285,7 @@
         </p:nvSpPr>
         <p:spPr>
           <a:xfrm>
-            <a:off x="7380318" y="2506980"/>
+            <a:off x="10268437" y="2354580"/>
             <a:ext cx="640080" cy="640080"/>
           </a:xfrm>
           <a:prstGeom prst="ellipse">
@@ -7121,8 +10338,8 @@
         </p:nvSpPr>
         <p:spPr>
           <a:xfrm>
-            <a:off x="6966682" y="3284219"/>
-            <a:ext cx="1467350" cy="731520"/>
+            <a:off x="9533900" y="3131820"/>
+            <a:ext cx="2109155" cy="731520"/>
           </a:xfrm>
           <a:prstGeom prst="rect">
             <a:avLst/>
@@ -7141,7 +10358,7 @@
                 </a:solidFill>
                 <a:latin typeface="Calibri"/>
               </a:rPr>
-              <a:t>Resolve</a:t>
+              <a:t>Presentation</a:t>
             </a:r>
           </a:p>
         </p:txBody>
@@ -7154,8 +10371,8 @@
         </p:nvSpPr>
         <p:spPr>
           <a:xfrm>
-            <a:off x="6966682" y="4061460"/>
-            <a:ext cx="1467350" cy="1203960"/>
+            <a:off x="9533900" y="3909060"/>
+            <a:ext cx="2109155" cy="1508760"/>
           </a:xfrm>
           <a:prstGeom prst="roundRect">
             <a:avLst>
@@ -7198,8 +10415,8 @@
         </p:nvSpPr>
         <p:spPr>
           <a:xfrm>
-            <a:off x="7103842" y="4198620"/>
-            <a:ext cx="1193030" cy="929640"/>
+            <a:off x="9671060" y="4046220"/>
+            <a:ext cx="1834835" cy="1234439"/>
           </a:xfrm>
           <a:prstGeom prst="rect">
             <a:avLst/>
@@ -7212,339 +10429,13 @@
           <a:p>
             <a:pPr algn="l"/>
             <a:r>
-              <a:rPr sz="1300" b="0" i="0">
+              <a:rPr sz="1800" b="0" i="0">
                 <a:solidFill>
                   <a:srgbClr val="202122"/>
                 </a:solidFill>
                 <a:latin typeface="Calibri"/>
               </a:rPr>
-              <a:t>Workaround or permanent fix.</a:t>
-            </a:r>
-          </a:p>
-        </p:txBody>
-      </p:sp>
-      <p:sp>
-        <p:nvSpPr>
-          <p:cNvPr id="27" name="Oval 26"/>
-          <p:cNvSpPr/>
-          <p:nvPr/>
-        </p:nvSpPr>
-        <p:spPr>
-          <a:xfrm>
-            <a:off x="8984829" y="2506980"/>
-            <a:ext cx="640080" cy="640080"/>
-          </a:xfrm>
-          <a:prstGeom prst="ellipse">
-            <a:avLst/>
-          </a:prstGeom>
-          <a:solidFill>
-            <a:srgbClr val="E0463A"/>
-          </a:solidFill>
-          <a:ln>
-            <a:noFill/>
-          </a:ln>
-          <a:effectLst/>
-        </p:spPr>
-        <p:style>
-          <a:lnRef idx="1">
-            <a:schemeClr val="accent1"/>
-          </a:lnRef>
-          <a:fillRef idx="3">
-            <a:schemeClr val="accent1"/>
-          </a:fillRef>
-          <a:effectRef idx="2">
-            <a:schemeClr val="accent1"/>
-          </a:effectRef>
-          <a:fontRef idx="minor">
-            <a:schemeClr val="lt1"/>
-          </a:fontRef>
-        </p:style>
-        <p:txBody>
-          <a:bodyPr rtlCol="0" anchor="ctr" lIns="0" rIns="0" tIns="0" bIns="0"/>
-          <a:lstStyle/>
-          <a:p>
-            <a:pPr algn="ctr"/>
-            <a:r>
-              <a:rPr sz="2000" b="1">
-                <a:solidFill>
-                  <a:srgbClr val="FFFFFF"/>
-                </a:solidFill>
-                <a:latin typeface="Calibri"/>
-              </a:rPr>
-              <a:t>6</a:t>
-            </a:r>
-          </a:p>
-        </p:txBody>
-      </p:sp>
-      <p:sp>
-        <p:nvSpPr>
-          <p:cNvPr id="28" name="TextBox 27"/>
-          <p:cNvSpPr txBox="1"/>
-          <p:nvPr/>
-        </p:nvSpPr>
-        <p:spPr>
-          <a:xfrm>
-            <a:off x="8571193" y="3284219"/>
-            <a:ext cx="1467350" cy="731520"/>
-          </a:xfrm>
-          <a:prstGeom prst="rect">
-            <a:avLst/>
-          </a:prstGeom>
-          <a:noFill/>
-        </p:spPr>
-        <p:txBody>
-          <a:bodyPr wrap="square" anchor="t" lIns="0" rIns="0" tIns="0" bIns="0"/>
-          <a:lstStyle/>
-          <a:p>
-            <a:pPr algn="ctr"/>
-            <a:r>
-              <a:rPr sz="1700" b="1" i="0">
-                <a:solidFill>
-                  <a:srgbClr val="03306E"/>
-                </a:solidFill>
-                <a:latin typeface="Calibri"/>
-              </a:rPr>
-              <a:t>Close</a:t>
-            </a:r>
-          </a:p>
-        </p:txBody>
-      </p:sp>
-      <p:sp>
-        <p:nvSpPr>
-          <p:cNvPr id="29" name="Rounded Rectangle 28"/>
-          <p:cNvSpPr/>
-          <p:nvPr/>
-        </p:nvSpPr>
-        <p:spPr>
-          <a:xfrm>
-            <a:off x="8571193" y="4061460"/>
-            <a:ext cx="1467350" cy="1203960"/>
-          </a:xfrm>
-          <a:prstGeom prst="roundRect">
-            <a:avLst>
-              <a:gd name="adj" fmla="val 6000"/>
-            </a:avLst>
-          </a:prstGeom>
-          <a:solidFill>
-            <a:srgbClr val="EAF3FF"/>
-          </a:solidFill>
-          <a:ln>
-            <a:noFill/>
-          </a:ln>
-          <a:effectLst/>
-        </p:spPr>
-        <p:style>
-          <a:lnRef idx="1">
-            <a:schemeClr val="accent1"/>
-          </a:lnRef>
-          <a:fillRef idx="3">
-            <a:schemeClr val="accent1"/>
-          </a:fillRef>
-          <a:effectRef idx="2">
-            <a:schemeClr val="accent1"/>
-          </a:effectRef>
-          <a:fontRef idx="minor">
-            <a:schemeClr val="lt1"/>
-          </a:fontRef>
-        </p:style>
-        <p:txBody>
-          <a:bodyPr rtlCol="0" anchor="ctr"/>
-          <a:lstStyle/>
-          <a:p/>
-        </p:txBody>
-      </p:sp>
-      <p:sp>
-        <p:nvSpPr>
-          <p:cNvPr id="30" name="TextBox 29"/>
-          <p:cNvSpPr txBox="1"/>
-          <p:nvPr/>
-        </p:nvSpPr>
-        <p:spPr>
-          <a:xfrm>
-            <a:off x="8708353" y="4198620"/>
-            <a:ext cx="1193030" cy="929640"/>
-          </a:xfrm>
-          <a:prstGeom prst="rect">
-            <a:avLst/>
-          </a:prstGeom>
-          <a:noFill/>
-        </p:spPr>
-        <p:txBody>
-          <a:bodyPr wrap="square" anchor="t" lIns="0" rIns="0" tIns="0" bIns="0"/>
-          <a:lstStyle/>
-          <a:p>
-            <a:pPr algn="l"/>
-            <a:r>
-              <a:rPr sz="1300" b="0" i="0">
-                <a:solidFill>
-                  <a:srgbClr val="202122"/>
-                </a:solidFill>
-                <a:latin typeface="Calibri"/>
-              </a:rPr>
-              <a:t>Confirm and write an incident report.</a:t>
-            </a:r>
-          </a:p>
-        </p:txBody>
-      </p:sp>
-      <p:sp>
-        <p:nvSpPr>
-          <p:cNvPr id="31" name="Oval 30"/>
-          <p:cNvSpPr/>
-          <p:nvPr/>
-        </p:nvSpPr>
-        <p:spPr>
-          <a:xfrm>
-            <a:off x="10589339" y="2506980"/>
-            <a:ext cx="640080" cy="640080"/>
-          </a:xfrm>
-          <a:prstGeom prst="ellipse">
-            <a:avLst/>
-          </a:prstGeom>
-          <a:solidFill>
-            <a:srgbClr val="E0463A"/>
-          </a:solidFill>
-          <a:ln>
-            <a:noFill/>
-          </a:ln>
-          <a:effectLst/>
-        </p:spPr>
-        <p:style>
-          <a:lnRef idx="1">
-            <a:schemeClr val="accent1"/>
-          </a:lnRef>
-          <a:fillRef idx="3">
-            <a:schemeClr val="accent1"/>
-          </a:fillRef>
-          <a:effectRef idx="2">
-            <a:schemeClr val="accent1"/>
-          </a:effectRef>
-          <a:fontRef idx="minor">
-            <a:schemeClr val="lt1"/>
-          </a:fontRef>
-        </p:style>
-        <p:txBody>
-          <a:bodyPr rtlCol="0" anchor="ctr" lIns="0" rIns="0" tIns="0" bIns="0"/>
-          <a:lstStyle/>
-          <a:p>
-            <a:pPr algn="ctr"/>
-            <a:r>
-              <a:rPr sz="2000" b="1">
-                <a:solidFill>
-                  <a:srgbClr val="FFFFFF"/>
-                </a:solidFill>
-                <a:latin typeface="Calibri"/>
-              </a:rPr>
-              <a:t>7</a:t>
-            </a:r>
-          </a:p>
-        </p:txBody>
-      </p:sp>
-      <p:sp>
-        <p:nvSpPr>
-          <p:cNvPr id="32" name="TextBox 31"/>
-          <p:cNvSpPr txBox="1"/>
-          <p:nvPr/>
-        </p:nvSpPr>
-        <p:spPr>
-          <a:xfrm>
-            <a:off x="10175704" y="3284219"/>
-            <a:ext cx="1467350" cy="731520"/>
-          </a:xfrm>
-          <a:prstGeom prst="rect">
-            <a:avLst/>
-          </a:prstGeom>
-          <a:noFill/>
-        </p:spPr>
-        <p:txBody>
-          <a:bodyPr wrap="square" anchor="t" lIns="0" rIns="0" tIns="0" bIns="0"/>
-          <a:lstStyle/>
-          <a:p>
-            <a:pPr algn="ctr"/>
-            <a:r>
-              <a:rPr sz="1700" b="1" i="0">
-                <a:solidFill>
-                  <a:srgbClr val="03306E"/>
-                </a:solidFill>
-                <a:latin typeface="Calibri"/>
-              </a:rPr>
-              <a:t>Document</a:t>
-            </a:r>
-          </a:p>
-        </p:txBody>
-      </p:sp>
-      <p:sp>
-        <p:nvSpPr>
-          <p:cNvPr id="33" name="Rounded Rectangle 32"/>
-          <p:cNvSpPr/>
-          <p:nvPr/>
-        </p:nvSpPr>
-        <p:spPr>
-          <a:xfrm>
-            <a:off x="10175704" y="4061460"/>
-            <a:ext cx="1467350" cy="1203960"/>
-          </a:xfrm>
-          <a:prstGeom prst="roundRect">
-            <a:avLst>
-              <a:gd name="adj" fmla="val 6000"/>
-            </a:avLst>
-          </a:prstGeom>
-          <a:solidFill>
-            <a:srgbClr val="EAF3FF"/>
-          </a:solidFill>
-          <a:ln>
-            <a:noFill/>
-          </a:ln>
-          <a:effectLst/>
-        </p:spPr>
-        <p:style>
-          <a:lnRef idx="1">
-            <a:schemeClr val="accent1"/>
-          </a:lnRef>
-          <a:fillRef idx="3">
-            <a:schemeClr val="accent1"/>
-          </a:fillRef>
-          <a:effectRef idx="2">
-            <a:schemeClr val="accent1"/>
-          </a:effectRef>
-          <a:fontRef idx="minor">
-            <a:schemeClr val="lt1"/>
-          </a:fontRef>
-        </p:style>
-        <p:txBody>
-          <a:bodyPr rtlCol="0" anchor="ctr"/>
-          <a:lstStyle/>
-          <a:p/>
-        </p:txBody>
-      </p:sp>
-      <p:sp>
-        <p:nvSpPr>
-          <p:cNvPr id="34" name="TextBox 33"/>
-          <p:cNvSpPr txBox="1"/>
-          <p:nvPr/>
-        </p:nvSpPr>
-        <p:spPr>
-          <a:xfrm>
-            <a:off x="10312864" y="4198620"/>
-            <a:ext cx="1193030" cy="929640"/>
-          </a:xfrm>
-          <a:prstGeom prst="rect">
-            <a:avLst/>
-          </a:prstGeom>
-          <a:noFill/>
-        </p:spPr>
-        <p:txBody>
-          <a:bodyPr wrap="square" anchor="t" lIns="0" rIns="0" tIns="0" bIns="0"/>
-          <a:lstStyle/>
-          <a:p>
-            <a:pPr algn="l"/>
-            <a:r>
-              <a:rPr sz="1300" b="0" i="0">
-                <a:solidFill>
-                  <a:srgbClr val="202122"/>
-                </a:solidFill>
-                <a:latin typeface="Calibri"/>
-              </a:rPr>
-              <a:t>Store records per data protection law.</a:t>
+              <a:t>Report to the right body, e.g. law enforcement.</a:t>
             </a:r>
           </a:p>
         </p:txBody>
@@ -7636,7 +10527,7 @@
                 </a:solidFill>
                 <a:latin typeface="Cambria"/>
               </a:rPr>
-              <a:t>The incident report</a:t>
+              <a:t>Quick check: Forensic compliance model</a:t>
             </a:r>
           </a:p>
         </p:txBody>
@@ -7709,186 +10600,14 @@
       </p:sp>
       <p:sp>
         <p:nvSpPr>
-          <p:cNvPr id="6" name="TextBox 5"/>
-          <p:cNvSpPr txBox="1"/>
-          <p:nvPr/>
-        </p:nvSpPr>
-        <p:spPr>
-          <a:xfrm>
-            <a:off x="548640" y="1600200"/>
-            <a:ext cx="6675120" cy="4572000"/>
-          </a:xfrm>
-          <a:prstGeom prst="rect">
-            <a:avLst/>
-          </a:prstGeom>
-          <a:noFill/>
-        </p:spPr>
-        <p:txBody>
-          <a:bodyPr wrap="square" lIns="0" rIns="0" tIns="0" bIns="0">
-            <a:spAutoFit/>
-          </a:bodyPr>
-          <a:lstStyle/>
-          <a:p>
-            <a:pPr marL="274320" indent="-274320">
-              <a:spcAft>
-                <a:spcPts val="1080"/>
-              </a:spcAft>
-              <a:buClr>
-                <a:srgbClr val="0645AD"/>
-              </a:buClr>
-              <a:buFont typeface="Arial"/>
-              <a:buChar char="•"/>
-            </a:pPr>
-            <a:r>
-              <a:rPr sz="2400" b="0">
-                <a:solidFill>
-                  <a:srgbClr val="202122"/>
-                </a:solidFill>
-                <a:latin typeface="Calibri"/>
-              </a:rPr>
-              <a:t>Executive summary</a:t>
-            </a:r>
-          </a:p>
-          <a:p>
-            <a:pPr marL="274320" indent="-274320">
-              <a:spcAft>
-                <a:spcPts val="1080"/>
-              </a:spcAft>
-              <a:buClr>
-                <a:srgbClr val="0645AD"/>
-              </a:buClr>
-              <a:buFont typeface="Arial"/>
-              <a:buChar char="•"/>
-            </a:pPr>
-            <a:r>
-              <a:rPr sz="2400" b="0">
-                <a:solidFill>
-                  <a:srgbClr val="202122"/>
-                </a:solidFill>
-                <a:latin typeface="Calibri"/>
-              </a:rPr>
-              <a:t>Discovery and investigation</a:t>
-            </a:r>
-          </a:p>
-          <a:p>
-            <a:pPr marL="274320" indent="-274320">
-              <a:spcAft>
-                <a:spcPts val="1080"/>
-              </a:spcAft>
-              <a:buClr>
-                <a:srgbClr val="0645AD"/>
-              </a:buClr>
-              <a:buFont typeface="Arial"/>
-              <a:buChar char="•"/>
-            </a:pPr>
-            <a:r>
-              <a:rPr sz="2400" b="0">
-                <a:solidFill>
-                  <a:srgbClr val="202122"/>
-                </a:solidFill>
-                <a:latin typeface="Calibri"/>
-              </a:rPr>
-              <a:t>Impact</a:t>
-            </a:r>
-          </a:p>
-          <a:p>
-            <a:pPr marL="274320" indent="-274320">
-              <a:spcAft>
-                <a:spcPts val="1080"/>
-              </a:spcAft>
-              <a:buClr>
-                <a:srgbClr val="0645AD"/>
-              </a:buClr>
-              <a:buFont typeface="Arial"/>
-              <a:buChar char="•"/>
-            </a:pPr>
-            <a:r>
-              <a:rPr sz="2400" b="0">
-                <a:solidFill>
-                  <a:srgbClr val="202122"/>
-                </a:solidFill>
-                <a:latin typeface="Calibri"/>
-              </a:rPr>
-              <a:t>Mitigation</a:t>
-            </a:r>
-          </a:p>
-          <a:p>
-            <a:pPr marL="274320" indent="-274320">
-              <a:spcAft>
-                <a:spcPts val="1080"/>
-              </a:spcAft>
-              <a:buClr>
-                <a:srgbClr val="0645AD"/>
-              </a:buClr>
-              <a:buFont typeface="Arial"/>
-              <a:buChar char="•"/>
-            </a:pPr>
-            <a:r>
-              <a:rPr sz="2400" b="0">
-                <a:solidFill>
-                  <a:srgbClr val="202122"/>
-                </a:solidFill>
-                <a:latin typeface="Calibri"/>
-              </a:rPr>
-              <a:t>Recommendations and any ongoing risk</a:t>
-            </a:r>
-          </a:p>
-        </p:txBody>
-      </p:sp>
-      <p:sp>
-        <p:nvSpPr>
-          <p:cNvPr id="7" name="Rounded Rectangle 6"/>
+          <p:cNvPr id="6" name="Oval 5"/>
           <p:cNvSpPr/>
           <p:nvPr/>
         </p:nvSpPr>
         <p:spPr>
           <a:xfrm>
-            <a:off x="7772400" y="1600200"/>
-            <a:ext cx="3867912" cy="4434840"/>
-          </a:xfrm>
-          <a:prstGeom prst="roundRect">
-            <a:avLst>
-              <a:gd name="adj" fmla="val 8000"/>
-            </a:avLst>
-          </a:prstGeom>
-          <a:solidFill>
-            <a:srgbClr val="03306E"/>
-          </a:solidFill>
-          <a:ln>
-            <a:noFill/>
-          </a:ln>
-          <a:effectLst/>
-        </p:spPr>
-        <p:style>
-          <a:lnRef idx="1">
-            <a:schemeClr val="accent1"/>
-          </a:lnRef>
-          <a:fillRef idx="3">
-            <a:schemeClr val="accent1"/>
-          </a:fillRef>
-          <a:effectRef idx="2">
-            <a:schemeClr val="accent1"/>
-          </a:effectRef>
-          <a:fontRef idx="minor">
-            <a:schemeClr val="lt1"/>
-          </a:fontRef>
-        </p:style>
-        <p:txBody>
-          <a:bodyPr rtlCol="0" anchor="ctr"/>
-          <a:lstStyle/>
-          <a:p/>
-        </p:txBody>
-      </p:sp>
-      <p:sp>
-        <p:nvSpPr>
-          <p:cNvPr id="8" name="Oval 7"/>
-          <p:cNvSpPr/>
-          <p:nvPr/>
-        </p:nvSpPr>
-        <p:spPr>
-          <a:xfrm>
-            <a:off x="8046720" y="1874519"/>
-            <a:ext cx="548640" cy="548640"/>
+            <a:off x="548640" y="1691640"/>
+            <a:ext cx="502920" cy="502920"/>
           </a:xfrm>
           <a:prstGeom prst="ellipse">
             <a:avLst/>
@@ -7921,13 +10640,99 @@
           <a:p>
             <a:pPr algn="ctr"/>
             <a:r>
-              <a:rPr sz="2000" b="1">
+              <a:rPr sz="1600" b="1">
                 <a:solidFill>
                   <a:srgbClr val="FFFFFF"/>
                 </a:solidFill>
                 <a:latin typeface="Calibri"/>
               </a:rPr>
-              <a:t>!</a:t>
+              <a:t>1</a:t>
+            </a:r>
+          </a:p>
+        </p:txBody>
+      </p:sp>
+      <p:sp>
+        <p:nvSpPr>
+          <p:cNvPr id="7" name="TextBox 6"/>
+          <p:cNvSpPr txBox="1"/>
+          <p:nvPr/>
+        </p:nvSpPr>
+        <p:spPr>
+          <a:xfrm>
+            <a:off x="1371600" y="1645920"/>
+            <a:ext cx="10271455" cy="1188720"/>
+          </a:xfrm>
+          <a:prstGeom prst="rect">
+            <a:avLst/>
+          </a:prstGeom>
+          <a:noFill/>
+        </p:spPr>
+        <p:txBody>
+          <a:bodyPr wrap="square" anchor="t" lIns="0" rIns="0" tIns="0" bIns="0"/>
+          <a:lstStyle/>
+          <a:p>
+            <a:pPr algn="l"/>
+            <a:r>
+              <a:rPr sz="2400" b="0" i="0">
+                <a:solidFill>
+                  <a:srgbClr val="202122"/>
+                </a:solidFill>
+                <a:latin typeface="Calibri"/>
+              </a:rPr>
+              <a:t>What is the second stage?</a:t>
+            </a:r>
+          </a:p>
+        </p:txBody>
+      </p:sp>
+      <p:sp>
+        <p:nvSpPr>
+          <p:cNvPr id="8" name="Oval 7"/>
+          <p:cNvSpPr/>
+          <p:nvPr/>
+        </p:nvSpPr>
+        <p:spPr>
+          <a:xfrm>
+            <a:off x="548640" y="3108960"/>
+            <a:ext cx="502920" cy="502920"/>
+          </a:xfrm>
+          <a:prstGeom prst="ellipse">
+            <a:avLst/>
+          </a:prstGeom>
+          <a:solidFill>
+            <a:srgbClr val="E0463A"/>
+          </a:solidFill>
+          <a:ln>
+            <a:noFill/>
+          </a:ln>
+          <a:effectLst/>
+        </p:spPr>
+        <p:style>
+          <a:lnRef idx="1">
+            <a:schemeClr val="accent1"/>
+          </a:lnRef>
+          <a:fillRef idx="3">
+            <a:schemeClr val="accent1"/>
+          </a:fillRef>
+          <a:effectRef idx="2">
+            <a:schemeClr val="accent1"/>
+          </a:effectRef>
+          <a:fontRef idx="minor">
+            <a:schemeClr val="lt1"/>
+          </a:fontRef>
+        </p:style>
+        <p:txBody>
+          <a:bodyPr rtlCol="0" anchor="ctr" lIns="0" rIns="0" tIns="0" bIns="0"/>
+          <a:lstStyle/>
+          <a:p>
+            <a:pPr algn="ctr"/>
+            <a:r>
+              <a:rPr sz="1600" b="1">
+                <a:solidFill>
+                  <a:srgbClr val="FFFFFF"/>
+                </a:solidFill>
+                <a:latin typeface="Calibri"/>
+              </a:rPr>
+              <a:t>2</a:t>
             </a:r>
           </a:p>
         </p:txBody>
@@ -7940,8 +10745,8 @@
         </p:nvSpPr>
         <p:spPr>
           <a:xfrm>
-            <a:off x="8046720" y="2606040"/>
-            <a:ext cx="3291840" cy="365760"/>
+            <a:off x="1371600" y="3063240"/>
+            <a:ext cx="10271455" cy="1188720"/>
           </a:xfrm>
           <a:prstGeom prst="rect">
             <a:avLst/>
@@ -7954,27 +10759,80 @@
           <a:p>
             <a:pPr algn="l"/>
             <a:r>
-              <a:rPr sz="1300" b="1" i="0">
-                <a:solidFill>
-                  <a:srgbClr val="A9C8F0"/>
-                </a:solidFill>
-                <a:latin typeface="Calibri"/>
-              </a:rPr>
-              <a:t>KEY IDEA</a:t>
-            </a:r>
-          </a:p>
-        </p:txBody>
-      </p:sp>
-      <p:sp>
-        <p:nvSpPr>
-          <p:cNvPr id="10" name="TextBox 9"/>
-          <p:cNvSpPr txBox="1"/>
-          <p:nvPr/>
-        </p:nvSpPr>
-        <p:spPr>
-          <a:xfrm>
-            <a:off x="8046720" y="3017520"/>
-            <a:ext cx="3291840" cy="2926080"/>
+              <a:rPr sz="2400" b="0" i="0">
+                <a:solidFill>
+                  <a:srgbClr val="202122"/>
+                </a:solidFill>
+                <a:latin typeface="Calibri"/>
+              </a:rPr>
+              <a:t>Why work on a copy of the evidence?</a:t>
+            </a:r>
+          </a:p>
+        </p:txBody>
+      </p:sp>
+      <p:sp>
+        <p:nvSpPr>
+          <p:cNvPr id="10" name="Oval 9"/>
+          <p:cNvSpPr/>
+          <p:nvPr/>
+        </p:nvSpPr>
+        <p:spPr>
+          <a:xfrm>
+            <a:off x="548640" y="4526280"/>
+            <a:ext cx="502920" cy="502920"/>
+          </a:xfrm>
+          <a:prstGeom prst="ellipse">
+            <a:avLst/>
+          </a:prstGeom>
+          <a:solidFill>
+            <a:srgbClr val="E0463A"/>
+          </a:solidFill>
+          <a:ln>
+            <a:noFill/>
+          </a:ln>
+          <a:effectLst/>
+        </p:spPr>
+        <p:style>
+          <a:lnRef idx="1">
+            <a:schemeClr val="accent1"/>
+          </a:lnRef>
+          <a:fillRef idx="3">
+            <a:schemeClr val="accent1"/>
+          </a:fillRef>
+          <a:effectRef idx="2">
+            <a:schemeClr val="accent1"/>
+          </a:effectRef>
+          <a:fontRef idx="minor">
+            <a:schemeClr val="lt1"/>
+          </a:fontRef>
+        </p:style>
+        <p:txBody>
+          <a:bodyPr rtlCol="0" anchor="ctr" lIns="0" rIns="0" tIns="0" bIns="0"/>
+          <a:lstStyle/>
+          <a:p>
+            <a:pPr algn="ctr"/>
+            <a:r>
+              <a:rPr sz="1600" b="1">
+                <a:solidFill>
+                  <a:srgbClr val="FFFFFF"/>
+                </a:solidFill>
+                <a:latin typeface="Calibri"/>
+              </a:rPr>
+              <a:t>3</a:t>
+            </a:r>
+          </a:p>
+        </p:txBody>
+      </p:sp>
+      <p:sp>
+        <p:nvSpPr>
+          <p:cNvPr id="11" name="TextBox 10"/>
+          <p:cNvSpPr txBox="1"/>
+          <p:nvPr/>
+        </p:nvSpPr>
+        <p:spPr>
+          <a:xfrm>
+            <a:off x="1371600" y="4480560"/>
+            <a:ext cx="10271455" cy="1188720"/>
           </a:xfrm>
           <a:prstGeom prst="rect">
             <a:avLst/>
@@ -7987,13 +10845,46 @@
           <a:p>
             <a:pPr algn="l"/>
             <a:r>
-              <a:rPr sz="2200" b="0" i="0">
-                <a:solidFill>
-                  <a:srgbClr val="FFFFFF"/>
-                </a:solidFill>
-                <a:latin typeface="Cambria"/>
-              </a:rPr>
-              <a:t>Write the executive summary last, and for a manager who will only read that part.</a:t>
+              <a:rPr sz="2400" b="0" i="0">
+                <a:solidFill>
+                  <a:srgbClr val="202122"/>
+                </a:solidFill>
+                <a:latin typeface="Calibri"/>
+              </a:rPr>
+              <a:t>Why document every step?</a:t>
+            </a:r>
+          </a:p>
+        </p:txBody>
+      </p:sp>
+      <p:sp>
+        <p:nvSpPr>
+          <p:cNvPr id="12" name="TextBox 11"/>
+          <p:cNvSpPr txBox="1"/>
+          <p:nvPr/>
+        </p:nvSpPr>
+        <p:spPr>
+          <a:xfrm>
+            <a:off x="548640" y="5852160"/>
+            <a:ext cx="11094415" cy="365760"/>
+          </a:xfrm>
+          <a:prstGeom prst="rect">
+            <a:avLst/>
+          </a:prstGeom>
+          <a:noFill/>
+        </p:spPr>
+        <p:txBody>
+          <a:bodyPr wrap="square" anchor="t" lIns="0" rIns="0" tIns="0" bIns="0"/>
+          <a:lstStyle/>
+          <a:p>
+            <a:pPr algn="l"/>
+            <a:r>
+              <a:rPr sz="1300" b="0" i="1">
+                <a:solidFill>
+                  <a:srgbClr val="54595D"/>
+                </a:solidFill>
+                <a:latin typeface="Calibri"/>
+              </a:rPr>
+              <a:t>Answer on mini whiteboards or in your book. Answers are in the speaker notes.</a:t>
             </a:r>
           </a:p>
         </p:txBody>
@@ -8085,7 +10976,7 @@
                 </a:solidFill>
                 <a:latin typeface="Cambria"/>
               </a:rPr>
-              <a:t>Escalating while preserving evidence</a:t>
+              <a:t>Incident and event management</a:t>
             </a:r>
           </a:p>
         </p:txBody>
@@ -8158,20 +11049,77 @@
       </p:sp>
       <p:sp>
         <p:nvSpPr>
-          <p:cNvPr id="6" name="Rectangle 5"/>
+          <p:cNvPr id="6" name="TextBox 5"/>
+          <p:cNvSpPr txBox="1"/>
+          <p:nvPr/>
+        </p:nvSpPr>
+        <p:spPr>
+          <a:xfrm>
+            <a:off x="548640" y="1554480"/>
+            <a:ext cx="6720840" cy="4617720"/>
+          </a:xfrm>
+          <a:prstGeom prst="rect">
+            <a:avLst/>
+          </a:prstGeom>
+          <a:noFill/>
+        </p:spPr>
+        <p:txBody>
+          <a:bodyPr wrap="square" lIns="0" rIns="0" tIns="0" bIns="0">
+            <a:spAutoFit/>
+          </a:bodyPr>
+          <a:lstStyle/>
+          <a:p>
+            <a:pPr>
+              <a:spcAft>
+                <a:spcPts val="1320"/>
+              </a:spcAft>
+            </a:pPr>
+            <a:r>
+              <a:rPr sz="2200" b="0">
+                <a:solidFill>
+                  <a:srgbClr val="202122"/>
+                </a:solidFill>
+                <a:latin typeface="Calibri"/>
+              </a:rPr>
+              <a:t>Incident management gets from 'something's wrong' to 'resolved and learned from'.</a:t>
+            </a:r>
+          </a:p>
+          <a:p>
+            <a:pPr>
+              <a:spcAft>
+                <a:spcPts val="1320"/>
+              </a:spcAft>
+            </a:pPr>
+            <a:r>
+              <a:rPr sz="2200" b="0">
+                <a:solidFill>
+                  <a:srgbClr val="202122"/>
+                </a:solidFill>
+                <a:latin typeface="Calibri"/>
+              </a:rPr>
+              <a:t>Identify the incident, through the service desk, phone, email, SMS or chat. Log it, manually or automatically. Manage it: raise a ticket, assign the right person and categorise it by business impact. Prioritise it, using SLAs and escalation, reporting crimes to the police and personal data breaches to the ICO (within 72 hours). Resolve it with a workaround or a permanent fix. Close it with an incident report. Document everything and store it in line with data protection law.</a:t>
+            </a:r>
+          </a:p>
+        </p:txBody>
+      </p:sp>
+      <p:sp>
+        <p:nvSpPr>
+          <p:cNvPr id="7" name="Rounded Rectangle 6"/>
           <p:cNvSpPr/>
           <p:nvPr/>
         </p:nvSpPr>
         <p:spPr>
           <a:xfrm>
-            <a:off x="1884006" y="2382012"/>
-            <a:ext cx="8423681" cy="36576"/>
-          </a:xfrm>
-          <a:prstGeom prst="rect">
-            <a:avLst/>
+            <a:off x="7772400" y="1554480"/>
+            <a:ext cx="3867912" cy="4526280"/>
+          </a:xfrm>
+          <a:prstGeom prst="roundRect">
+            <a:avLst>
+              <a:gd name="adj" fmla="val 8000"/>
+            </a:avLst>
           </a:prstGeom>
           <a:solidFill>
-            <a:srgbClr val="A9C8F0"/>
+            <a:srgbClr val="03306E"/>
           </a:solidFill>
           <a:ln>
             <a:noFill/>
@@ -8200,14 +11148,14 @@
       </p:sp>
       <p:sp>
         <p:nvSpPr>
-          <p:cNvPr id="7" name="Oval 6"/>
+          <p:cNvPr id="8" name="Oval 7"/>
           <p:cNvSpPr/>
           <p:nvPr/>
         </p:nvSpPr>
         <p:spPr>
           <a:xfrm>
-            <a:off x="1563966" y="2080260"/>
-            <a:ext cx="640080" cy="640080"/>
+            <a:off x="8046720" y="1828800"/>
+            <a:ext cx="548640" cy="548640"/>
           </a:xfrm>
           <a:prstGeom prst="ellipse">
             <a:avLst/>
@@ -8240,27 +11188,27 @@
           <a:p>
             <a:pPr algn="ctr"/>
             <a:r>
-              <a:rPr sz="2000" b="1">
+              <a:rPr sz="1300" b="1">
                 <a:solidFill>
                   <a:srgbClr val="FFFFFF"/>
                 </a:solidFill>
                 <a:latin typeface="Calibri"/>
               </a:rPr>
-              <a:t>1</a:t>
-            </a:r>
-          </a:p>
-        </p:txBody>
-      </p:sp>
-      <p:sp>
-        <p:nvSpPr>
-          <p:cNvPr id="8" name="TextBox 7"/>
-          <p:cNvSpPr txBox="1"/>
-          <p:nvPr/>
-        </p:nvSpPr>
-        <p:spPr>
-          <a:xfrm>
-            <a:off x="548640" y="2857500"/>
-            <a:ext cx="2670733" cy="731520"/>
+              <a:t>e.g.</a:t>
+            </a:r>
+          </a:p>
+        </p:txBody>
+      </p:sp>
+      <p:sp>
+        <p:nvSpPr>
+          <p:cNvPr id="9" name="TextBox 8"/>
+          <p:cNvSpPr txBox="1"/>
+          <p:nvPr/>
+        </p:nvSpPr>
+        <p:spPr>
+          <a:xfrm>
+            <a:off x="8046720" y="2560320"/>
+            <a:ext cx="3291840" cy="365760"/>
           </a:xfrm>
           <a:prstGeom prst="rect">
             <a:avLst/>
@@ -8271,61 +11219,17 @@
           <a:bodyPr wrap="square" anchor="t" lIns="0" rIns="0" tIns="0" bIns="0"/>
           <a:lstStyle/>
           <a:p>
-            <a:pPr algn="ctr"/>
-            <a:r>
-              <a:rPr sz="1700" b="1" i="0">
-                <a:solidFill>
-                  <a:srgbClr val="03306E"/>
-                </a:solidFill>
-                <a:latin typeface="Calibri"/>
-              </a:rPr>
-              <a:t>Record</a:t>
-            </a:r>
-          </a:p>
-        </p:txBody>
-      </p:sp>
-      <p:sp>
-        <p:nvSpPr>
-          <p:cNvPr id="9" name="Rounded Rectangle 8"/>
-          <p:cNvSpPr/>
-          <p:nvPr/>
-        </p:nvSpPr>
-        <p:spPr>
-          <a:xfrm>
-            <a:off x="548640" y="3634740"/>
-            <a:ext cx="2670733" cy="1234439"/>
-          </a:xfrm>
-          <a:prstGeom prst="roundRect">
-            <a:avLst>
-              <a:gd name="adj" fmla="val 6000"/>
-            </a:avLst>
-          </a:prstGeom>
-          <a:solidFill>
-            <a:srgbClr val="EAF3FF"/>
-          </a:solidFill>
-          <a:ln>
-            <a:noFill/>
-          </a:ln>
-          <a:effectLst/>
-        </p:spPr>
-        <p:style>
-          <a:lnRef idx="1">
-            <a:schemeClr val="accent1"/>
-          </a:lnRef>
-          <a:fillRef idx="3">
-            <a:schemeClr val="accent1"/>
-          </a:fillRef>
-          <a:effectRef idx="2">
-            <a:schemeClr val="accent1"/>
-          </a:effectRef>
-          <a:fontRef idx="minor">
-            <a:schemeClr val="lt1"/>
-          </a:fontRef>
-        </p:style>
-        <p:txBody>
-          <a:bodyPr rtlCol="0" anchor="ctr"/>
-          <a:lstStyle/>
-          <a:p/>
+            <a:pPr algn="l"/>
+            <a:r>
+              <a:rPr sz="1300" b="1" i="0">
+                <a:solidFill>
+                  <a:srgbClr val="A9C8F0"/>
+                </a:solidFill>
+                <a:latin typeface="Calibri"/>
+              </a:rPr>
+              <a:t>EXAMPLE</a:t>
+            </a:r>
+          </a:p>
         </p:txBody>
       </p:sp>
       <p:sp>
@@ -8336,8 +11240,8 @@
         </p:nvSpPr>
         <p:spPr>
           <a:xfrm>
-            <a:off x="685800" y="3771900"/>
-            <a:ext cx="2396413" cy="960119"/>
+            <a:off x="8046720" y="2971800"/>
+            <a:ext cx="3291840" cy="2971800"/>
           </a:xfrm>
           <a:prstGeom prst="rect">
             <a:avLst/>
@@ -8350,535 +11254,13 @@
           <a:p>
             <a:pPr algn="l"/>
             <a:r>
-              <a:rPr sz="1800" b="0" i="0">
-                <a:solidFill>
-                  <a:srgbClr val="202122"/>
-                </a:solidFill>
-                <a:latin typeface="Calibri"/>
-              </a:rPr>
-              <a:t>Date, time and description of the incident.</a:t>
-            </a:r>
-          </a:p>
-        </p:txBody>
-      </p:sp>
-      <p:sp>
-        <p:nvSpPr>
-          <p:cNvPr id="11" name="Oval 10"/>
-          <p:cNvSpPr/>
-          <p:nvPr/>
-        </p:nvSpPr>
-        <p:spPr>
-          <a:xfrm>
-            <a:off x="4371860" y="2080260"/>
-            <a:ext cx="640080" cy="640080"/>
-          </a:xfrm>
-          <a:prstGeom prst="ellipse">
-            <a:avLst/>
-          </a:prstGeom>
-          <a:solidFill>
-            <a:srgbClr val="E0463A"/>
-          </a:solidFill>
-          <a:ln>
-            <a:noFill/>
-          </a:ln>
-          <a:effectLst/>
-        </p:spPr>
-        <p:style>
-          <a:lnRef idx="1">
-            <a:schemeClr val="accent1"/>
-          </a:lnRef>
-          <a:fillRef idx="3">
-            <a:schemeClr val="accent1"/>
-          </a:fillRef>
-          <a:effectRef idx="2">
-            <a:schemeClr val="accent1"/>
-          </a:effectRef>
-          <a:fontRef idx="minor">
-            <a:schemeClr val="lt1"/>
-          </a:fontRef>
-        </p:style>
-        <p:txBody>
-          <a:bodyPr rtlCol="0" anchor="ctr" lIns="0" rIns="0" tIns="0" bIns="0"/>
-          <a:lstStyle/>
-          <a:p>
-            <a:pPr algn="ctr"/>
-            <a:r>
-              <a:rPr sz="2000" b="1">
+              <a:rPr sz="1900" b="0" i="0">
                 <a:solidFill>
                   <a:srgbClr val="FFFFFF"/>
                 </a:solidFill>
-                <a:latin typeface="Calibri"/>
-              </a:rPr>
-              <a:t>2</a:t>
-            </a:r>
-          </a:p>
-        </p:txBody>
-      </p:sp>
-      <p:sp>
-        <p:nvSpPr>
-          <p:cNvPr id="12" name="TextBox 11"/>
-          <p:cNvSpPr txBox="1"/>
-          <p:nvPr/>
-        </p:nvSpPr>
-        <p:spPr>
-          <a:xfrm>
-            <a:off x="3356533" y="2857500"/>
-            <a:ext cx="2670733" cy="731520"/>
-          </a:xfrm>
-          <a:prstGeom prst="rect">
-            <a:avLst/>
-          </a:prstGeom>
-          <a:noFill/>
-        </p:spPr>
-        <p:txBody>
-          <a:bodyPr wrap="square" anchor="t" lIns="0" rIns="0" tIns="0" bIns="0"/>
-          <a:lstStyle/>
-          <a:p>
-            <a:pPr algn="ctr"/>
-            <a:r>
-              <a:rPr sz="1700" b="1" i="0">
-                <a:solidFill>
-                  <a:srgbClr val="03306E"/>
-                </a:solidFill>
-                <a:latin typeface="Calibri"/>
-              </a:rPr>
-              <a:t>Act</a:t>
-            </a:r>
-          </a:p>
-        </p:txBody>
-      </p:sp>
-      <p:sp>
-        <p:nvSpPr>
-          <p:cNvPr id="13" name="Rounded Rectangle 12"/>
-          <p:cNvSpPr/>
-          <p:nvPr/>
-        </p:nvSpPr>
-        <p:spPr>
-          <a:xfrm>
-            <a:off x="3356533" y="3634740"/>
-            <a:ext cx="2670733" cy="1234439"/>
-          </a:xfrm>
-          <a:prstGeom prst="roundRect">
-            <a:avLst>
-              <a:gd name="adj" fmla="val 6000"/>
-            </a:avLst>
-          </a:prstGeom>
-          <a:solidFill>
-            <a:srgbClr val="EAF3FF"/>
-          </a:solidFill>
-          <a:ln>
-            <a:noFill/>
-          </a:ln>
-          <a:effectLst/>
-        </p:spPr>
-        <p:style>
-          <a:lnRef idx="1">
-            <a:schemeClr val="accent1"/>
-          </a:lnRef>
-          <a:fillRef idx="3">
-            <a:schemeClr val="accent1"/>
-          </a:fillRef>
-          <a:effectRef idx="2">
-            <a:schemeClr val="accent1"/>
-          </a:effectRef>
-          <a:fontRef idx="minor">
-            <a:schemeClr val="lt1"/>
-          </a:fontRef>
-        </p:style>
-        <p:txBody>
-          <a:bodyPr rtlCol="0" anchor="ctr"/>
-          <a:lstStyle/>
-          <a:p/>
-        </p:txBody>
-      </p:sp>
-      <p:sp>
-        <p:nvSpPr>
-          <p:cNvPr id="14" name="TextBox 13"/>
-          <p:cNvSpPr txBox="1"/>
-          <p:nvPr/>
-        </p:nvSpPr>
-        <p:spPr>
-          <a:xfrm>
-            <a:off x="3493693" y="3771900"/>
-            <a:ext cx="2396413" cy="960119"/>
-          </a:xfrm>
-          <a:prstGeom prst="rect">
-            <a:avLst/>
-          </a:prstGeom>
-          <a:noFill/>
-        </p:spPr>
-        <p:txBody>
-          <a:bodyPr wrap="square" anchor="t" lIns="0" rIns="0" tIns="0" bIns="0"/>
-          <a:lstStyle/>
-          <a:p>
-            <a:pPr algn="l"/>
-            <a:r>
-              <a:rPr sz="1800" b="0" i="0">
-                <a:solidFill>
-                  <a:srgbClr val="202122"/>
-                </a:solidFill>
-                <a:latin typeface="Calibri"/>
-              </a:rPr>
-              <a:t>e.g. isolate the device from the network.</a:t>
-            </a:r>
-          </a:p>
-        </p:txBody>
-      </p:sp>
-      <p:sp>
-        <p:nvSpPr>
-          <p:cNvPr id="15" name="Oval 14"/>
-          <p:cNvSpPr/>
-          <p:nvPr/>
-        </p:nvSpPr>
-        <p:spPr>
-          <a:xfrm>
-            <a:off x="7179754" y="2080260"/>
-            <a:ext cx="640080" cy="640080"/>
-          </a:xfrm>
-          <a:prstGeom prst="ellipse">
-            <a:avLst/>
-          </a:prstGeom>
-          <a:solidFill>
-            <a:srgbClr val="E0463A"/>
-          </a:solidFill>
-          <a:ln>
-            <a:noFill/>
-          </a:ln>
-          <a:effectLst/>
-        </p:spPr>
-        <p:style>
-          <a:lnRef idx="1">
-            <a:schemeClr val="accent1"/>
-          </a:lnRef>
-          <a:fillRef idx="3">
-            <a:schemeClr val="accent1"/>
-          </a:fillRef>
-          <a:effectRef idx="2">
-            <a:schemeClr val="accent1"/>
-          </a:effectRef>
-          <a:fontRef idx="minor">
-            <a:schemeClr val="lt1"/>
-          </a:fontRef>
-        </p:style>
-        <p:txBody>
-          <a:bodyPr rtlCol="0" anchor="ctr" lIns="0" rIns="0" tIns="0" bIns="0"/>
-          <a:lstStyle/>
-          <a:p>
-            <a:pPr algn="ctr"/>
-            <a:r>
-              <a:rPr sz="2000" b="1">
-                <a:solidFill>
-                  <a:srgbClr val="FFFFFF"/>
-                </a:solidFill>
-                <a:latin typeface="Calibri"/>
-              </a:rPr>
-              <a:t>3</a:t>
-            </a:r>
-          </a:p>
-        </p:txBody>
-      </p:sp>
-      <p:sp>
-        <p:nvSpPr>
-          <p:cNvPr id="16" name="TextBox 15"/>
-          <p:cNvSpPr txBox="1"/>
-          <p:nvPr/>
-        </p:nvSpPr>
-        <p:spPr>
-          <a:xfrm>
-            <a:off x="6164427" y="2857500"/>
-            <a:ext cx="2670733" cy="731520"/>
-          </a:xfrm>
-          <a:prstGeom prst="rect">
-            <a:avLst/>
-          </a:prstGeom>
-          <a:noFill/>
-        </p:spPr>
-        <p:txBody>
-          <a:bodyPr wrap="square" anchor="t" lIns="0" rIns="0" tIns="0" bIns="0"/>
-          <a:lstStyle/>
-          <a:p>
-            <a:pPr algn="ctr"/>
-            <a:r>
-              <a:rPr sz="1700" b="1" i="0">
-                <a:solidFill>
-                  <a:srgbClr val="03306E"/>
-                </a:solidFill>
-                <a:latin typeface="Calibri"/>
-              </a:rPr>
-              <a:t>Preserve</a:t>
-            </a:r>
-          </a:p>
-        </p:txBody>
-      </p:sp>
-      <p:sp>
-        <p:nvSpPr>
-          <p:cNvPr id="17" name="Rounded Rectangle 16"/>
-          <p:cNvSpPr/>
-          <p:nvPr/>
-        </p:nvSpPr>
-        <p:spPr>
-          <a:xfrm>
-            <a:off x="6164427" y="3634740"/>
-            <a:ext cx="2670733" cy="1234439"/>
-          </a:xfrm>
-          <a:prstGeom prst="roundRect">
-            <a:avLst>
-              <a:gd name="adj" fmla="val 6000"/>
-            </a:avLst>
-          </a:prstGeom>
-          <a:solidFill>
-            <a:srgbClr val="EAF3FF"/>
-          </a:solidFill>
-          <a:ln>
-            <a:noFill/>
-          </a:ln>
-          <a:effectLst/>
-        </p:spPr>
-        <p:style>
-          <a:lnRef idx="1">
-            <a:schemeClr val="accent1"/>
-          </a:lnRef>
-          <a:fillRef idx="3">
-            <a:schemeClr val="accent1"/>
-          </a:fillRef>
-          <a:effectRef idx="2">
-            <a:schemeClr val="accent1"/>
-          </a:effectRef>
-          <a:fontRef idx="minor">
-            <a:schemeClr val="lt1"/>
-          </a:fontRef>
-        </p:style>
-        <p:txBody>
-          <a:bodyPr rtlCol="0" anchor="ctr"/>
-          <a:lstStyle/>
-          <a:p/>
-        </p:txBody>
-      </p:sp>
-      <p:sp>
-        <p:nvSpPr>
-          <p:cNvPr id="18" name="TextBox 17"/>
-          <p:cNvSpPr txBox="1"/>
-          <p:nvPr/>
-        </p:nvSpPr>
-        <p:spPr>
-          <a:xfrm>
-            <a:off x="6301587" y="3771900"/>
-            <a:ext cx="2396413" cy="960119"/>
-          </a:xfrm>
-          <a:prstGeom prst="rect">
-            <a:avLst/>
-          </a:prstGeom>
-          <a:noFill/>
-        </p:spPr>
-        <p:txBody>
-          <a:bodyPr wrap="square" anchor="t" lIns="0" rIns="0" tIns="0" bIns="0"/>
-          <a:lstStyle/>
-          <a:p>
-            <a:pPr algn="l"/>
-            <a:r>
-              <a:rPr sz="1800" b="0" i="0">
-                <a:solidFill>
-                  <a:srgbClr val="202122"/>
-                </a:solidFill>
-                <a:latin typeface="Calibri"/>
-              </a:rPr>
-              <a:t>Copy the relevant log files.</a:t>
-            </a:r>
-          </a:p>
-        </p:txBody>
-      </p:sp>
-      <p:sp>
-        <p:nvSpPr>
-          <p:cNvPr id="19" name="Oval 18"/>
-          <p:cNvSpPr/>
-          <p:nvPr/>
-        </p:nvSpPr>
-        <p:spPr>
-          <a:xfrm>
-            <a:off x="9987648" y="2080260"/>
-            <a:ext cx="640080" cy="640080"/>
-          </a:xfrm>
-          <a:prstGeom prst="ellipse">
-            <a:avLst/>
-          </a:prstGeom>
-          <a:solidFill>
-            <a:srgbClr val="E0463A"/>
-          </a:solidFill>
-          <a:ln>
-            <a:noFill/>
-          </a:ln>
-          <a:effectLst/>
-        </p:spPr>
-        <p:style>
-          <a:lnRef idx="1">
-            <a:schemeClr val="accent1"/>
-          </a:lnRef>
-          <a:fillRef idx="3">
-            <a:schemeClr val="accent1"/>
-          </a:fillRef>
-          <a:effectRef idx="2">
-            <a:schemeClr val="accent1"/>
-          </a:effectRef>
-          <a:fontRef idx="minor">
-            <a:schemeClr val="lt1"/>
-          </a:fontRef>
-        </p:style>
-        <p:txBody>
-          <a:bodyPr rtlCol="0" anchor="ctr" lIns="0" rIns="0" tIns="0" bIns="0"/>
-          <a:lstStyle/>
-          <a:p>
-            <a:pPr algn="ctr"/>
-            <a:r>
-              <a:rPr sz="2000" b="1">
-                <a:solidFill>
-                  <a:srgbClr val="FFFFFF"/>
-                </a:solidFill>
-                <a:latin typeface="Calibri"/>
-              </a:rPr>
-              <a:t>4</a:t>
-            </a:r>
-          </a:p>
-        </p:txBody>
-      </p:sp>
-      <p:sp>
-        <p:nvSpPr>
-          <p:cNvPr id="20" name="TextBox 19"/>
-          <p:cNvSpPr txBox="1"/>
-          <p:nvPr/>
-        </p:nvSpPr>
-        <p:spPr>
-          <a:xfrm>
-            <a:off x="8972321" y="2857500"/>
-            <a:ext cx="2670733" cy="731520"/>
-          </a:xfrm>
-          <a:prstGeom prst="rect">
-            <a:avLst/>
-          </a:prstGeom>
-          <a:noFill/>
-        </p:spPr>
-        <p:txBody>
-          <a:bodyPr wrap="square" anchor="t" lIns="0" rIns="0" tIns="0" bIns="0"/>
-          <a:lstStyle/>
-          <a:p>
-            <a:pPr algn="ctr"/>
-            <a:r>
-              <a:rPr sz="1700" b="1" i="0">
-                <a:solidFill>
-                  <a:srgbClr val="03306E"/>
-                </a:solidFill>
-                <a:latin typeface="Calibri"/>
-              </a:rPr>
-              <a:t>Escalate</a:t>
-            </a:r>
-          </a:p>
-        </p:txBody>
-      </p:sp>
-      <p:sp>
-        <p:nvSpPr>
-          <p:cNvPr id="21" name="Rounded Rectangle 20"/>
-          <p:cNvSpPr/>
-          <p:nvPr/>
-        </p:nvSpPr>
-        <p:spPr>
-          <a:xfrm>
-            <a:off x="8972321" y="3634740"/>
-            <a:ext cx="2670733" cy="1234439"/>
-          </a:xfrm>
-          <a:prstGeom prst="roundRect">
-            <a:avLst>
-              <a:gd name="adj" fmla="val 6000"/>
-            </a:avLst>
-          </a:prstGeom>
-          <a:solidFill>
-            <a:srgbClr val="EAF3FF"/>
-          </a:solidFill>
-          <a:ln>
-            <a:noFill/>
-          </a:ln>
-          <a:effectLst/>
-        </p:spPr>
-        <p:style>
-          <a:lnRef idx="1">
-            <a:schemeClr val="accent1"/>
-          </a:lnRef>
-          <a:fillRef idx="3">
-            <a:schemeClr val="accent1"/>
-          </a:fillRef>
-          <a:effectRef idx="2">
-            <a:schemeClr val="accent1"/>
-          </a:effectRef>
-          <a:fontRef idx="minor">
-            <a:schemeClr val="lt1"/>
-          </a:fontRef>
-        </p:style>
-        <p:txBody>
-          <a:bodyPr rtlCol="0" anchor="ctr"/>
-          <a:lstStyle/>
-          <a:p/>
-        </p:txBody>
-      </p:sp>
-      <p:sp>
-        <p:nvSpPr>
-          <p:cNvPr id="22" name="TextBox 21"/>
-          <p:cNvSpPr txBox="1"/>
-          <p:nvPr/>
-        </p:nvSpPr>
-        <p:spPr>
-          <a:xfrm>
-            <a:off x="9109481" y="3771900"/>
-            <a:ext cx="2396413" cy="960119"/>
-          </a:xfrm>
-          <a:prstGeom prst="rect">
-            <a:avLst/>
-          </a:prstGeom>
-          <a:noFill/>
-        </p:spPr>
-        <p:txBody>
-          <a:bodyPr wrap="square" anchor="t" lIns="0" rIns="0" tIns="0" bIns="0"/>
-          <a:lstStyle/>
-          <a:p>
-            <a:pPr algn="l"/>
-            <a:r>
-              <a:rPr sz="1800" b="0" i="0">
-                <a:solidFill>
-                  <a:srgbClr val="202122"/>
-                </a:solidFill>
-                <a:latin typeface="Calibri"/>
-              </a:rPr>
-              <a:t>Pass to the right person or authority.</a:t>
-            </a:r>
-          </a:p>
-        </p:txBody>
-      </p:sp>
-      <p:sp>
-        <p:nvSpPr>
-          <p:cNvPr id="23" name="TextBox 22"/>
-          <p:cNvSpPr txBox="1"/>
-          <p:nvPr/>
-        </p:nvSpPr>
-        <p:spPr>
-          <a:xfrm>
-            <a:off x="548640" y="5143500"/>
-            <a:ext cx="11094415" cy="548640"/>
-          </a:xfrm>
-          <a:prstGeom prst="rect">
-            <a:avLst/>
-          </a:prstGeom>
-          <a:noFill/>
-        </p:spPr>
-        <p:txBody>
-          <a:bodyPr wrap="square" anchor="t" lIns="0" rIns="0" tIns="0" bIns="0"/>
-          <a:lstStyle/>
-          <a:p>
-            <a:pPr algn="l"/>
-            <a:r>
-              <a:rPr sz="1600" b="0" i="1">
-                <a:solidFill>
-                  <a:srgbClr val="54595D"/>
-                </a:solidFill>
-                <a:latin typeface="Calibri"/>
-              </a:rPr>
-              <a:t>Isolating rather than powering off keeps evidence in memory that would otherwise be lost.</a:t>
+                <a:latin typeface="Cambria"/>
+              </a:rPr>
+              <a:t>A monitoring alert shows mass file changes at 2am. It's logged automatically, escalated as critical, the server isolated, backups restored, and the ICO informed.</a:t>
             </a:r>
           </a:p>
         </p:txBody>
@@ -8970,7 +11352,7 @@
                 </a:solidFill>
                 <a:latin typeface="Cambria"/>
               </a:rPr>
-              <a:t>Check your understanding</a:t>
+              <a:t>Incident and event management</a:t>
             </a:r>
           </a:p>
         </p:txBody>
@@ -9043,14 +11425,56 @@
       </p:sp>
       <p:sp>
         <p:nvSpPr>
-          <p:cNvPr id="6" name="Oval 5"/>
+          <p:cNvPr id="6" name="Rectangle 5"/>
           <p:cNvSpPr/>
           <p:nvPr/>
         </p:nvSpPr>
         <p:spPr>
           <a:xfrm>
-            <a:off x="548640" y="1618488"/>
-            <a:ext cx="411480" cy="411480"/>
+            <a:off x="1282315" y="2808732"/>
+            <a:ext cx="9627064" cy="36576"/>
+          </a:xfrm>
+          <a:prstGeom prst="rect">
+            <a:avLst/>
+          </a:prstGeom>
+          <a:solidFill>
+            <a:srgbClr val="A9C8F0"/>
+          </a:solidFill>
+          <a:ln>
+            <a:noFill/>
+          </a:ln>
+          <a:effectLst/>
+        </p:spPr>
+        <p:style>
+          <a:lnRef idx="1">
+            <a:schemeClr val="accent1"/>
+          </a:lnRef>
+          <a:fillRef idx="3">
+            <a:schemeClr val="accent1"/>
+          </a:fillRef>
+          <a:effectRef idx="2">
+            <a:schemeClr val="accent1"/>
+          </a:effectRef>
+          <a:fontRef idx="minor">
+            <a:schemeClr val="lt1"/>
+          </a:fontRef>
+        </p:style>
+        <p:txBody>
+          <a:bodyPr rtlCol="0" anchor="ctr"/>
+          <a:lstStyle/>
+          <a:p/>
+        </p:txBody>
+      </p:sp>
+      <p:sp>
+        <p:nvSpPr>
+          <p:cNvPr id="7" name="Oval 6"/>
+          <p:cNvSpPr/>
+          <p:nvPr/>
+        </p:nvSpPr>
+        <p:spPr>
+          <a:xfrm>
+            <a:off x="962275" y="2506980"/>
+            <a:ext cx="640080" cy="640080"/>
           </a:xfrm>
           <a:prstGeom prst="ellipse">
             <a:avLst/>
@@ -9083,7 +11507,7 @@
           <a:p>
             <a:pPr algn="ctr"/>
             <a:r>
-              <a:rPr sz="1400" b="1">
+              <a:rPr sz="2000" b="1">
                 <a:solidFill>
                   <a:srgbClr val="FFFFFF"/>
                 </a:solidFill>
@@ -9096,14 +11520,14 @@
       </p:sp>
       <p:sp>
         <p:nvSpPr>
-          <p:cNvPr id="7" name="TextBox 6"/>
-          <p:cNvSpPr txBox="1"/>
-          <p:nvPr/>
-        </p:nvSpPr>
-        <p:spPr>
-          <a:xfrm>
-            <a:off x="1234440" y="1600200"/>
-            <a:ext cx="10408615" cy="1030986"/>
+          <p:cNvPr id="8" name="TextBox 7"/>
+          <p:cNvSpPr txBox="1"/>
+          <p:nvPr/>
+        </p:nvSpPr>
+        <p:spPr>
+          <a:xfrm>
+            <a:off x="548640" y="3284219"/>
+            <a:ext cx="1467350" cy="731520"/>
           </a:xfrm>
           <a:prstGeom prst="rect">
             <a:avLst/>
@@ -9114,29 +11538,106 @@
           <a:bodyPr wrap="square" anchor="t" lIns="0" rIns="0" tIns="0" bIns="0"/>
           <a:lstStyle/>
           <a:p>
+            <a:pPr algn="ctr"/>
+            <a:r>
+              <a:rPr sz="1700" b="1" i="0">
+                <a:solidFill>
+                  <a:srgbClr val="03306E"/>
+                </a:solidFill>
+                <a:latin typeface="Calibri"/>
+              </a:rPr>
+              <a:t>Identify</a:t>
+            </a:r>
+          </a:p>
+        </p:txBody>
+      </p:sp>
+      <p:sp>
+        <p:nvSpPr>
+          <p:cNvPr id="9" name="Rounded Rectangle 8"/>
+          <p:cNvSpPr/>
+          <p:nvPr/>
+        </p:nvSpPr>
+        <p:spPr>
+          <a:xfrm>
+            <a:off x="548640" y="4061460"/>
+            <a:ext cx="1467350" cy="1203960"/>
+          </a:xfrm>
+          <a:prstGeom prst="roundRect">
+            <a:avLst>
+              <a:gd name="adj" fmla="val 6000"/>
+            </a:avLst>
+          </a:prstGeom>
+          <a:solidFill>
+            <a:srgbClr val="EAF3FF"/>
+          </a:solidFill>
+          <a:ln>
+            <a:noFill/>
+          </a:ln>
+          <a:effectLst/>
+        </p:spPr>
+        <p:style>
+          <a:lnRef idx="1">
+            <a:schemeClr val="accent1"/>
+          </a:lnRef>
+          <a:fillRef idx="3">
+            <a:schemeClr val="accent1"/>
+          </a:fillRef>
+          <a:effectRef idx="2">
+            <a:schemeClr val="accent1"/>
+          </a:effectRef>
+          <a:fontRef idx="minor">
+            <a:schemeClr val="lt1"/>
+          </a:fontRef>
+        </p:style>
+        <p:txBody>
+          <a:bodyPr rtlCol="0" anchor="ctr"/>
+          <a:lstStyle/>
+          <a:p/>
+        </p:txBody>
+      </p:sp>
+      <p:sp>
+        <p:nvSpPr>
+          <p:cNvPr id="10" name="TextBox 9"/>
+          <p:cNvSpPr txBox="1"/>
+          <p:nvPr/>
+        </p:nvSpPr>
+        <p:spPr>
+          <a:xfrm>
+            <a:off x="685800" y="4198620"/>
+            <a:ext cx="1193030" cy="929640"/>
+          </a:xfrm>
+          <a:prstGeom prst="rect">
+            <a:avLst/>
+          </a:prstGeom>
+          <a:noFill/>
+        </p:spPr>
+        <p:txBody>
+          <a:bodyPr wrap="square" anchor="t" lIns="0" rIns="0" tIns="0" bIns="0"/>
+          <a:lstStyle/>
+          <a:p>
             <a:pPr algn="l"/>
             <a:r>
-              <a:rPr sz="2200" b="0" i="0">
+              <a:rPr sz="1300" b="0" i="0">
                 <a:solidFill>
                   <a:srgbClr val="202122"/>
                 </a:solidFill>
                 <a:latin typeface="Calibri"/>
               </a:rPr>
-              <a:t>What is the second stage of the forensic compliance model?</a:t>
-            </a:r>
-          </a:p>
-        </p:txBody>
-      </p:sp>
-      <p:sp>
-        <p:nvSpPr>
-          <p:cNvPr id="8" name="Oval 7"/>
+              <a:t>Via service desk, phone, email, SMS or chat.</a:t>
+            </a:r>
+          </a:p>
+        </p:txBody>
+      </p:sp>
+      <p:sp>
+        <p:nvSpPr>
+          <p:cNvPr id="11" name="Oval 10"/>
           <p:cNvSpPr/>
           <p:nvPr/>
         </p:nvSpPr>
         <p:spPr>
           <a:xfrm>
-            <a:off x="548640" y="2814066"/>
-            <a:ext cx="411480" cy="411480"/>
+            <a:off x="2566786" y="2506980"/>
+            <a:ext cx="640080" cy="640080"/>
           </a:xfrm>
           <a:prstGeom prst="ellipse">
             <a:avLst/>
@@ -9169,7 +11670,7 @@
           <a:p>
             <a:pPr algn="ctr"/>
             <a:r>
-              <a:rPr sz="1400" b="1">
+              <a:rPr sz="2000" b="1">
                 <a:solidFill>
                   <a:srgbClr val="FFFFFF"/>
                 </a:solidFill>
@@ -9182,14 +11683,14 @@
       </p:sp>
       <p:sp>
         <p:nvSpPr>
-          <p:cNvPr id="9" name="TextBox 8"/>
-          <p:cNvSpPr txBox="1"/>
-          <p:nvPr/>
-        </p:nvSpPr>
-        <p:spPr>
-          <a:xfrm>
-            <a:off x="1234440" y="2795778"/>
-            <a:ext cx="10408615" cy="1030986"/>
+          <p:cNvPr id="12" name="TextBox 11"/>
+          <p:cNvSpPr txBox="1"/>
+          <p:nvPr/>
+        </p:nvSpPr>
+        <p:spPr>
+          <a:xfrm>
+            <a:off x="2153150" y="3284219"/>
+            <a:ext cx="1467350" cy="731520"/>
           </a:xfrm>
           <a:prstGeom prst="rect">
             <a:avLst/>
@@ -9200,29 +11701,106 @@
           <a:bodyPr wrap="square" anchor="t" lIns="0" rIns="0" tIns="0" bIns="0"/>
           <a:lstStyle/>
           <a:p>
+            <a:pPr algn="ctr"/>
+            <a:r>
+              <a:rPr sz="1700" b="1" i="0">
+                <a:solidFill>
+                  <a:srgbClr val="03306E"/>
+                </a:solidFill>
+                <a:latin typeface="Calibri"/>
+              </a:rPr>
+              <a:t>Log</a:t>
+            </a:r>
+          </a:p>
+        </p:txBody>
+      </p:sp>
+      <p:sp>
+        <p:nvSpPr>
+          <p:cNvPr id="13" name="Rounded Rectangle 12"/>
+          <p:cNvSpPr/>
+          <p:nvPr/>
+        </p:nvSpPr>
+        <p:spPr>
+          <a:xfrm>
+            <a:off x="2153150" y="4061460"/>
+            <a:ext cx="1467350" cy="1203960"/>
+          </a:xfrm>
+          <a:prstGeom prst="roundRect">
+            <a:avLst>
+              <a:gd name="adj" fmla="val 6000"/>
+            </a:avLst>
+          </a:prstGeom>
+          <a:solidFill>
+            <a:srgbClr val="EAF3FF"/>
+          </a:solidFill>
+          <a:ln>
+            <a:noFill/>
+          </a:ln>
+          <a:effectLst/>
+        </p:spPr>
+        <p:style>
+          <a:lnRef idx="1">
+            <a:schemeClr val="accent1"/>
+          </a:lnRef>
+          <a:fillRef idx="3">
+            <a:schemeClr val="accent1"/>
+          </a:fillRef>
+          <a:effectRef idx="2">
+            <a:schemeClr val="accent1"/>
+          </a:effectRef>
+          <a:fontRef idx="minor">
+            <a:schemeClr val="lt1"/>
+          </a:fontRef>
+        </p:style>
+        <p:txBody>
+          <a:bodyPr rtlCol="0" anchor="ctr"/>
+          <a:lstStyle/>
+          <a:p/>
+        </p:txBody>
+      </p:sp>
+      <p:sp>
+        <p:nvSpPr>
+          <p:cNvPr id="14" name="TextBox 13"/>
+          <p:cNvSpPr txBox="1"/>
+          <p:nvPr/>
+        </p:nvSpPr>
+        <p:spPr>
+          <a:xfrm>
+            <a:off x="2290310" y="4198620"/>
+            <a:ext cx="1193030" cy="929640"/>
+          </a:xfrm>
+          <a:prstGeom prst="rect">
+            <a:avLst/>
+          </a:prstGeom>
+          <a:noFill/>
+        </p:spPr>
+        <p:txBody>
+          <a:bodyPr wrap="square" anchor="t" lIns="0" rIns="0" tIns="0" bIns="0"/>
+          <a:lstStyle/>
+          <a:p>
             <a:pPr algn="l"/>
             <a:r>
-              <a:rPr sz="2200" b="0" i="0">
+              <a:rPr sz="1300" b="0" i="0">
                 <a:solidFill>
                   <a:srgbClr val="202122"/>
                 </a:solidFill>
                 <a:latin typeface="Calibri"/>
               </a:rPr>
-              <a:t>Who should a personal data breach be reported to?</a:t>
-            </a:r>
-          </a:p>
-        </p:txBody>
-      </p:sp>
-      <p:sp>
-        <p:nvSpPr>
-          <p:cNvPr id="10" name="Oval 9"/>
+              <a:t>Manually or automatically by monitoring.</a:t>
+            </a:r>
+          </a:p>
+        </p:txBody>
+      </p:sp>
+      <p:sp>
+        <p:nvSpPr>
+          <p:cNvPr id="15" name="Oval 14"/>
           <p:cNvSpPr/>
           <p:nvPr/>
         </p:nvSpPr>
         <p:spPr>
           <a:xfrm>
-            <a:off x="548640" y="4009644"/>
-            <a:ext cx="411480" cy="411480"/>
+            <a:off x="4171296" y="2506980"/>
+            <a:ext cx="640080" cy="640080"/>
           </a:xfrm>
           <a:prstGeom prst="ellipse">
             <a:avLst/>
@@ -9255,7 +11833,7 @@
           <a:p>
             <a:pPr algn="ctr"/>
             <a:r>
-              <a:rPr sz="1400" b="1">
+              <a:rPr sz="2000" b="1">
                 <a:solidFill>
                   <a:srgbClr val="FFFFFF"/>
                 </a:solidFill>
@@ -9268,14 +11846,14 @@
       </p:sp>
       <p:sp>
         <p:nvSpPr>
-          <p:cNvPr id="11" name="TextBox 10"/>
-          <p:cNvSpPr txBox="1"/>
-          <p:nvPr/>
-        </p:nvSpPr>
-        <p:spPr>
-          <a:xfrm>
-            <a:off x="1234440" y="3991356"/>
-            <a:ext cx="10408615" cy="1030986"/>
+          <p:cNvPr id="16" name="TextBox 15"/>
+          <p:cNvSpPr txBox="1"/>
+          <p:nvPr/>
+        </p:nvSpPr>
+        <p:spPr>
+          <a:xfrm>
+            <a:off x="3757661" y="3284219"/>
+            <a:ext cx="1467350" cy="731520"/>
           </a:xfrm>
           <a:prstGeom prst="rect">
             <a:avLst/>
@@ -9286,29 +11864,106 @@
           <a:bodyPr wrap="square" anchor="t" lIns="0" rIns="0" tIns="0" bIns="0"/>
           <a:lstStyle/>
           <a:p>
+            <a:pPr algn="ctr"/>
+            <a:r>
+              <a:rPr sz="1700" b="1" i="0">
+                <a:solidFill>
+                  <a:srgbClr val="03306E"/>
+                </a:solidFill>
+                <a:latin typeface="Calibri"/>
+              </a:rPr>
+              <a:t>Manage</a:t>
+            </a:r>
+          </a:p>
+        </p:txBody>
+      </p:sp>
+      <p:sp>
+        <p:nvSpPr>
+          <p:cNvPr id="17" name="Rounded Rectangle 16"/>
+          <p:cNvSpPr/>
+          <p:nvPr/>
+        </p:nvSpPr>
+        <p:spPr>
+          <a:xfrm>
+            <a:off x="3757661" y="4061460"/>
+            <a:ext cx="1467350" cy="1203960"/>
+          </a:xfrm>
+          <a:prstGeom prst="roundRect">
+            <a:avLst>
+              <a:gd name="adj" fmla="val 6000"/>
+            </a:avLst>
+          </a:prstGeom>
+          <a:solidFill>
+            <a:srgbClr val="EAF3FF"/>
+          </a:solidFill>
+          <a:ln>
+            <a:noFill/>
+          </a:ln>
+          <a:effectLst/>
+        </p:spPr>
+        <p:style>
+          <a:lnRef idx="1">
+            <a:schemeClr val="accent1"/>
+          </a:lnRef>
+          <a:fillRef idx="3">
+            <a:schemeClr val="accent1"/>
+          </a:fillRef>
+          <a:effectRef idx="2">
+            <a:schemeClr val="accent1"/>
+          </a:effectRef>
+          <a:fontRef idx="minor">
+            <a:schemeClr val="lt1"/>
+          </a:fontRef>
+        </p:style>
+        <p:txBody>
+          <a:bodyPr rtlCol="0" anchor="ctr"/>
+          <a:lstStyle/>
+          <a:p/>
+        </p:txBody>
+      </p:sp>
+      <p:sp>
+        <p:nvSpPr>
+          <p:cNvPr id="18" name="TextBox 17"/>
+          <p:cNvSpPr txBox="1"/>
+          <p:nvPr/>
+        </p:nvSpPr>
+        <p:spPr>
+          <a:xfrm>
+            <a:off x="3894821" y="4198620"/>
+            <a:ext cx="1193030" cy="929640"/>
+          </a:xfrm>
+          <a:prstGeom prst="rect">
+            <a:avLst/>
+          </a:prstGeom>
+          <a:noFill/>
+        </p:spPr>
+        <p:txBody>
+          <a:bodyPr wrap="square" anchor="t" lIns="0" rIns="0" tIns="0" bIns="0"/>
+          <a:lstStyle/>
+          <a:p>
             <a:pPr algn="l"/>
             <a:r>
-              <a:rPr sz="2200" b="0" i="0">
+              <a:rPr sz="1300" b="0" i="0">
                 <a:solidFill>
                   <a:srgbClr val="202122"/>
                 </a:solidFill>
                 <a:latin typeface="Calibri"/>
               </a:rPr>
-              <a:t>Name three sections of an incident report.</a:t>
-            </a:r>
-          </a:p>
-        </p:txBody>
-      </p:sp>
-      <p:sp>
-        <p:nvSpPr>
-          <p:cNvPr id="12" name="Oval 11"/>
+              <a:t>Raise a ticket, assign, categorise by impact.</a:t>
+            </a:r>
+          </a:p>
+        </p:txBody>
+      </p:sp>
+      <p:sp>
+        <p:nvSpPr>
+          <p:cNvPr id="19" name="Oval 18"/>
           <p:cNvSpPr/>
           <p:nvPr/>
         </p:nvSpPr>
         <p:spPr>
           <a:xfrm>
-            <a:off x="548640" y="5205221"/>
-            <a:ext cx="411480" cy="411480"/>
+            <a:off x="5775807" y="2506980"/>
+            <a:ext cx="640080" cy="640080"/>
           </a:xfrm>
           <a:prstGeom prst="ellipse">
             <a:avLst/>
@@ -9341,7 +11996,7 @@
           <a:p>
             <a:pPr algn="ctr"/>
             <a:r>
-              <a:rPr sz="1400" b="1">
+              <a:rPr sz="2000" b="1">
                 <a:solidFill>
                   <a:srgbClr val="FFFFFF"/>
                 </a:solidFill>
@@ -9354,14 +12009,14 @@
       </p:sp>
       <p:sp>
         <p:nvSpPr>
-          <p:cNvPr id="13" name="TextBox 12"/>
-          <p:cNvSpPr txBox="1"/>
-          <p:nvPr/>
-        </p:nvSpPr>
-        <p:spPr>
-          <a:xfrm>
-            <a:off x="1234440" y="5186933"/>
-            <a:ext cx="10408615" cy="1030986"/>
+          <p:cNvPr id="20" name="TextBox 19"/>
+          <p:cNvSpPr txBox="1"/>
+          <p:nvPr/>
+        </p:nvSpPr>
+        <p:spPr>
+          <a:xfrm>
+            <a:off x="5362172" y="3284219"/>
+            <a:ext cx="1467350" cy="731520"/>
           </a:xfrm>
           <a:prstGeom prst="rect">
             <a:avLst/>
@@ -9372,15 +12027,581 @@
           <a:bodyPr wrap="square" anchor="t" lIns="0" rIns="0" tIns="0" bIns="0"/>
           <a:lstStyle/>
           <a:p>
+            <a:pPr algn="ctr"/>
+            <a:r>
+              <a:rPr sz="1700" b="1" i="0">
+                <a:solidFill>
+                  <a:srgbClr val="03306E"/>
+                </a:solidFill>
+                <a:latin typeface="Calibri"/>
+              </a:rPr>
+              <a:t>Prioritise</a:t>
+            </a:r>
+          </a:p>
+        </p:txBody>
+      </p:sp>
+      <p:sp>
+        <p:nvSpPr>
+          <p:cNvPr id="21" name="Rounded Rectangle 20"/>
+          <p:cNvSpPr/>
+          <p:nvPr/>
+        </p:nvSpPr>
+        <p:spPr>
+          <a:xfrm>
+            <a:off x="5362172" y="4061460"/>
+            <a:ext cx="1467350" cy="1203960"/>
+          </a:xfrm>
+          <a:prstGeom prst="roundRect">
+            <a:avLst>
+              <a:gd name="adj" fmla="val 6000"/>
+            </a:avLst>
+          </a:prstGeom>
+          <a:solidFill>
+            <a:srgbClr val="EAF3FF"/>
+          </a:solidFill>
+          <a:ln>
+            <a:noFill/>
+          </a:ln>
+          <a:effectLst/>
+        </p:spPr>
+        <p:style>
+          <a:lnRef idx="1">
+            <a:schemeClr val="accent1"/>
+          </a:lnRef>
+          <a:fillRef idx="3">
+            <a:schemeClr val="accent1"/>
+          </a:fillRef>
+          <a:effectRef idx="2">
+            <a:schemeClr val="accent1"/>
+          </a:effectRef>
+          <a:fontRef idx="minor">
+            <a:schemeClr val="lt1"/>
+          </a:fontRef>
+        </p:style>
+        <p:txBody>
+          <a:bodyPr rtlCol="0" anchor="ctr"/>
+          <a:lstStyle/>
+          <a:p/>
+        </p:txBody>
+      </p:sp>
+      <p:sp>
+        <p:nvSpPr>
+          <p:cNvPr id="22" name="TextBox 21"/>
+          <p:cNvSpPr txBox="1"/>
+          <p:nvPr/>
+        </p:nvSpPr>
+        <p:spPr>
+          <a:xfrm>
+            <a:off x="5499332" y="4198620"/>
+            <a:ext cx="1193030" cy="929640"/>
+          </a:xfrm>
+          <a:prstGeom prst="rect">
+            <a:avLst/>
+          </a:prstGeom>
+          <a:noFill/>
+        </p:spPr>
+        <p:txBody>
+          <a:bodyPr wrap="square" anchor="t" lIns="0" rIns="0" tIns="0" bIns="0"/>
+          <a:lstStyle/>
+          <a:p>
             <a:pPr algn="l"/>
             <a:r>
-              <a:rPr sz="2200" b="0" i="0">
+              <a:rPr sz="1300" b="0" i="0">
                 <a:solidFill>
                   <a:srgbClr val="202122"/>
                 </a:solidFill>
                 <a:latin typeface="Calibri"/>
               </a:rPr>
-              <a:t>Why isolate a device rather than switch it off?</a:t>
+              <a:t>Urgency, SLAs, escalation; report crimes and breaches.</a:t>
+            </a:r>
+          </a:p>
+        </p:txBody>
+      </p:sp>
+      <p:sp>
+        <p:nvSpPr>
+          <p:cNvPr id="23" name="Oval 22"/>
+          <p:cNvSpPr/>
+          <p:nvPr/>
+        </p:nvSpPr>
+        <p:spPr>
+          <a:xfrm>
+            <a:off x="7380318" y="2506980"/>
+            <a:ext cx="640080" cy="640080"/>
+          </a:xfrm>
+          <a:prstGeom prst="ellipse">
+            <a:avLst/>
+          </a:prstGeom>
+          <a:solidFill>
+            <a:srgbClr val="E0463A"/>
+          </a:solidFill>
+          <a:ln>
+            <a:noFill/>
+          </a:ln>
+          <a:effectLst/>
+        </p:spPr>
+        <p:style>
+          <a:lnRef idx="1">
+            <a:schemeClr val="accent1"/>
+          </a:lnRef>
+          <a:fillRef idx="3">
+            <a:schemeClr val="accent1"/>
+          </a:fillRef>
+          <a:effectRef idx="2">
+            <a:schemeClr val="accent1"/>
+          </a:effectRef>
+          <a:fontRef idx="minor">
+            <a:schemeClr val="lt1"/>
+          </a:fontRef>
+        </p:style>
+        <p:txBody>
+          <a:bodyPr rtlCol="0" anchor="ctr" lIns="0" rIns="0" tIns="0" bIns="0"/>
+          <a:lstStyle/>
+          <a:p>
+            <a:pPr algn="ctr"/>
+            <a:r>
+              <a:rPr sz="2000" b="1">
+                <a:solidFill>
+                  <a:srgbClr val="FFFFFF"/>
+                </a:solidFill>
+                <a:latin typeface="Calibri"/>
+              </a:rPr>
+              <a:t>5</a:t>
+            </a:r>
+          </a:p>
+        </p:txBody>
+      </p:sp>
+      <p:sp>
+        <p:nvSpPr>
+          <p:cNvPr id="24" name="TextBox 23"/>
+          <p:cNvSpPr txBox="1"/>
+          <p:nvPr/>
+        </p:nvSpPr>
+        <p:spPr>
+          <a:xfrm>
+            <a:off x="6966682" y="3284219"/>
+            <a:ext cx="1467350" cy="731520"/>
+          </a:xfrm>
+          <a:prstGeom prst="rect">
+            <a:avLst/>
+          </a:prstGeom>
+          <a:noFill/>
+        </p:spPr>
+        <p:txBody>
+          <a:bodyPr wrap="square" anchor="t" lIns="0" rIns="0" tIns="0" bIns="0"/>
+          <a:lstStyle/>
+          <a:p>
+            <a:pPr algn="ctr"/>
+            <a:r>
+              <a:rPr sz="1700" b="1" i="0">
+                <a:solidFill>
+                  <a:srgbClr val="03306E"/>
+                </a:solidFill>
+                <a:latin typeface="Calibri"/>
+              </a:rPr>
+              <a:t>Resolve</a:t>
+            </a:r>
+          </a:p>
+        </p:txBody>
+      </p:sp>
+      <p:sp>
+        <p:nvSpPr>
+          <p:cNvPr id="25" name="Rounded Rectangle 24"/>
+          <p:cNvSpPr/>
+          <p:nvPr/>
+        </p:nvSpPr>
+        <p:spPr>
+          <a:xfrm>
+            <a:off x="6966682" y="4061460"/>
+            <a:ext cx="1467350" cy="1203960"/>
+          </a:xfrm>
+          <a:prstGeom prst="roundRect">
+            <a:avLst>
+              <a:gd name="adj" fmla="val 6000"/>
+            </a:avLst>
+          </a:prstGeom>
+          <a:solidFill>
+            <a:srgbClr val="EAF3FF"/>
+          </a:solidFill>
+          <a:ln>
+            <a:noFill/>
+          </a:ln>
+          <a:effectLst/>
+        </p:spPr>
+        <p:style>
+          <a:lnRef idx="1">
+            <a:schemeClr val="accent1"/>
+          </a:lnRef>
+          <a:fillRef idx="3">
+            <a:schemeClr val="accent1"/>
+          </a:fillRef>
+          <a:effectRef idx="2">
+            <a:schemeClr val="accent1"/>
+          </a:effectRef>
+          <a:fontRef idx="minor">
+            <a:schemeClr val="lt1"/>
+          </a:fontRef>
+        </p:style>
+        <p:txBody>
+          <a:bodyPr rtlCol="0" anchor="ctr"/>
+          <a:lstStyle/>
+          <a:p/>
+        </p:txBody>
+      </p:sp>
+      <p:sp>
+        <p:nvSpPr>
+          <p:cNvPr id="26" name="TextBox 25"/>
+          <p:cNvSpPr txBox="1"/>
+          <p:nvPr/>
+        </p:nvSpPr>
+        <p:spPr>
+          <a:xfrm>
+            <a:off x="7103842" y="4198620"/>
+            <a:ext cx="1193030" cy="929640"/>
+          </a:xfrm>
+          <a:prstGeom prst="rect">
+            <a:avLst/>
+          </a:prstGeom>
+          <a:noFill/>
+        </p:spPr>
+        <p:txBody>
+          <a:bodyPr wrap="square" anchor="t" lIns="0" rIns="0" tIns="0" bIns="0"/>
+          <a:lstStyle/>
+          <a:p>
+            <a:pPr algn="l"/>
+            <a:r>
+              <a:rPr sz="1300" b="0" i="0">
+                <a:solidFill>
+                  <a:srgbClr val="202122"/>
+                </a:solidFill>
+                <a:latin typeface="Calibri"/>
+              </a:rPr>
+              <a:t>Workaround or permanent fix.</a:t>
+            </a:r>
+          </a:p>
+        </p:txBody>
+      </p:sp>
+      <p:sp>
+        <p:nvSpPr>
+          <p:cNvPr id="27" name="Oval 26"/>
+          <p:cNvSpPr/>
+          <p:nvPr/>
+        </p:nvSpPr>
+        <p:spPr>
+          <a:xfrm>
+            <a:off x="8984829" y="2506980"/>
+            <a:ext cx="640080" cy="640080"/>
+          </a:xfrm>
+          <a:prstGeom prst="ellipse">
+            <a:avLst/>
+          </a:prstGeom>
+          <a:solidFill>
+            <a:srgbClr val="E0463A"/>
+          </a:solidFill>
+          <a:ln>
+            <a:noFill/>
+          </a:ln>
+          <a:effectLst/>
+        </p:spPr>
+        <p:style>
+          <a:lnRef idx="1">
+            <a:schemeClr val="accent1"/>
+          </a:lnRef>
+          <a:fillRef idx="3">
+            <a:schemeClr val="accent1"/>
+          </a:fillRef>
+          <a:effectRef idx="2">
+            <a:schemeClr val="accent1"/>
+          </a:effectRef>
+          <a:fontRef idx="minor">
+            <a:schemeClr val="lt1"/>
+          </a:fontRef>
+        </p:style>
+        <p:txBody>
+          <a:bodyPr rtlCol="0" anchor="ctr" lIns="0" rIns="0" tIns="0" bIns="0"/>
+          <a:lstStyle/>
+          <a:p>
+            <a:pPr algn="ctr"/>
+            <a:r>
+              <a:rPr sz="2000" b="1">
+                <a:solidFill>
+                  <a:srgbClr val="FFFFFF"/>
+                </a:solidFill>
+                <a:latin typeface="Calibri"/>
+              </a:rPr>
+              <a:t>6</a:t>
+            </a:r>
+          </a:p>
+        </p:txBody>
+      </p:sp>
+      <p:sp>
+        <p:nvSpPr>
+          <p:cNvPr id="28" name="TextBox 27"/>
+          <p:cNvSpPr txBox="1"/>
+          <p:nvPr/>
+        </p:nvSpPr>
+        <p:spPr>
+          <a:xfrm>
+            <a:off x="8571193" y="3284219"/>
+            <a:ext cx="1467350" cy="731520"/>
+          </a:xfrm>
+          <a:prstGeom prst="rect">
+            <a:avLst/>
+          </a:prstGeom>
+          <a:noFill/>
+        </p:spPr>
+        <p:txBody>
+          <a:bodyPr wrap="square" anchor="t" lIns="0" rIns="0" tIns="0" bIns="0"/>
+          <a:lstStyle/>
+          <a:p>
+            <a:pPr algn="ctr"/>
+            <a:r>
+              <a:rPr sz="1700" b="1" i="0">
+                <a:solidFill>
+                  <a:srgbClr val="03306E"/>
+                </a:solidFill>
+                <a:latin typeface="Calibri"/>
+              </a:rPr>
+              <a:t>Close</a:t>
+            </a:r>
+          </a:p>
+        </p:txBody>
+      </p:sp>
+      <p:sp>
+        <p:nvSpPr>
+          <p:cNvPr id="29" name="Rounded Rectangle 28"/>
+          <p:cNvSpPr/>
+          <p:nvPr/>
+        </p:nvSpPr>
+        <p:spPr>
+          <a:xfrm>
+            <a:off x="8571193" y="4061460"/>
+            <a:ext cx="1467350" cy="1203960"/>
+          </a:xfrm>
+          <a:prstGeom prst="roundRect">
+            <a:avLst>
+              <a:gd name="adj" fmla="val 6000"/>
+            </a:avLst>
+          </a:prstGeom>
+          <a:solidFill>
+            <a:srgbClr val="EAF3FF"/>
+          </a:solidFill>
+          <a:ln>
+            <a:noFill/>
+          </a:ln>
+          <a:effectLst/>
+        </p:spPr>
+        <p:style>
+          <a:lnRef idx="1">
+            <a:schemeClr val="accent1"/>
+          </a:lnRef>
+          <a:fillRef idx="3">
+            <a:schemeClr val="accent1"/>
+          </a:fillRef>
+          <a:effectRef idx="2">
+            <a:schemeClr val="accent1"/>
+          </a:effectRef>
+          <a:fontRef idx="minor">
+            <a:schemeClr val="lt1"/>
+          </a:fontRef>
+        </p:style>
+        <p:txBody>
+          <a:bodyPr rtlCol="0" anchor="ctr"/>
+          <a:lstStyle/>
+          <a:p/>
+        </p:txBody>
+      </p:sp>
+      <p:sp>
+        <p:nvSpPr>
+          <p:cNvPr id="30" name="TextBox 29"/>
+          <p:cNvSpPr txBox="1"/>
+          <p:nvPr/>
+        </p:nvSpPr>
+        <p:spPr>
+          <a:xfrm>
+            <a:off x="8708353" y="4198620"/>
+            <a:ext cx="1193030" cy="929640"/>
+          </a:xfrm>
+          <a:prstGeom prst="rect">
+            <a:avLst/>
+          </a:prstGeom>
+          <a:noFill/>
+        </p:spPr>
+        <p:txBody>
+          <a:bodyPr wrap="square" anchor="t" lIns="0" rIns="0" tIns="0" bIns="0"/>
+          <a:lstStyle/>
+          <a:p>
+            <a:pPr algn="l"/>
+            <a:r>
+              <a:rPr sz="1300" b="0" i="0">
+                <a:solidFill>
+                  <a:srgbClr val="202122"/>
+                </a:solidFill>
+                <a:latin typeface="Calibri"/>
+              </a:rPr>
+              <a:t>Confirm and write an incident report.</a:t>
+            </a:r>
+          </a:p>
+        </p:txBody>
+      </p:sp>
+      <p:sp>
+        <p:nvSpPr>
+          <p:cNvPr id="31" name="Oval 30"/>
+          <p:cNvSpPr/>
+          <p:nvPr/>
+        </p:nvSpPr>
+        <p:spPr>
+          <a:xfrm>
+            <a:off x="10589339" y="2506980"/>
+            <a:ext cx="640080" cy="640080"/>
+          </a:xfrm>
+          <a:prstGeom prst="ellipse">
+            <a:avLst/>
+          </a:prstGeom>
+          <a:solidFill>
+            <a:srgbClr val="E0463A"/>
+          </a:solidFill>
+          <a:ln>
+            <a:noFill/>
+          </a:ln>
+          <a:effectLst/>
+        </p:spPr>
+        <p:style>
+          <a:lnRef idx="1">
+            <a:schemeClr val="accent1"/>
+          </a:lnRef>
+          <a:fillRef idx="3">
+            <a:schemeClr val="accent1"/>
+          </a:fillRef>
+          <a:effectRef idx="2">
+            <a:schemeClr val="accent1"/>
+          </a:effectRef>
+          <a:fontRef idx="minor">
+            <a:schemeClr val="lt1"/>
+          </a:fontRef>
+        </p:style>
+        <p:txBody>
+          <a:bodyPr rtlCol="0" anchor="ctr" lIns="0" rIns="0" tIns="0" bIns="0"/>
+          <a:lstStyle/>
+          <a:p>
+            <a:pPr algn="ctr"/>
+            <a:r>
+              <a:rPr sz="2000" b="1">
+                <a:solidFill>
+                  <a:srgbClr val="FFFFFF"/>
+                </a:solidFill>
+                <a:latin typeface="Calibri"/>
+              </a:rPr>
+              <a:t>7</a:t>
+            </a:r>
+          </a:p>
+        </p:txBody>
+      </p:sp>
+      <p:sp>
+        <p:nvSpPr>
+          <p:cNvPr id="32" name="TextBox 31"/>
+          <p:cNvSpPr txBox="1"/>
+          <p:nvPr/>
+        </p:nvSpPr>
+        <p:spPr>
+          <a:xfrm>
+            <a:off x="10175704" y="3284219"/>
+            <a:ext cx="1467350" cy="731520"/>
+          </a:xfrm>
+          <a:prstGeom prst="rect">
+            <a:avLst/>
+          </a:prstGeom>
+          <a:noFill/>
+        </p:spPr>
+        <p:txBody>
+          <a:bodyPr wrap="square" anchor="t" lIns="0" rIns="0" tIns="0" bIns="0"/>
+          <a:lstStyle/>
+          <a:p>
+            <a:pPr algn="ctr"/>
+            <a:r>
+              <a:rPr sz="1700" b="1" i="0">
+                <a:solidFill>
+                  <a:srgbClr val="03306E"/>
+                </a:solidFill>
+                <a:latin typeface="Calibri"/>
+              </a:rPr>
+              <a:t>Document</a:t>
+            </a:r>
+          </a:p>
+        </p:txBody>
+      </p:sp>
+      <p:sp>
+        <p:nvSpPr>
+          <p:cNvPr id="33" name="Rounded Rectangle 32"/>
+          <p:cNvSpPr/>
+          <p:nvPr/>
+        </p:nvSpPr>
+        <p:spPr>
+          <a:xfrm>
+            <a:off x="10175704" y="4061460"/>
+            <a:ext cx="1467350" cy="1203960"/>
+          </a:xfrm>
+          <a:prstGeom prst="roundRect">
+            <a:avLst>
+              <a:gd name="adj" fmla="val 6000"/>
+            </a:avLst>
+          </a:prstGeom>
+          <a:solidFill>
+            <a:srgbClr val="EAF3FF"/>
+          </a:solidFill>
+          <a:ln>
+            <a:noFill/>
+          </a:ln>
+          <a:effectLst/>
+        </p:spPr>
+        <p:style>
+          <a:lnRef idx="1">
+            <a:schemeClr val="accent1"/>
+          </a:lnRef>
+          <a:fillRef idx="3">
+            <a:schemeClr val="accent1"/>
+          </a:fillRef>
+          <a:effectRef idx="2">
+            <a:schemeClr val="accent1"/>
+          </a:effectRef>
+          <a:fontRef idx="minor">
+            <a:schemeClr val="lt1"/>
+          </a:fontRef>
+        </p:style>
+        <p:txBody>
+          <a:bodyPr rtlCol="0" anchor="ctr"/>
+          <a:lstStyle/>
+          <a:p/>
+        </p:txBody>
+      </p:sp>
+      <p:sp>
+        <p:nvSpPr>
+          <p:cNvPr id="34" name="TextBox 33"/>
+          <p:cNvSpPr txBox="1"/>
+          <p:nvPr/>
+        </p:nvSpPr>
+        <p:spPr>
+          <a:xfrm>
+            <a:off x="10312864" y="4198620"/>
+            <a:ext cx="1193030" cy="929640"/>
+          </a:xfrm>
+          <a:prstGeom prst="rect">
+            <a:avLst/>
+          </a:prstGeom>
+          <a:noFill/>
+        </p:spPr>
+        <p:txBody>
+          <a:bodyPr wrap="square" anchor="t" lIns="0" rIns="0" tIns="0" bIns="0"/>
+          <a:lstStyle/>
+          <a:p>
+            <a:pPr algn="l"/>
+            <a:r>
+              <a:rPr sz="1300" b="0" i="0">
+                <a:solidFill>
+                  <a:srgbClr val="202122"/>
+                </a:solidFill>
+                <a:latin typeface="Calibri"/>
+              </a:rPr>
+              <a:t>Store records per data protection law.</a:t>
             </a:r>
           </a:p>
         </p:txBody>
@@ -9472,7 +12693,7 @@
                 </a:solidFill>
                 <a:latin typeface="Cambria"/>
               </a:rPr>
-              <a:t>Answers</a:t>
+              <a:t>Quick check: Incident and event management</a:t>
             </a:r>
           </a:p>
         </p:txBody>
@@ -9551,8 +12772,8 @@
         </p:nvSpPr>
         <p:spPr>
           <a:xfrm>
-            <a:off x="548640" y="1618488"/>
-            <a:ext cx="411480" cy="411480"/>
+            <a:off x="548640" y="1691640"/>
+            <a:ext cx="502920" cy="502920"/>
           </a:xfrm>
           <a:prstGeom prst="ellipse">
             <a:avLst/>
@@ -9585,7 +12806,7 @@
           <a:p>
             <a:pPr algn="ctr"/>
             <a:r>
-              <a:rPr sz="1400" b="1">
+              <a:rPr sz="1600" b="1">
                 <a:solidFill>
                   <a:srgbClr val="FFFFFF"/>
                 </a:solidFill>
@@ -9604,8 +12825,8 @@
         </p:nvSpPr>
         <p:spPr>
           <a:xfrm>
-            <a:off x="1234440" y="1600200"/>
-            <a:ext cx="10408615" cy="1030986"/>
+            <a:off x="1371600" y="1645920"/>
+            <a:ext cx="10271455" cy="1188720"/>
           </a:xfrm>
           <a:prstGeom prst="rect">
             <a:avLst/>
@@ -9618,24 +12839,13 @@
           <a:p>
             <a:pPr algn="l"/>
             <a:r>
-              <a:rPr sz="1800" b="0" i="0">
-                <a:solidFill>
-                  <a:srgbClr val="54595D"/>
-                </a:solidFill>
-                <a:latin typeface="Calibri"/>
-              </a:rPr>
-              <a:t>What is the second stage of the forensic compliance model?</a:t>
-            </a:r>
-          </a:p>
-          <a:p>
-            <a:r>
-              <a:rPr sz="1800" b="1">
-                <a:solidFill>
-                  <a:srgbClr val="03306E"/>
-                </a:solidFill>
-                <a:latin typeface="Calibri"/>
-              </a:rPr>
-              <a:t>Preservation.</a:t>
+              <a:rPr sz="2400" b="0" i="0">
+                <a:solidFill>
+                  <a:srgbClr val="202122"/>
+                </a:solidFill>
+                <a:latin typeface="Calibri"/>
+              </a:rPr>
+              <a:t>Who must be told about a personal data breach?</a:t>
             </a:r>
           </a:p>
         </p:txBody>
@@ -9648,8 +12858,8 @@
         </p:nvSpPr>
         <p:spPr>
           <a:xfrm>
-            <a:off x="548640" y="2814066"/>
-            <a:ext cx="411480" cy="411480"/>
+            <a:off x="548640" y="3108960"/>
+            <a:ext cx="502920" cy="502920"/>
           </a:xfrm>
           <a:prstGeom prst="ellipse">
             <a:avLst/>
@@ -9682,7 +12892,7 @@
           <a:p>
             <a:pPr algn="ctr"/>
             <a:r>
-              <a:rPr sz="1400" b="1">
+              <a:rPr sz="1600" b="1">
                 <a:solidFill>
                   <a:srgbClr val="FFFFFF"/>
                 </a:solidFill>
@@ -9701,8 +12911,8 @@
         </p:nvSpPr>
         <p:spPr>
           <a:xfrm>
-            <a:off x="1234440" y="2795778"/>
-            <a:ext cx="10408615" cy="1030986"/>
+            <a:off x="1371600" y="3063240"/>
+            <a:ext cx="10271455" cy="1188720"/>
           </a:xfrm>
           <a:prstGeom prst="rect">
             <a:avLst/>
@@ -9715,24 +12925,13 @@
           <a:p>
             <a:pPr algn="l"/>
             <a:r>
-              <a:rPr sz="1800" b="0" i="0">
-                <a:solidFill>
-                  <a:srgbClr val="54595D"/>
-                </a:solidFill>
-                <a:latin typeface="Calibri"/>
-              </a:rPr>
-              <a:t>Who should a personal data breach be reported to?</a:t>
-            </a:r>
-          </a:p>
-          <a:p>
-            <a:r>
-              <a:rPr sz="1800" b="1">
-                <a:solidFill>
-                  <a:srgbClr val="03306E"/>
-                </a:solidFill>
-                <a:latin typeface="Calibri"/>
-              </a:rPr>
-              <a:t>The ICO.</a:t>
+              <a:rPr sz="2400" b="0" i="0">
+                <a:solidFill>
+                  <a:srgbClr val="202122"/>
+                </a:solidFill>
+                <a:latin typeface="Calibri"/>
+              </a:rPr>
+              <a:t>What is the difference between a workaround and a fix?</a:t>
             </a:r>
           </a:p>
         </p:txBody>
@@ -9745,8 +12944,8 @@
         </p:nvSpPr>
         <p:spPr>
           <a:xfrm>
-            <a:off x="548640" y="4009644"/>
-            <a:ext cx="411480" cy="411480"/>
+            <a:off x="548640" y="4526280"/>
+            <a:ext cx="502920" cy="502920"/>
           </a:xfrm>
           <a:prstGeom prst="ellipse">
             <a:avLst/>
@@ -9779,7 +12978,7 @@
           <a:p>
             <a:pPr algn="ctr"/>
             <a:r>
-              <a:rPr sz="1400" b="1">
+              <a:rPr sz="1600" b="1">
                 <a:solidFill>
                   <a:srgbClr val="FFFFFF"/>
                 </a:solidFill>
@@ -9798,8 +12997,8 @@
         </p:nvSpPr>
         <p:spPr>
           <a:xfrm>
-            <a:off x="1234440" y="3991356"/>
-            <a:ext cx="10408615" cy="1030986"/>
+            <a:off x="1371600" y="4480560"/>
+            <a:ext cx="10271455" cy="1188720"/>
           </a:xfrm>
           <a:prstGeom prst="rect">
             <a:avLst/>
@@ -9812,121 +13011,46 @@
           <a:p>
             <a:pPr algn="l"/>
             <a:r>
-              <a:rPr sz="1800" b="0" i="0">
+              <a:rPr sz="2400" b="0" i="0">
+                <a:solidFill>
+                  <a:srgbClr val="202122"/>
+                </a:solidFill>
+                <a:latin typeface="Calibri"/>
+              </a:rPr>
+              <a:t>How is an incident categorised?</a:t>
+            </a:r>
+          </a:p>
+        </p:txBody>
+      </p:sp>
+      <p:sp>
+        <p:nvSpPr>
+          <p:cNvPr id="12" name="TextBox 11"/>
+          <p:cNvSpPr txBox="1"/>
+          <p:nvPr/>
+        </p:nvSpPr>
+        <p:spPr>
+          <a:xfrm>
+            <a:off x="548640" y="5852160"/>
+            <a:ext cx="11094415" cy="365760"/>
+          </a:xfrm>
+          <a:prstGeom prst="rect">
+            <a:avLst/>
+          </a:prstGeom>
+          <a:noFill/>
+        </p:spPr>
+        <p:txBody>
+          <a:bodyPr wrap="square" anchor="t" lIns="0" rIns="0" tIns="0" bIns="0"/>
+          <a:lstStyle/>
+          <a:p>
+            <a:pPr algn="l"/>
+            <a:r>
+              <a:rPr sz="1300" b="0" i="1">
                 <a:solidFill>
                   <a:srgbClr val="54595D"/>
                 </a:solidFill>
                 <a:latin typeface="Calibri"/>
               </a:rPr>
-              <a:t>Name three sections of an incident report.</a:t>
-            </a:r>
-          </a:p>
-          <a:p>
-            <a:r>
-              <a:rPr sz="1800" b="1">
-                <a:solidFill>
-                  <a:srgbClr val="03306E"/>
-                </a:solidFill>
-                <a:latin typeface="Calibri"/>
-              </a:rPr>
-              <a:t>Any three of: executive summary, discovery and investigation, impact, mitigation, recommendations, ongoing risk.</a:t>
-            </a:r>
-          </a:p>
-        </p:txBody>
-      </p:sp>
-      <p:sp>
-        <p:nvSpPr>
-          <p:cNvPr id="12" name="Oval 11"/>
-          <p:cNvSpPr/>
-          <p:nvPr/>
-        </p:nvSpPr>
-        <p:spPr>
-          <a:xfrm>
-            <a:off x="548640" y="5205221"/>
-            <a:ext cx="411480" cy="411480"/>
-          </a:xfrm>
-          <a:prstGeom prst="ellipse">
-            <a:avLst/>
-          </a:prstGeom>
-          <a:solidFill>
-            <a:srgbClr val="E0463A"/>
-          </a:solidFill>
-          <a:ln>
-            <a:noFill/>
-          </a:ln>
-          <a:effectLst/>
-        </p:spPr>
-        <p:style>
-          <a:lnRef idx="1">
-            <a:schemeClr val="accent1"/>
-          </a:lnRef>
-          <a:fillRef idx="3">
-            <a:schemeClr val="accent1"/>
-          </a:fillRef>
-          <a:effectRef idx="2">
-            <a:schemeClr val="accent1"/>
-          </a:effectRef>
-          <a:fontRef idx="minor">
-            <a:schemeClr val="lt1"/>
-          </a:fontRef>
-        </p:style>
-        <p:txBody>
-          <a:bodyPr rtlCol="0" anchor="ctr" lIns="0" rIns="0" tIns="0" bIns="0"/>
-          <a:lstStyle/>
-          <a:p>
-            <a:pPr algn="ctr"/>
-            <a:r>
-              <a:rPr sz="1400" b="1">
-                <a:solidFill>
-                  <a:srgbClr val="FFFFFF"/>
-                </a:solidFill>
-                <a:latin typeface="Calibri"/>
-              </a:rPr>
-              <a:t>4</a:t>
-            </a:r>
-          </a:p>
-        </p:txBody>
-      </p:sp>
-      <p:sp>
-        <p:nvSpPr>
-          <p:cNvPr id="13" name="TextBox 12"/>
-          <p:cNvSpPr txBox="1"/>
-          <p:nvPr/>
-        </p:nvSpPr>
-        <p:spPr>
-          <a:xfrm>
-            <a:off x="1234440" y="5186933"/>
-            <a:ext cx="10408615" cy="1030986"/>
-          </a:xfrm>
-          <a:prstGeom prst="rect">
-            <a:avLst/>
-          </a:prstGeom>
-          <a:noFill/>
-        </p:spPr>
-        <p:txBody>
-          <a:bodyPr wrap="square" anchor="t" lIns="0" rIns="0" tIns="0" bIns="0"/>
-          <a:lstStyle/>
-          <a:p>
-            <a:pPr algn="l"/>
-            <a:r>
-              <a:rPr sz="1800" b="0" i="0">
-                <a:solidFill>
-                  <a:srgbClr val="54595D"/>
-                </a:solidFill>
-                <a:latin typeface="Calibri"/>
-              </a:rPr>
-              <a:t>Why isolate a device rather than switch it off?</a:t>
-            </a:r>
-          </a:p>
-          <a:p>
-            <a:r>
-              <a:rPr sz="1800" b="1">
-                <a:solidFill>
-                  <a:srgbClr val="03306E"/>
-                </a:solidFill>
-                <a:latin typeface="Calibri"/>
-              </a:rPr>
-              <a:t>To stop the spread while preserving evidence held in memory.</a:t>
+              <a:t>Answer on mini whiteboards or in your book. Answers are in the speaker notes.</a:t>
             </a:r>
           </a:p>
         </p:txBody>
@@ -10018,7 +13142,7 @@
                 </a:solidFill>
                 <a:latin typeface="Cambria"/>
               </a:rPr>
-              <a:t>Activity: Handle the incident</a:t>
+              <a:t>The incident report</a:t>
             </a:r>
           </a:p>
         </p:txBody>
@@ -10091,19 +13215,189 @@
       </p:sp>
       <p:sp>
         <p:nvSpPr>
-          <p:cNvPr id="6" name="Rounded Rectangle 5"/>
+          <p:cNvPr id="6" name="TextBox 5"/>
+          <p:cNvSpPr txBox="1"/>
+          <p:nvPr/>
+        </p:nvSpPr>
+        <p:spPr>
+          <a:xfrm>
+            <a:off x="548640" y="1600200"/>
+            <a:ext cx="6675120" cy="4572000"/>
+          </a:xfrm>
+          <a:prstGeom prst="rect">
+            <a:avLst/>
+          </a:prstGeom>
+          <a:noFill/>
+        </p:spPr>
+        <p:txBody>
+          <a:bodyPr wrap="square" lIns="0" rIns="0" tIns="0" bIns="0">
+            <a:spAutoFit/>
+          </a:bodyPr>
+          <a:lstStyle/>
+          <a:p>
+            <a:pPr marL="274320" indent="-274320">
+              <a:spcAft>
+                <a:spcPts val="1080"/>
+              </a:spcAft>
+              <a:buClr>
+                <a:srgbClr val="0645AD"/>
+              </a:buClr>
+              <a:buFont typeface="Arial"/>
+              <a:buChar char="•"/>
+            </a:pPr>
+            <a:r>
+              <a:rPr sz="2400" b="0">
+                <a:solidFill>
+                  <a:srgbClr val="202122"/>
+                </a:solidFill>
+                <a:latin typeface="Calibri"/>
+              </a:rPr>
+              <a:t>Executive summary</a:t>
+            </a:r>
+          </a:p>
+          <a:p>
+            <a:pPr marL="274320" indent="-274320">
+              <a:spcAft>
+                <a:spcPts val="1080"/>
+              </a:spcAft>
+              <a:buClr>
+                <a:srgbClr val="0645AD"/>
+              </a:buClr>
+              <a:buFont typeface="Arial"/>
+              <a:buChar char="•"/>
+            </a:pPr>
+            <a:r>
+              <a:rPr sz="2400" b="0">
+                <a:solidFill>
+                  <a:srgbClr val="202122"/>
+                </a:solidFill>
+                <a:latin typeface="Calibri"/>
+              </a:rPr>
+              <a:t>Discovery and investigation</a:t>
+            </a:r>
+          </a:p>
+          <a:p>
+            <a:pPr marL="274320" indent="-274320">
+              <a:spcAft>
+                <a:spcPts val="1080"/>
+              </a:spcAft>
+              <a:buClr>
+                <a:srgbClr val="0645AD"/>
+              </a:buClr>
+              <a:buFont typeface="Arial"/>
+              <a:buChar char="•"/>
+            </a:pPr>
+            <a:r>
+              <a:rPr sz="2400" b="0">
+                <a:solidFill>
+                  <a:srgbClr val="202122"/>
+                </a:solidFill>
+                <a:latin typeface="Calibri"/>
+              </a:rPr>
+              <a:t>Impact</a:t>
+            </a:r>
+          </a:p>
+          <a:p>
+            <a:pPr marL="274320" indent="-274320">
+              <a:spcAft>
+                <a:spcPts val="1080"/>
+              </a:spcAft>
+              <a:buClr>
+                <a:srgbClr val="0645AD"/>
+              </a:buClr>
+              <a:buFont typeface="Arial"/>
+              <a:buChar char="•"/>
+            </a:pPr>
+            <a:r>
+              <a:rPr sz="2400" b="0">
+                <a:solidFill>
+                  <a:srgbClr val="202122"/>
+                </a:solidFill>
+                <a:latin typeface="Calibri"/>
+              </a:rPr>
+              <a:t>Mitigation</a:t>
+            </a:r>
+          </a:p>
+          <a:p>
+            <a:pPr marL="274320" indent="-274320">
+              <a:spcAft>
+                <a:spcPts val="1080"/>
+              </a:spcAft>
+              <a:buClr>
+                <a:srgbClr val="0645AD"/>
+              </a:buClr>
+              <a:buFont typeface="Arial"/>
+              <a:buChar char="•"/>
+            </a:pPr>
+            <a:r>
+              <a:rPr sz="2400" b="0">
+                <a:solidFill>
+                  <a:srgbClr val="202122"/>
+                </a:solidFill>
+                <a:latin typeface="Calibri"/>
+              </a:rPr>
+              <a:t>Recommendations and any ongoing risk</a:t>
+            </a:r>
+          </a:p>
+        </p:txBody>
+      </p:sp>
+      <p:sp>
+        <p:nvSpPr>
+          <p:cNvPr id="7" name="Rounded Rectangle 6"/>
           <p:cNvSpPr/>
           <p:nvPr/>
         </p:nvSpPr>
         <p:spPr>
           <a:xfrm>
-            <a:off x="548640" y="1508760"/>
-            <a:ext cx="2011680" cy="457200"/>
+            <a:off x="7772400" y="1600200"/>
+            <a:ext cx="3867912" cy="4434840"/>
           </a:xfrm>
           <a:prstGeom prst="roundRect">
             <a:avLst>
-              <a:gd name="adj" fmla="val 50000"/>
+              <a:gd name="adj" fmla="val 8000"/>
             </a:avLst>
+          </a:prstGeom>
+          <a:solidFill>
+            <a:srgbClr val="03306E"/>
+          </a:solidFill>
+          <a:ln>
+            <a:noFill/>
+          </a:ln>
+          <a:effectLst/>
+        </p:spPr>
+        <p:style>
+          <a:lnRef idx="1">
+            <a:schemeClr val="accent1"/>
+          </a:lnRef>
+          <a:fillRef idx="3">
+            <a:schemeClr val="accent1"/>
+          </a:fillRef>
+          <a:effectRef idx="2">
+            <a:schemeClr val="accent1"/>
+          </a:effectRef>
+          <a:fontRef idx="minor">
+            <a:schemeClr val="lt1"/>
+          </a:fontRef>
+        </p:style>
+        <p:txBody>
+          <a:bodyPr rtlCol="0" anchor="ctr"/>
+          <a:lstStyle/>
+          <a:p/>
+        </p:txBody>
+      </p:sp>
+      <p:sp>
+        <p:nvSpPr>
+          <p:cNvPr id="8" name="Oval 7"/>
+          <p:cNvSpPr/>
+          <p:nvPr/>
+        </p:nvSpPr>
+        <p:spPr>
+          <a:xfrm>
+            <a:off x="8046720" y="1874519"/>
+            <a:ext cx="548640" cy="548640"/>
+          </a:xfrm>
+          <a:prstGeom prst="ellipse">
+            <a:avLst/>
           </a:prstGeom>
           <a:solidFill>
             <a:srgbClr val="E0463A"/>
@@ -10128,601 +13422,84 @@
           </a:fontRef>
         </p:style>
         <p:txBody>
-          <a:bodyPr rtlCol="0" anchor="ctr"/>
-          <a:lstStyle/>
-          <a:p/>
-        </p:txBody>
-      </p:sp>
-      <p:sp>
-        <p:nvSpPr>
-          <p:cNvPr id="7" name="TextBox 6"/>
-          <p:cNvSpPr txBox="1"/>
-          <p:nvPr/>
-        </p:nvSpPr>
-        <p:spPr>
-          <a:xfrm>
-            <a:off x="548640" y="1508760"/>
-            <a:ext cx="2011680" cy="457200"/>
-          </a:xfrm>
-          <a:prstGeom prst="rect">
-            <a:avLst/>
-          </a:prstGeom>
-          <a:noFill/>
-        </p:spPr>
-        <p:txBody>
-          <a:bodyPr wrap="square" anchor="ctr" lIns="0" rIns="0" tIns="0" bIns="0"/>
+          <a:bodyPr rtlCol="0" anchor="ctr" lIns="0" rIns="0" tIns="0" bIns="0"/>
           <a:lstStyle/>
           <a:p>
             <a:pPr algn="ctr"/>
             <a:r>
-              <a:rPr sz="1400" b="1" i="0">
+              <a:rPr sz="2000" b="1">
                 <a:solidFill>
                   <a:srgbClr val="FFFFFF"/>
                 </a:solidFill>
                 <a:latin typeface="Calibri"/>
               </a:rPr>
-              <a:t>30 minutes</a:t>
-            </a:r>
-          </a:p>
-        </p:txBody>
-      </p:sp>
-      <p:sp>
-        <p:nvSpPr>
-          <p:cNvPr id="8" name="TextBox 7"/>
-          <p:cNvSpPr txBox="1"/>
-          <p:nvPr/>
-        </p:nvSpPr>
-        <p:spPr>
-          <a:xfrm>
-            <a:off x="2743200" y="1508760"/>
-            <a:ext cx="4754880" cy="457200"/>
-          </a:xfrm>
-          <a:prstGeom prst="rect">
-            <a:avLst/>
-          </a:prstGeom>
-          <a:noFill/>
-        </p:spPr>
-        <p:txBody>
-          <a:bodyPr wrap="square" anchor="ctr" lIns="0" rIns="0" tIns="0" bIns="0"/>
+              <a:t>!</a:t>
+            </a:r>
+          </a:p>
+        </p:txBody>
+      </p:sp>
+      <p:sp>
+        <p:nvSpPr>
+          <p:cNvPr id="9" name="TextBox 8"/>
+          <p:cNvSpPr txBox="1"/>
+          <p:nvPr/>
+        </p:nvSpPr>
+        <p:spPr>
+          <a:xfrm>
+            <a:off x="8046720" y="2606040"/>
+            <a:ext cx="3291840" cy="365760"/>
+          </a:xfrm>
+          <a:prstGeom prst="rect">
+            <a:avLst/>
+          </a:prstGeom>
+          <a:noFill/>
+        </p:spPr>
+        <p:txBody>
+          <a:bodyPr wrap="square" anchor="t" lIns="0" rIns="0" tIns="0" bIns="0"/>
           <a:lstStyle/>
           <a:p>
             <a:pPr algn="l"/>
             <a:r>
-              <a:rPr sz="1400" b="0" i="1">
-                <a:solidFill>
-                  <a:srgbClr val="54595D"/>
-                </a:solidFill>
-                <a:latin typeface="Calibri"/>
-              </a:rPr>
-              <a:t>Small groups</a:t>
-            </a:r>
-          </a:p>
-        </p:txBody>
-      </p:sp>
-      <p:sp>
-        <p:nvSpPr>
-          <p:cNvPr id="9" name="Oval 8"/>
-          <p:cNvSpPr/>
-          <p:nvPr/>
-        </p:nvSpPr>
-        <p:spPr>
-          <a:xfrm>
-            <a:off x="548640" y="2482596"/>
-            <a:ext cx="384048" cy="384048"/>
-          </a:xfrm>
-          <a:prstGeom prst="ellipse">
-            <a:avLst/>
-          </a:prstGeom>
-          <a:solidFill>
-            <a:srgbClr val="0645AD"/>
-          </a:solidFill>
-          <a:ln>
-            <a:noFill/>
-          </a:ln>
-          <a:effectLst/>
-        </p:spPr>
-        <p:style>
-          <a:lnRef idx="1">
-            <a:schemeClr val="accent1"/>
-          </a:lnRef>
-          <a:fillRef idx="3">
-            <a:schemeClr val="accent1"/>
-          </a:fillRef>
-          <a:effectRef idx="2">
-            <a:schemeClr val="accent1"/>
-          </a:effectRef>
-          <a:fontRef idx="minor">
-            <a:schemeClr val="lt1"/>
-          </a:fontRef>
-        </p:style>
-        <p:txBody>
-          <a:bodyPr rtlCol="0" anchor="ctr" lIns="0" rIns="0" tIns="0" bIns="0"/>
-          <a:lstStyle/>
-          <a:p>
-            <a:pPr algn="ctr"/>
-            <a:r>
-              <a:rPr sz="1300" b="1">
+              <a:rPr sz="1300" b="1" i="0">
+                <a:solidFill>
+                  <a:srgbClr val="A9C8F0"/>
+                </a:solidFill>
+                <a:latin typeface="Calibri"/>
+              </a:rPr>
+              <a:t>KEY IDEA</a:t>
+            </a:r>
+          </a:p>
+        </p:txBody>
+      </p:sp>
+      <p:sp>
+        <p:nvSpPr>
+          <p:cNvPr id="10" name="TextBox 9"/>
+          <p:cNvSpPr txBox="1"/>
+          <p:nvPr/>
+        </p:nvSpPr>
+        <p:spPr>
+          <a:xfrm>
+            <a:off x="8046720" y="3017520"/>
+            <a:ext cx="3291840" cy="2926080"/>
+          </a:xfrm>
+          <a:prstGeom prst="rect">
+            <a:avLst/>
+          </a:prstGeom>
+          <a:noFill/>
+        </p:spPr>
+        <p:txBody>
+          <a:bodyPr wrap="square" anchor="t" lIns="0" rIns="0" tIns="0" bIns="0"/>
+          <a:lstStyle/>
+          <a:p>
+            <a:pPr algn="l"/>
+            <a:r>
+              <a:rPr sz="2200" b="0" i="0">
                 <a:solidFill>
                   <a:srgbClr val="FFFFFF"/>
                 </a:solidFill>
-                <a:latin typeface="Calibri"/>
-              </a:rPr>
-              <a:t>1</a:t>
-            </a:r>
-          </a:p>
-        </p:txBody>
-      </p:sp>
-      <p:sp>
-        <p:nvSpPr>
-          <p:cNvPr id="10" name="TextBox 9"/>
-          <p:cNvSpPr txBox="1"/>
-          <p:nvPr/>
-        </p:nvSpPr>
-        <p:spPr>
-          <a:xfrm>
-            <a:off x="1143000" y="2240280"/>
-            <a:ext cx="5943600" cy="868680"/>
-          </a:xfrm>
-          <a:prstGeom prst="rect">
-            <a:avLst/>
-          </a:prstGeom>
-          <a:noFill/>
-        </p:spPr>
-        <p:txBody>
-          <a:bodyPr wrap="square" anchor="ctr" lIns="0" rIns="0" tIns="0" bIns="0"/>
-          <a:lstStyle/>
-          <a:p>
-            <a:pPr algn="l"/>
-            <a:r>
-              <a:rPr sz="1700" b="0" i="0">
-                <a:solidFill>
-                  <a:srgbClr val="202122"/>
-                </a:solidFill>
-                <a:latin typeface="Calibri"/>
-              </a:rPr>
-              <a:t>Scenario: at 09:40 a finance clerk reports a pop-up demanding bitcoin. Two shared drives are now unreadable.</a:t>
-            </a:r>
-          </a:p>
-        </p:txBody>
-      </p:sp>
-      <p:sp>
-        <p:nvSpPr>
-          <p:cNvPr id="11" name="Oval 10"/>
-          <p:cNvSpPr/>
-          <p:nvPr/>
-        </p:nvSpPr>
-        <p:spPr>
-          <a:xfrm>
-            <a:off x="548640" y="3461004"/>
-            <a:ext cx="384048" cy="384048"/>
-          </a:xfrm>
-          <a:prstGeom prst="ellipse">
-            <a:avLst/>
-          </a:prstGeom>
-          <a:solidFill>
-            <a:srgbClr val="0645AD"/>
-          </a:solidFill>
-          <a:ln>
-            <a:noFill/>
-          </a:ln>
-          <a:effectLst/>
-        </p:spPr>
-        <p:style>
-          <a:lnRef idx="1">
-            <a:schemeClr val="accent1"/>
-          </a:lnRef>
-          <a:fillRef idx="3">
-            <a:schemeClr val="accent1"/>
-          </a:fillRef>
-          <a:effectRef idx="2">
-            <a:schemeClr val="accent1"/>
-          </a:effectRef>
-          <a:fontRef idx="minor">
-            <a:schemeClr val="lt1"/>
-          </a:fontRef>
-        </p:style>
-        <p:txBody>
-          <a:bodyPr rtlCol="0" anchor="ctr" lIns="0" rIns="0" tIns="0" bIns="0"/>
-          <a:lstStyle/>
-          <a:p>
-            <a:pPr algn="ctr"/>
-            <a:r>
-              <a:rPr sz="1300" b="1">
-                <a:solidFill>
-                  <a:srgbClr val="FFFFFF"/>
-                </a:solidFill>
-                <a:latin typeface="Calibri"/>
-              </a:rPr>
-              <a:t>2</a:t>
-            </a:r>
-          </a:p>
-        </p:txBody>
-      </p:sp>
-      <p:sp>
-        <p:nvSpPr>
-          <p:cNvPr id="12" name="TextBox 11"/>
-          <p:cNvSpPr txBox="1"/>
-          <p:nvPr/>
-        </p:nvSpPr>
-        <p:spPr>
-          <a:xfrm>
-            <a:off x="1143000" y="3218688"/>
-            <a:ext cx="5943600" cy="868680"/>
-          </a:xfrm>
-          <a:prstGeom prst="rect">
-            <a:avLst/>
-          </a:prstGeom>
-          <a:noFill/>
-        </p:spPr>
-        <p:txBody>
-          <a:bodyPr wrap="square" anchor="ctr" lIns="0" rIns="0" tIns="0" bIns="0"/>
-          <a:lstStyle/>
-          <a:p>
-            <a:pPr algn="l"/>
-            <a:r>
-              <a:rPr sz="1700" b="0" i="0">
-                <a:solidFill>
-                  <a:srgbClr val="202122"/>
-                </a:solidFill>
-                <a:latin typeface="Calibri"/>
-              </a:rPr>
-              <a:t>Work through each incident management stage and record your actions.</a:t>
-            </a:r>
-          </a:p>
-        </p:txBody>
-      </p:sp>
-      <p:sp>
-        <p:nvSpPr>
-          <p:cNvPr id="13" name="Oval 12"/>
-          <p:cNvSpPr/>
-          <p:nvPr/>
-        </p:nvSpPr>
-        <p:spPr>
-          <a:xfrm>
-            <a:off x="548640" y="4439412"/>
-            <a:ext cx="384048" cy="384048"/>
-          </a:xfrm>
-          <a:prstGeom prst="ellipse">
-            <a:avLst/>
-          </a:prstGeom>
-          <a:solidFill>
-            <a:srgbClr val="0645AD"/>
-          </a:solidFill>
-          <a:ln>
-            <a:noFill/>
-          </a:ln>
-          <a:effectLst/>
-        </p:spPr>
-        <p:style>
-          <a:lnRef idx="1">
-            <a:schemeClr val="accent1"/>
-          </a:lnRef>
-          <a:fillRef idx="3">
-            <a:schemeClr val="accent1"/>
-          </a:fillRef>
-          <a:effectRef idx="2">
-            <a:schemeClr val="accent1"/>
-          </a:effectRef>
-          <a:fontRef idx="minor">
-            <a:schemeClr val="lt1"/>
-          </a:fontRef>
-        </p:style>
-        <p:txBody>
-          <a:bodyPr rtlCol="0" anchor="ctr" lIns="0" rIns="0" tIns="0" bIns="0"/>
-          <a:lstStyle/>
-          <a:p>
-            <a:pPr algn="ctr"/>
-            <a:r>
-              <a:rPr sz="1300" b="1">
-                <a:solidFill>
-                  <a:srgbClr val="FFFFFF"/>
-                </a:solidFill>
-                <a:latin typeface="Calibri"/>
-              </a:rPr>
-              <a:t>3</a:t>
-            </a:r>
-          </a:p>
-        </p:txBody>
-      </p:sp>
-      <p:sp>
-        <p:nvSpPr>
-          <p:cNvPr id="14" name="TextBox 13"/>
-          <p:cNvSpPr txBox="1"/>
-          <p:nvPr/>
-        </p:nvSpPr>
-        <p:spPr>
-          <a:xfrm>
-            <a:off x="1143000" y="4197096"/>
-            <a:ext cx="5943600" cy="868680"/>
-          </a:xfrm>
-          <a:prstGeom prst="rect">
-            <a:avLst/>
-          </a:prstGeom>
-          <a:noFill/>
-        </p:spPr>
-        <p:txBody>
-          <a:bodyPr wrap="square" anchor="ctr" lIns="0" rIns="0" tIns="0" bIns="0"/>
-          <a:lstStyle/>
-          <a:p>
-            <a:pPr algn="l"/>
-            <a:r>
-              <a:rPr sz="1700" b="0" i="0">
-                <a:solidFill>
-                  <a:srgbClr val="202122"/>
-                </a:solidFill>
-                <a:latin typeface="Calibri"/>
-              </a:rPr>
-              <a:t>List the evidence you would preserve and how.</a:t>
-            </a:r>
-          </a:p>
-        </p:txBody>
-      </p:sp>
-      <p:sp>
-        <p:nvSpPr>
-          <p:cNvPr id="15" name="Oval 14"/>
-          <p:cNvSpPr/>
-          <p:nvPr/>
-        </p:nvSpPr>
-        <p:spPr>
-          <a:xfrm>
-            <a:off x="548640" y="5417820"/>
-            <a:ext cx="384048" cy="384048"/>
-          </a:xfrm>
-          <a:prstGeom prst="ellipse">
-            <a:avLst/>
-          </a:prstGeom>
-          <a:solidFill>
-            <a:srgbClr val="0645AD"/>
-          </a:solidFill>
-          <a:ln>
-            <a:noFill/>
-          </a:ln>
-          <a:effectLst/>
-        </p:spPr>
-        <p:style>
-          <a:lnRef idx="1">
-            <a:schemeClr val="accent1"/>
-          </a:lnRef>
-          <a:fillRef idx="3">
-            <a:schemeClr val="accent1"/>
-          </a:fillRef>
-          <a:effectRef idx="2">
-            <a:schemeClr val="accent1"/>
-          </a:effectRef>
-          <a:fontRef idx="minor">
-            <a:schemeClr val="lt1"/>
-          </a:fontRef>
-        </p:style>
-        <p:txBody>
-          <a:bodyPr rtlCol="0" anchor="ctr" lIns="0" rIns="0" tIns="0" bIns="0"/>
-          <a:lstStyle/>
-          <a:p>
-            <a:pPr algn="ctr"/>
-            <a:r>
-              <a:rPr sz="1300" b="1">
-                <a:solidFill>
-                  <a:srgbClr val="FFFFFF"/>
-                </a:solidFill>
-                <a:latin typeface="Calibri"/>
-              </a:rPr>
-              <a:t>4</a:t>
-            </a:r>
-          </a:p>
-        </p:txBody>
-      </p:sp>
-      <p:sp>
-        <p:nvSpPr>
-          <p:cNvPr id="16" name="TextBox 15"/>
-          <p:cNvSpPr txBox="1"/>
-          <p:nvPr/>
-        </p:nvSpPr>
-        <p:spPr>
-          <a:xfrm>
-            <a:off x="1143000" y="5175504"/>
-            <a:ext cx="5943600" cy="868680"/>
-          </a:xfrm>
-          <a:prstGeom prst="rect">
-            <a:avLst/>
-          </a:prstGeom>
-          <a:noFill/>
-        </p:spPr>
-        <p:txBody>
-          <a:bodyPr wrap="square" anchor="ctr" lIns="0" rIns="0" tIns="0" bIns="0"/>
-          <a:lstStyle/>
-          <a:p>
-            <a:pPr algn="l"/>
-            <a:r>
-              <a:rPr sz="1700" b="0" i="0">
-                <a:solidFill>
-                  <a:srgbClr val="202122"/>
-                </a:solidFill>
-                <a:latin typeface="Calibri"/>
-              </a:rPr>
-              <a:t>Write the executive summary of the incident report.</a:t>
-            </a:r>
-          </a:p>
-        </p:txBody>
-      </p:sp>
-      <p:sp>
-        <p:nvSpPr>
-          <p:cNvPr id="17" name="Rounded Rectangle 16"/>
-          <p:cNvSpPr/>
-          <p:nvPr/>
-        </p:nvSpPr>
-        <p:spPr>
-          <a:xfrm>
-            <a:off x="7772400" y="1508760"/>
-            <a:ext cx="3867912" cy="4572000"/>
-          </a:xfrm>
-          <a:prstGeom prst="roundRect">
-            <a:avLst>
-              <a:gd name="adj" fmla="val 8000"/>
-            </a:avLst>
-          </a:prstGeom>
-          <a:solidFill>
-            <a:srgbClr val="EAF3FF"/>
-          </a:solidFill>
-          <a:ln>
-            <a:noFill/>
-          </a:ln>
-          <a:effectLst/>
-        </p:spPr>
-        <p:style>
-          <a:lnRef idx="1">
-            <a:schemeClr val="accent1"/>
-          </a:lnRef>
-          <a:fillRef idx="3">
-            <a:schemeClr val="accent1"/>
-          </a:fillRef>
-          <a:effectRef idx="2">
-            <a:schemeClr val="accent1"/>
-          </a:effectRef>
-          <a:fontRef idx="minor">
-            <a:schemeClr val="lt1"/>
-          </a:fontRef>
-        </p:style>
-        <p:txBody>
-          <a:bodyPr rtlCol="0" anchor="ctr"/>
-          <a:lstStyle/>
-          <a:p/>
-        </p:txBody>
-      </p:sp>
-      <p:sp>
-        <p:nvSpPr>
-          <p:cNvPr id="18" name="TextBox 17"/>
-          <p:cNvSpPr txBox="1"/>
-          <p:nvPr/>
-        </p:nvSpPr>
-        <p:spPr>
-          <a:xfrm>
-            <a:off x="8046720" y="1737360"/>
-            <a:ext cx="3291840" cy="365760"/>
-          </a:xfrm>
-          <a:prstGeom prst="rect">
-            <a:avLst/>
-          </a:prstGeom>
-          <a:noFill/>
-        </p:spPr>
-        <p:txBody>
-          <a:bodyPr wrap="square" anchor="t" lIns="0" rIns="0" tIns="0" bIns="0"/>
-          <a:lstStyle/>
-          <a:p>
-            <a:pPr algn="l"/>
-            <a:r>
-              <a:rPr sz="1300" b="1" i="0">
-                <a:solidFill>
-                  <a:srgbClr val="0645AD"/>
-                </a:solidFill>
-                <a:latin typeface="Calibri"/>
-              </a:rPr>
-              <a:t>SUCCESS CRITERIA</a:t>
-            </a:r>
-          </a:p>
-        </p:txBody>
-      </p:sp>
-      <p:sp>
-        <p:nvSpPr>
-          <p:cNvPr id="19" name="TextBox 18"/>
-          <p:cNvSpPr txBox="1"/>
-          <p:nvPr/>
-        </p:nvSpPr>
-        <p:spPr>
-          <a:xfrm>
-            <a:off x="8046720" y="2240280"/>
-            <a:ext cx="3337560" cy="3657600"/>
-          </a:xfrm>
-          <a:prstGeom prst="rect">
-            <a:avLst/>
-          </a:prstGeom>
-          <a:noFill/>
-        </p:spPr>
-        <p:txBody>
-          <a:bodyPr wrap="square" lIns="0" rIns="0" tIns="0" bIns="0">
-            <a:spAutoFit/>
-          </a:bodyPr>
-          <a:lstStyle/>
-          <a:p>
-            <a:pPr marL="274320" indent="-274320">
-              <a:spcAft>
-                <a:spcPts val="810"/>
-              </a:spcAft>
-              <a:buClr>
-                <a:srgbClr val="0645AD"/>
-              </a:buClr>
-              <a:buFont typeface="Arial"/>
-              <a:buChar char="•"/>
-            </a:pPr>
-            <a:r>
-              <a:rPr sz="1800" b="0">
-                <a:solidFill>
-                  <a:srgbClr val="202122"/>
-                </a:solidFill>
-                <a:latin typeface="Calibri"/>
-              </a:rPr>
-              <a:t>Stages in the correct order</a:t>
-            </a:r>
-          </a:p>
-          <a:p>
-            <a:pPr marL="274320" indent="-274320">
-              <a:spcAft>
-                <a:spcPts val="810"/>
-              </a:spcAft>
-              <a:buClr>
-                <a:srgbClr val="0645AD"/>
-              </a:buClr>
-              <a:buFont typeface="Arial"/>
-              <a:buChar char="•"/>
-            </a:pPr>
-            <a:r>
-              <a:rPr sz="1800" b="0">
-                <a:solidFill>
-                  <a:srgbClr val="202122"/>
-                </a:solidFill>
-                <a:latin typeface="Calibri"/>
-              </a:rPr>
-              <a:t>Evidence preserved before remediation</a:t>
-            </a:r>
-          </a:p>
-          <a:p>
-            <a:pPr marL="274320" indent="-274320">
-              <a:spcAft>
-                <a:spcPts val="810"/>
-              </a:spcAft>
-              <a:buClr>
-                <a:srgbClr val="0645AD"/>
-              </a:buClr>
-              <a:buFont typeface="Arial"/>
-              <a:buChar char="•"/>
-            </a:pPr>
-            <a:r>
-              <a:rPr sz="1800" b="0">
-                <a:solidFill>
-                  <a:srgbClr val="202122"/>
-                </a:solidFill>
-                <a:latin typeface="Calibri"/>
-              </a:rPr>
-              <a:t>ICO reporting considered</a:t>
-            </a:r>
-          </a:p>
-          <a:p>
-            <a:pPr marL="274320" indent="-274320">
-              <a:spcAft>
-                <a:spcPts val="810"/>
-              </a:spcAft>
-              <a:buClr>
-                <a:srgbClr val="0645AD"/>
-              </a:buClr>
-              <a:buFont typeface="Arial"/>
-              <a:buChar char="•"/>
-            </a:pPr>
-            <a:r>
-              <a:rPr sz="1800" b="0">
-                <a:solidFill>
-                  <a:srgbClr val="202122"/>
-                </a:solidFill>
-                <a:latin typeface="Calibri"/>
-              </a:rPr>
-              <a:t>Summary is clear to a manager</a:t>
+                <a:latin typeface="Cambria"/>
+              </a:rPr>
+              <a:t>Write the executive summary last, and for a manager who will only read that part.</a:t>
             </a:r>
           </a:p>
         </p:txBody>
